--- a/Paperwork/ПРИ123-РПС-КП-Презентация.pptx
+++ b/Paperwork/ПРИ123-РПС-КП-Презентация.pptx
@@ -1,11 +1,11 @@
 
 <file path=ppt/presentation.xml><?xml version="1.0" encoding="utf-8"?>
-<p:presentation xmlns:a="http://schemas.openxmlformats.org/drawingml/2006/main" xmlns:r="http://schemas.openxmlformats.org/officeDocument/2006/relationships" xmlns:p="http://schemas.openxmlformats.org/presentationml/2006/main" saveSubsetFonts="1" autoCompressPictures="0">
+<p:presentation xmlns:a="http://schemas.openxmlformats.org/drawingml/2006/main" xmlns:r="http://schemas.openxmlformats.org/officeDocument/2006/relationships" xmlns:p="http://schemas.openxmlformats.org/presentationml/2006/main" showSpecialPlsOnTitleSld="0" saveSubsetFonts="1" autoCompressPictures="0">
   <p:sldMasterIdLst>
     <p:sldMasterId id="2147483648" r:id="rId1"/>
   </p:sldMasterIdLst>
   <p:notesMasterIdLst>
-    <p:notesMasterId r:id="rId19"/>
+    <p:notesMasterId r:id="rId15"/>
   </p:notesMasterIdLst>
   <p:sldIdLst>
     <p:sldId id="256" r:id="rId2"/>
@@ -16,15 +16,11 @@
     <p:sldId id="261" r:id="rId7"/>
     <p:sldId id="262" r:id="rId8"/>
     <p:sldId id="263" r:id="rId9"/>
-    <p:sldId id="265" r:id="rId10"/>
-    <p:sldId id="267" r:id="rId11"/>
-    <p:sldId id="268" r:id="rId12"/>
-    <p:sldId id="270" r:id="rId13"/>
-    <p:sldId id="271" r:id="rId14"/>
-    <p:sldId id="272" r:id="rId15"/>
-    <p:sldId id="273" r:id="rId16"/>
-    <p:sldId id="275" r:id="rId17"/>
-    <p:sldId id="276" r:id="rId18"/>
+    <p:sldId id="268" r:id="rId10"/>
+    <p:sldId id="270" r:id="rId11"/>
+    <p:sldId id="273" r:id="rId12"/>
+    <p:sldId id="275" r:id="rId13"/>
+    <p:sldId id="276" r:id="rId14"/>
   </p:sldIdLst>
   <p:sldSz cx="12192000" cy="6858000"/>
   <p:notesSz cx="6858000" cy="12192000"/>
@@ -281,6 +277,13 @@
           </p:nvPr>
         </p:nvSpPr>
         <p:spPr/>
+        <p:txBody>
+          <a:bodyPr/>
+          <a:lstStyle/>
+          <a:p>
+            <a:endParaRPr lang="ru-RU"/>
+          </a:p>
+        </p:txBody>
       </p:sp>
       <p:sp>
         <p:nvSpPr>
@@ -365,6 +368,13 @@
           </p:nvPr>
         </p:nvSpPr>
         <p:spPr/>
+        <p:txBody>
+          <a:bodyPr/>
+          <a:lstStyle/>
+          <a:p>
+            <a:endParaRPr lang="ru-RU"/>
+          </a:p>
+        </p:txBody>
       </p:sp>
       <p:sp>
         <p:nvSpPr>
@@ -449,6 +459,13 @@
           </p:nvPr>
         </p:nvSpPr>
         <p:spPr/>
+        <p:txBody>
+          <a:bodyPr/>
+          <a:lstStyle/>
+          <a:p>
+            <a:endParaRPr lang="ru-RU"/>
+          </a:p>
+        </p:txBody>
       </p:sp>
       <p:sp>
         <p:nvSpPr>
@@ -533,6 +550,13 @@
           </p:nvPr>
         </p:nvSpPr>
         <p:spPr/>
+        <p:txBody>
+          <a:bodyPr/>
+          <a:lstStyle/>
+          <a:p>
+            <a:endParaRPr lang="ru-RU"/>
+          </a:p>
+        </p:txBody>
       </p:sp>
       <p:sp>
         <p:nvSpPr>
@@ -617,6 +641,13 @@
           </p:nvPr>
         </p:nvSpPr>
         <p:spPr/>
+        <p:txBody>
+          <a:bodyPr/>
+          <a:lstStyle/>
+          <a:p>
+            <a:endParaRPr lang="ru-RU"/>
+          </a:p>
+        </p:txBody>
       </p:sp>
       <p:sp>
         <p:nvSpPr>
@@ -655,342 +686,6 @@
             <a:fld id="{F7021451-1387-4CA6-816F-3879F97B5CBC}" type="slidenum">
               <a:rPr lang="en-US"/>
               <a:t>13</a:t>
-            </a:fld>
-            <a:endParaRPr lang="en-US"/>
-          </a:p>
-        </p:txBody>
-      </p:sp>
-    </p:spTree>
-    <p:extLst>
-      <p:ext uri="{BB962C8B-B14F-4D97-AF65-F5344CB8AC3E}">
-        <p14:creationId xmlns:p14="http://schemas.microsoft.com/office/powerpoint/2010/main" val="1024086991"/>
-      </p:ext>
-    </p:extLst>
-  </p:cSld>
-  <p:clrMapOvr>
-    <a:masterClrMapping/>
-  </p:clrMapOvr>
-</p:notes>
-</file>
-
-<file path=ppt/notesSlides/notesSlide14.xml><?xml version="1.0" encoding="utf-8"?>
-<p:notes xmlns:a="http://schemas.openxmlformats.org/drawingml/2006/main" xmlns:r="http://schemas.openxmlformats.org/officeDocument/2006/relationships" xmlns:p="http://schemas.openxmlformats.org/presentationml/2006/main">
-  <p:cSld>
-    <p:spTree>
-      <p:nvGrpSpPr>
-        <p:cNvPr id="1" name=""/>
-        <p:cNvGrpSpPr/>
-        <p:nvPr/>
-      </p:nvGrpSpPr>
-      <p:grpSpPr>
-        <a:xfrm>
-          <a:off x="0" y="0"/>
-          <a:ext cx="0" cy="0"/>
-          <a:chOff x="0" y="0"/>
-          <a:chExt cx="0" cy="0"/>
-        </a:xfrm>
-      </p:grpSpPr>
-      <p:sp>
-        <p:nvSpPr>
-          <p:cNvPr id="2" name="Slide Image Placeholder 1"/>
-          <p:cNvSpPr>
-            <a:spLocks noGrp="1" noRot="1" noChangeAspect="1"/>
-          </p:cNvSpPr>
-          <p:nvPr>
-            <p:ph type="sldImg"/>
-          </p:nvPr>
-        </p:nvSpPr>
-        <p:spPr/>
-      </p:sp>
-      <p:sp>
-        <p:nvSpPr>
-          <p:cNvPr id="3" name="Notes Placeholder 2"/>
-          <p:cNvSpPr>
-            <a:spLocks noGrp="1"/>
-          </p:cNvSpPr>
-          <p:nvPr>
-            <p:ph type="body" idx="1"/>
-          </p:nvPr>
-        </p:nvSpPr>
-        <p:spPr/>
-        <p:txBody>
-          <a:bodyPr/>
-          <a:lstStyle/>
-          <a:p>
-            <a:endParaRPr lang="en-US" dirty="0"/>
-          </a:p>
-        </p:txBody>
-      </p:sp>
-      <p:sp>
-        <p:nvSpPr>
-          <p:cNvPr id="4" name="Slide Number Placeholder 3"/>
-          <p:cNvSpPr>
-            <a:spLocks noGrp="1"/>
-          </p:cNvSpPr>
-          <p:nvPr>
-            <p:ph type="sldNum" sz="quarter" idx="10"/>
-          </p:nvPr>
-        </p:nvSpPr>
-        <p:spPr/>
-        <p:txBody>
-          <a:bodyPr/>
-          <a:lstStyle/>
-          <a:p>
-            <a:fld id="{F7021451-1387-4CA6-816F-3879F97B5CBC}" type="slidenum">
-              <a:rPr lang="en-US"/>
-              <a:t>14</a:t>
-            </a:fld>
-            <a:endParaRPr lang="en-US"/>
-          </a:p>
-        </p:txBody>
-      </p:sp>
-    </p:spTree>
-    <p:extLst>
-      <p:ext uri="{BB962C8B-B14F-4D97-AF65-F5344CB8AC3E}">
-        <p14:creationId xmlns:p14="http://schemas.microsoft.com/office/powerpoint/2010/main" val="1024086991"/>
-      </p:ext>
-    </p:extLst>
-  </p:cSld>
-  <p:clrMapOvr>
-    <a:masterClrMapping/>
-  </p:clrMapOvr>
-</p:notes>
-</file>
-
-<file path=ppt/notesSlides/notesSlide15.xml><?xml version="1.0" encoding="utf-8"?>
-<p:notes xmlns:a="http://schemas.openxmlformats.org/drawingml/2006/main" xmlns:r="http://schemas.openxmlformats.org/officeDocument/2006/relationships" xmlns:p="http://schemas.openxmlformats.org/presentationml/2006/main">
-  <p:cSld>
-    <p:spTree>
-      <p:nvGrpSpPr>
-        <p:cNvPr id="1" name=""/>
-        <p:cNvGrpSpPr/>
-        <p:nvPr/>
-      </p:nvGrpSpPr>
-      <p:grpSpPr>
-        <a:xfrm>
-          <a:off x="0" y="0"/>
-          <a:ext cx="0" cy="0"/>
-          <a:chOff x="0" y="0"/>
-          <a:chExt cx="0" cy="0"/>
-        </a:xfrm>
-      </p:grpSpPr>
-      <p:sp>
-        <p:nvSpPr>
-          <p:cNvPr id="2" name="Slide Image Placeholder 1"/>
-          <p:cNvSpPr>
-            <a:spLocks noGrp="1" noRot="1" noChangeAspect="1"/>
-          </p:cNvSpPr>
-          <p:nvPr>
-            <p:ph type="sldImg"/>
-          </p:nvPr>
-        </p:nvSpPr>
-        <p:spPr/>
-      </p:sp>
-      <p:sp>
-        <p:nvSpPr>
-          <p:cNvPr id="3" name="Notes Placeholder 2"/>
-          <p:cNvSpPr>
-            <a:spLocks noGrp="1"/>
-          </p:cNvSpPr>
-          <p:nvPr>
-            <p:ph type="body" idx="1"/>
-          </p:nvPr>
-        </p:nvSpPr>
-        <p:spPr/>
-        <p:txBody>
-          <a:bodyPr/>
-          <a:lstStyle/>
-          <a:p>
-            <a:endParaRPr lang="en-US" dirty="0"/>
-          </a:p>
-        </p:txBody>
-      </p:sp>
-      <p:sp>
-        <p:nvSpPr>
-          <p:cNvPr id="4" name="Slide Number Placeholder 3"/>
-          <p:cNvSpPr>
-            <a:spLocks noGrp="1"/>
-          </p:cNvSpPr>
-          <p:nvPr>
-            <p:ph type="sldNum" sz="quarter" idx="10"/>
-          </p:nvPr>
-        </p:nvSpPr>
-        <p:spPr/>
-        <p:txBody>
-          <a:bodyPr/>
-          <a:lstStyle/>
-          <a:p>
-            <a:fld id="{F7021451-1387-4CA6-816F-3879F97B5CBC}" type="slidenum">
-              <a:rPr lang="en-US"/>
-              <a:t>15</a:t>
-            </a:fld>
-            <a:endParaRPr lang="en-US"/>
-          </a:p>
-        </p:txBody>
-      </p:sp>
-    </p:spTree>
-    <p:extLst>
-      <p:ext uri="{BB962C8B-B14F-4D97-AF65-F5344CB8AC3E}">
-        <p14:creationId xmlns:p14="http://schemas.microsoft.com/office/powerpoint/2010/main" val="1024086991"/>
-      </p:ext>
-    </p:extLst>
-  </p:cSld>
-  <p:clrMapOvr>
-    <a:masterClrMapping/>
-  </p:clrMapOvr>
-</p:notes>
-</file>
-
-<file path=ppt/notesSlides/notesSlide16.xml><?xml version="1.0" encoding="utf-8"?>
-<p:notes xmlns:a="http://schemas.openxmlformats.org/drawingml/2006/main" xmlns:r="http://schemas.openxmlformats.org/officeDocument/2006/relationships" xmlns:p="http://schemas.openxmlformats.org/presentationml/2006/main">
-  <p:cSld>
-    <p:spTree>
-      <p:nvGrpSpPr>
-        <p:cNvPr id="1" name=""/>
-        <p:cNvGrpSpPr/>
-        <p:nvPr/>
-      </p:nvGrpSpPr>
-      <p:grpSpPr>
-        <a:xfrm>
-          <a:off x="0" y="0"/>
-          <a:ext cx="0" cy="0"/>
-          <a:chOff x="0" y="0"/>
-          <a:chExt cx="0" cy="0"/>
-        </a:xfrm>
-      </p:grpSpPr>
-      <p:sp>
-        <p:nvSpPr>
-          <p:cNvPr id="2" name="Slide Image Placeholder 1"/>
-          <p:cNvSpPr>
-            <a:spLocks noGrp="1" noRot="1" noChangeAspect="1"/>
-          </p:cNvSpPr>
-          <p:nvPr>
-            <p:ph type="sldImg"/>
-          </p:nvPr>
-        </p:nvSpPr>
-        <p:spPr/>
-      </p:sp>
-      <p:sp>
-        <p:nvSpPr>
-          <p:cNvPr id="3" name="Notes Placeholder 2"/>
-          <p:cNvSpPr>
-            <a:spLocks noGrp="1"/>
-          </p:cNvSpPr>
-          <p:nvPr>
-            <p:ph type="body" idx="1"/>
-          </p:nvPr>
-        </p:nvSpPr>
-        <p:spPr/>
-        <p:txBody>
-          <a:bodyPr/>
-          <a:lstStyle/>
-          <a:p>
-            <a:endParaRPr lang="en-US" dirty="0"/>
-          </a:p>
-        </p:txBody>
-      </p:sp>
-      <p:sp>
-        <p:nvSpPr>
-          <p:cNvPr id="4" name="Slide Number Placeholder 3"/>
-          <p:cNvSpPr>
-            <a:spLocks noGrp="1"/>
-          </p:cNvSpPr>
-          <p:nvPr>
-            <p:ph type="sldNum" sz="quarter" idx="10"/>
-          </p:nvPr>
-        </p:nvSpPr>
-        <p:spPr/>
-        <p:txBody>
-          <a:bodyPr/>
-          <a:lstStyle/>
-          <a:p>
-            <a:fld id="{F7021451-1387-4CA6-816F-3879F97B5CBC}" type="slidenum">
-              <a:rPr lang="en-US"/>
-              <a:t>16</a:t>
-            </a:fld>
-            <a:endParaRPr lang="en-US"/>
-          </a:p>
-        </p:txBody>
-      </p:sp>
-    </p:spTree>
-    <p:extLst>
-      <p:ext uri="{BB962C8B-B14F-4D97-AF65-F5344CB8AC3E}">
-        <p14:creationId xmlns:p14="http://schemas.microsoft.com/office/powerpoint/2010/main" val="1024086991"/>
-      </p:ext>
-    </p:extLst>
-  </p:cSld>
-  <p:clrMapOvr>
-    <a:masterClrMapping/>
-  </p:clrMapOvr>
-</p:notes>
-</file>
-
-<file path=ppt/notesSlides/notesSlide17.xml><?xml version="1.0" encoding="utf-8"?>
-<p:notes xmlns:a="http://schemas.openxmlformats.org/drawingml/2006/main" xmlns:r="http://schemas.openxmlformats.org/officeDocument/2006/relationships" xmlns:p="http://schemas.openxmlformats.org/presentationml/2006/main">
-  <p:cSld>
-    <p:spTree>
-      <p:nvGrpSpPr>
-        <p:cNvPr id="1" name=""/>
-        <p:cNvGrpSpPr/>
-        <p:nvPr/>
-      </p:nvGrpSpPr>
-      <p:grpSpPr>
-        <a:xfrm>
-          <a:off x="0" y="0"/>
-          <a:ext cx="0" cy="0"/>
-          <a:chOff x="0" y="0"/>
-          <a:chExt cx="0" cy="0"/>
-        </a:xfrm>
-      </p:grpSpPr>
-      <p:sp>
-        <p:nvSpPr>
-          <p:cNvPr id="2" name="Slide Image Placeholder 1"/>
-          <p:cNvSpPr>
-            <a:spLocks noGrp="1" noRot="1" noChangeAspect="1"/>
-          </p:cNvSpPr>
-          <p:nvPr>
-            <p:ph type="sldImg"/>
-          </p:nvPr>
-        </p:nvSpPr>
-        <p:spPr/>
-      </p:sp>
-      <p:sp>
-        <p:nvSpPr>
-          <p:cNvPr id="3" name="Notes Placeholder 2"/>
-          <p:cNvSpPr>
-            <a:spLocks noGrp="1"/>
-          </p:cNvSpPr>
-          <p:nvPr>
-            <p:ph type="body" idx="1"/>
-          </p:nvPr>
-        </p:nvSpPr>
-        <p:spPr/>
-        <p:txBody>
-          <a:bodyPr/>
-          <a:lstStyle/>
-          <a:p>
-            <a:endParaRPr lang="en-US" dirty="0"/>
-          </a:p>
-        </p:txBody>
-      </p:sp>
-      <p:sp>
-        <p:nvSpPr>
-          <p:cNvPr id="4" name="Slide Number Placeholder 3"/>
-          <p:cNvSpPr>
-            <a:spLocks noGrp="1"/>
-          </p:cNvSpPr>
-          <p:nvPr>
-            <p:ph type="sldNum" sz="quarter" idx="10"/>
-          </p:nvPr>
-        </p:nvSpPr>
-        <p:spPr/>
-        <p:txBody>
-          <a:bodyPr/>
-          <a:lstStyle/>
-          <a:p>
-            <a:fld id="{F7021451-1387-4CA6-816F-3879F97B5CBC}" type="slidenum">
-              <a:rPr lang="en-US"/>
-              <a:t>17</a:t>
             </a:fld>
             <a:endParaRPr lang="en-US"/>
           </a:p>
@@ -1037,6 +732,13 @@
           </p:nvPr>
         </p:nvSpPr>
         <p:spPr/>
+        <p:txBody>
+          <a:bodyPr/>
+          <a:lstStyle/>
+          <a:p>
+            <a:endParaRPr lang="ru-RU"/>
+          </a:p>
+        </p:txBody>
       </p:sp>
       <p:sp>
         <p:nvSpPr>
@@ -1121,6 +823,13 @@
           </p:nvPr>
         </p:nvSpPr>
         <p:spPr/>
+        <p:txBody>
+          <a:bodyPr/>
+          <a:lstStyle/>
+          <a:p>
+            <a:endParaRPr lang="ru-RU"/>
+          </a:p>
+        </p:txBody>
       </p:sp>
       <p:sp>
         <p:nvSpPr>
@@ -1205,6 +914,13 @@
           </p:nvPr>
         </p:nvSpPr>
         <p:spPr/>
+        <p:txBody>
+          <a:bodyPr/>
+          <a:lstStyle/>
+          <a:p>
+            <a:endParaRPr lang="ru-RU"/>
+          </a:p>
+        </p:txBody>
       </p:sp>
       <p:sp>
         <p:nvSpPr>
@@ -1289,6 +1005,13 @@
           </p:nvPr>
         </p:nvSpPr>
         <p:spPr/>
+        <p:txBody>
+          <a:bodyPr/>
+          <a:lstStyle/>
+          <a:p>
+            <a:endParaRPr lang="ru-RU"/>
+          </a:p>
+        </p:txBody>
       </p:sp>
       <p:sp>
         <p:nvSpPr>
@@ -1373,6 +1096,13 @@
           </p:nvPr>
         </p:nvSpPr>
         <p:spPr/>
+        <p:txBody>
+          <a:bodyPr/>
+          <a:lstStyle/>
+          <a:p>
+            <a:endParaRPr lang="ru-RU"/>
+          </a:p>
+        </p:txBody>
       </p:sp>
       <p:sp>
         <p:nvSpPr>
@@ -1457,6 +1187,13 @@
           </p:nvPr>
         </p:nvSpPr>
         <p:spPr/>
+        <p:txBody>
+          <a:bodyPr/>
+          <a:lstStyle/>
+          <a:p>
+            <a:endParaRPr lang="ru-RU"/>
+          </a:p>
+        </p:txBody>
       </p:sp>
       <p:sp>
         <p:nvSpPr>
@@ -1541,6 +1278,13 @@
           </p:nvPr>
         </p:nvSpPr>
         <p:spPr/>
+        <p:txBody>
+          <a:bodyPr/>
+          <a:lstStyle/>
+          <a:p>
+            <a:endParaRPr lang="ru-RU"/>
+          </a:p>
+        </p:txBody>
       </p:sp>
       <p:sp>
         <p:nvSpPr>
@@ -1625,6 +1369,13 @@
           </p:nvPr>
         </p:nvSpPr>
         <p:spPr/>
+        <p:txBody>
+          <a:bodyPr/>
+          <a:lstStyle/>
+          <a:p>
+            <a:endParaRPr lang="ru-RU"/>
+          </a:p>
+        </p:txBody>
       </p:sp>
       <p:sp>
         <p:nvSpPr>
@@ -1739,7 +1490,7 @@
   <p:sldLayoutIdLst>
     <p:sldLayoutId id="2147483649" r:id="rId1"/>
   </p:sldLayoutIdLst>
-  <p:hf sldNum="0" hdr="0" ftr="0" dt="0"/>
+  <p:hf hdr="0" ftr="0" dt="0"/>
   <p:txStyles>
     <p:titleStyle>
       <a:lvl1pPr algn="ctr" defTabSz="914400" rtl="0" eaLnBrk="1" latinLnBrk="0" hangingPunct="1">
@@ -2026,8 +1777,8 @@
         </p:nvSpPr>
         <p:spPr>
           <a:xfrm>
-            <a:off x="0" y="1828800"/>
-            <a:ext cx="12161520" cy="3200400"/>
+            <a:off x="315742" y="180671"/>
+            <a:ext cx="11560515" cy="4141181"/>
           </a:xfrm>
           <a:prstGeom prst="rect">
             <a:avLst/>
@@ -2042,46 +1793,26 @@
             <a:pPr marL="0" indent="0" algn="ctr">
               <a:buNone/>
             </a:pPr>
-            <a:endParaRPr lang="en-US" sz="32000" dirty="0"/>
-          </a:p>
-        </p:txBody>
-      </p:sp>
-      <p:sp>
-        <p:nvSpPr>
-          <p:cNvPr id="8" name="Text 6"/>
-          <p:cNvSpPr/>
-          <p:nvPr/>
-        </p:nvSpPr>
-        <p:spPr>
-          <a:xfrm>
-            <a:off x="502920" y="1051560"/>
-            <a:ext cx="7315200" cy="1005840"/>
-          </a:xfrm>
-          <a:prstGeom prst="rect">
-            <a:avLst/>
-          </a:prstGeom>
-          <a:noFill/>
-          <a:ln/>
-        </p:spPr>
-        <p:txBody>
-          <a:bodyPr wrap="square" lIns="0" tIns="0" rIns="0" bIns="0" rtlCol="0" anchor="ctr"/>
-          <a:lstStyle/>
-          <a:p>
-            <a:pPr marL="0" indent="0">
-              <a:buNone/>
-            </a:pPr>
-            <a:r>
-              <a:rPr lang="en-US" sz="7800" b="1" kern="0" spc="-100" dirty="0">
-                <a:solidFill>
-                  <a:srgbClr val="0A0A0A"/>
-                </a:solidFill>
-                <a:latin typeface="Playfair Display" pitchFamily="34" charset="0"/>
-                <a:ea typeface="Playfair Display" pitchFamily="34" charset="-122"/>
-                <a:cs typeface="Playfair Display" pitchFamily="34" charset="-120"/>
-              </a:rPr>
-              <a:t>MANAGE</a:t>
-            </a:r>
-            <a:endParaRPr lang="en-US" sz="7800" dirty="0"/>
+            <a:r>
+              <a:rPr lang="ru-RU" sz="7200" b="1" dirty="0">
+                <a:latin typeface="Playfair Display" panose="00000500000000000000" pitchFamily="2" charset="-52"/>
+              </a:rPr>
+              <a:t>КУРСОВОЙ ПРОЕКТ</a:t>
+            </a:r>
+          </a:p>
+          <a:p>
+            <a:pPr marL="0" indent="0" algn="ctr">
+              <a:buNone/>
+            </a:pPr>
+            <a:r>
+              <a:rPr lang="ru-RU" sz="7200" dirty="0">
+                <a:latin typeface="Playfair Display" panose="00000500000000000000" pitchFamily="2" charset="-52"/>
+              </a:rPr>
+              <a:t>«Прототип программной системы канбан-доска»</a:t>
+            </a:r>
+            <a:endParaRPr lang="en-US" sz="7200" dirty="0">
+              <a:latin typeface="Playfair Display" panose="00000500000000000000" pitchFamily="2" charset="-52"/>
+            </a:endParaRPr>
           </a:p>
         </p:txBody>
       </p:sp>
@@ -2109,17 +1840,6 @@
             <a:pPr marL="0" indent="0">
               <a:buNone/>
             </a:pPr>
-            <a:r>
-              <a:rPr lang="en-US" sz="7800" b="1" kern="0" spc="-100" dirty="0">
-                <a:solidFill>
-                  <a:srgbClr val="0A0A0A"/>
-                </a:solidFill>
-                <a:latin typeface="Playfair Display" pitchFamily="34" charset="0"/>
-                <a:ea typeface="Playfair Display" pitchFamily="34" charset="-122"/>
-                <a:cs typeface="Playfair Display" pitchFamily="34" charset="-120"/>
-              </a:rPr>
-              <a:t>YOUR</a:t>
-            </a:r>
             <a:endParaRPr lang="en-US" sz="7800" dirty="0"/>
           </a:p>
         </p:txBody>
@@ -2148,17 +1868,6 @@
             <a:pPr marL="0" indent="0">
               <a:buNone/>
             </a:pPr>
-            <a:r>
-              <a:rPr lang="en-US" sz="7800" b="1" kern="0" spc="-100" dirty="0">
-                <a:solidFill>
-                  <a:srgbClr val="0A0A0A"/>
-                </a:solidFill>
-                <a:latin typeface="Playfair Display" pitchFamily="34" charset="0"/>
-                <a:ea typeface="Playfair Display" pitchFamily="34" charset="-122"/>
-                <a:cs typeface="Playfair Display" pitchFamily="34" charset="-120"/>
-              </a:rPr>
-              <a:t>KURSOVIK</a:t>
-            </a:r>
             <a:endParaRPr lang="en-US" sz="7800" dirty="0"/>
           </a:p>
         </p:txBody>
@@ -2171,7 +1880,7 @@
         </p:nvSpPr>
         <p:spPr>
           <a:xfrm>
-            <a:off x="502920" y="3931920"/>
+            <a:off x="2225040" y="4376716"/>
             <a:ext cx="7315200" cy="1005840"/>
           </a:xfrm>
           <a:prstGeom prst="rect">
@@ -2187,17 +1896,6 @@
             <a:pPr marL="0" indent="0">
               <a:buNone/>
             </a:pPr>
-            <a:r>
-              <a:rPr lang="en-US" sz="7800" b="1" kern="0" spc="-100" dirty="0">
-                <a:solidFill>
-                  <a:srgbClr val="0A0A0A"/>
-                </a:solidFill>
-                <a:latin typeface="Playfair Display" pitchFamily="34" charset="0"/>
-                <a:ea typeface="Playfair Display" pitchFamily="34" charset="-122"/>
-                <a:cs typeface="Playfair Display" pitchFamily="34" charset="-120"/>
-              </a:rPr>
-              <a:t>BEAUTIFUL.</a:t>
-            </a:r>
             <a:endParaRPr lang="en-US" sz="7800" dirty="0"/>
           </a:p>
         </p:txBody>
@@ -2210,7 +1908,7 @@
         </p:nvSpPr>
         <p:spPr>
           <a:xfrm>
-            <a:off x="7818120" y="822960"/>
+            <a:off x="2164080" y="4333098"/>
             <a:ext cx="3931920" cy="1920240"/>
           </a:xfrm>
           <a:prstGeom prst="roundRect">
@@ -2235,6 +1933,13 @@
             </a:outerShdw>
           </a:effectLst>
         </p:spPr>
+        <p:txBody>
+          <a:bodyPr/>
+          <a:lstStyle/>
+          <a:p>
+            <a:endParaRPr lang="ru-RU"/>
+          </a:p>
+        </p:txBody>
       </p:sp>
       <p:sp>
         <p:nvSpPr>
@@ -2244,7 +1949,7 @@
         </p:nvSpPr>
         <p:spPr>
           <a:xfrm>
-            <a:off x="7982712" y="960120"/>
+            <a:off x="2328672" y="4470258"/>
             <a:ext cx="1371600" cy="201168"/>
           </a:xfrm>
           <a:prstGeom prst="rect">
@@ -2283,7 +1988,7 @@
         </p:nvSpPr>
         <p:spPr>
           <a:xfrm>
-            <a:off x="7982712" y="1207008"/>
+            <a:off x="2328672" y="4717146"/>
             <a:ext cx="1158240" cy="1417320"/>
           </a:xfrm>
           <a:prstGeom prst="roundRect">
@@ -2301,6 +2006,13 @@
             <a:prstDash val="solid"/>
           </a:ln>
         </p:spPr>
+        <p:txBody>
+          <a:bodyPr/>
+          <a:lstStyle/>
+          <a:p>
+            <a:endParaRPr lang="ru-RU"/>
+          </a:p>
+        </p:txBody>
       </p:sp>
       <p:sp>
         <p:nvSpPr>
@@ -2310,7 +2022,7 @@
         </p:nvSpPr>
         <p:spPr>
           <a:xfrm>
-            <a:off x="8046720" y="1252728"/>
+            <a:off x="2392680" y="4762866"/>
             <a:ext cx="1030224" cy="201168"/>
           </a:xfrm>
           <a:prstGeom prst="rect">
@@ -2349,7 +2061,7 @@
         </p:nvSpPr>
         <p:spPr>
           <a:xfrm>
-            <a:off x="8046720" y="1481328"/>
+            <a:off x="2392680" y="4991466"/>
             <a:ext cx="1030224" cy="384048"/>
           </a:xfrm>
           <a:prstGeom prst="roundRect">
@@ -2367,6 +2079,13 @@
             <a:prstDash val="solid"/>
           </a:ln>
         </p:spPr>
+        <p:txBody>
+          <a:bodyPr/>
+          <a:lstStyle/>
+          <a:p>
+            <a:endParaRPr lang="ru-RU"/>
+          </a:p>
+        </p:txBody>
       </p:sp>
       <p:sp>
         <p:nvSpPr>
@@ -2376,7 +2095,7 @@
         </p:nvSpPr>
         <p:spPr>
           <a:xfrm>
-            <a:off x="8119872" y="1600200"/>
+            <a:off x="2465832" y="5110338"/>
             <a:ext cx="73152" cy="73152"/>
           </a:xfrm>
           <a:prstGeom prst="ellipse">
@@ -2392,6 +2111,13 @@
             <a:prstDash val="solid"/>
           </a:ln>
         </p:spPr>
+        <p:txBody>
+          <a:bodyPr/>
+          <a:lstStyle/>
+          <a:p>
+            <a:endParaRPr lang="ru-RU"/>
+          </a:p>
+        </p:txBody>
       </p:sp>
       <p:sp>
         <p:nvSpPr>
@@ -2401,7 +2127,7 @@
         </p:nvSpPr>
         <p:spPr>
           <a:xfrm>
-            <a:off x="8229600" y="1545336"/>
+            <a:off x="2575560" y="5055474"/>
             <a:ext cx="457200" cy="182880"/>
           </a:xfrm>
           <a:prstGeom prst="rect">
@@ -2440,7 +2166,7 @@
         </p:nvSpPr>
         <p:spPr>
           <a:xfrm>
-            <a:off x="8119872" y="1728216"/>
+            <a:off x="2465832" y="5238354"/>
             <a:ext cx="883920" cy="109728"/>
           </a:xfrm>
           <a:prstGeom prst="rect">
@@ -2479,7 +2205,7 @@
         </p:nvSpPr>
         <p:spPr>
           <a:xfrm>
-            <a:off x="8046720" y="1938528"/>
+            <a:off x="2392680" y="5448666"/>
             <a:ext cx="1030224" cy="384048"/>
           </a:xfrm>
           <a:prstGeom prst="roundRect">
@@ -2497,6 +2223,13 @@
             <a:prstDash val="solid"/>
           </a:ln>
         </p:spPr>
+        <p:txBody>
+          <a:bodyPr/>
+          <a:lstStyle/>
+          <a:p>
+            <a:endParaRPr lang="ru-RU"/>
+          </a:p>
+        </p:txBody>
       </p:sp>
       <p:sp>
         <p:nvSpPr>
@@ -2506,7 +2239,7 @@
         </p:nvSpPr>
         <p:spPr>
           <a:xfrm>
-            <a:off x="8119872" y="2057400"/>
+            <a:off x="2465832" y="5567538"/>
             <a:ext cx="73152" cy="73152"/>
           </a:xfrm>
           <a:prstGeom prst="ellipse">
@@ -2522,6 +2255,13 @@
             <a:prstDash val="solid"/>
           </a:ln>
         </p:spPr>
+        <p:txBody>
+          <a:bodyPr/>
+          <a:lstStyle/>
+          <a:p>
+            <a:endParaRPr lang="ru-RU"/>
+          </a:p>
+        </p:txBody>
       </p:sp>
       <p:sp>
         <p:nvSpPr>
@@ -2531,7 +2271,7 @@
         </p:nvSpPr>
         <p:spPr>
           <a:xfrm>
-            <a:off x="8229600" y="2002536"/>
+            <a:off x="2575560" y="5512674"/>
             <a:ext cx="457200" cy="182880"/>
           </a:xfrm>
           <a:prstGeom prst="rect">
@@ -2570,7 +2310,7 @@
         </p:nvSpPr>
         <p:spPr>
           <a:xfrm>
-            <a:off x="8119872" y="2185416"/>
+            <a:off x="2465832" y="5695554"/>
             <a:ext cx="883920" cy="109728"/>
           </a:xfrm>
           <a:prstGeom prst="rect">
@@ -2609,7 +2349,7 @@
         </p:nvSpPr>
         <p:spPr>
           <a:xfrm>
-            <a:off x="9204960" y="1207008"/>
+            <a:off x="3550920" y="4717146"/>
             <a:ext cx="1158240" cy="1417320"/>
           </a:xfrm>
           <a:prstGeom prst="roundRect">
@@ -2627,6 +2367,13 @@
             <a:prstDash val="solid"/>
           </a:ln>
         </p:spPr>
+        <p:txBody>
+          <a:bodyPr/>
+          <a:lstStyle/>
+          <a:p>
+            <a:endParaRPr lang="ru-RU"/>
+          </a:p>
+        </p:txBody>
       </p:sp>
       <p:sp>
         <p:nvSpPr>
@@ -2636,7 +2383,7 @@
         </p:nvSpPr>
         <p:spPr>
           <a:xfrm>
-            <a:off x="9268968" y="1252728"/>
+            <a:off x="3614928" y="4762866"/>
             <a:ext cx="1030224" cy="201168"/>
           </a:xfrm>
           <a:prstGeom prst="rect">
@@ -2675,7 +2422,7 @@
         </p:nvSpPr>
         <p:spPr>
           <a:xfrm>
-            <a:off x="9268968" y="1481328"/>
+            <a:off x="3614928" y="4991466"/>
             <a:ext cx="1030224" cy="384048"/>
           </a:xfrm>
           <a:prstGeom prst="roundRect">
@@ -2693,6 +2440,13 @@
             <a:prstDash val="solid"/>
           </a:ln>
         </p:spPr>
+        <p:txBody>
+          <a:bodyPr/>
+          <a:lstStyle/>
+          <a:p>
+            <a:endParaRPr lang="ru-RU"/>
+          </a:p>
+        </p:txBody>
       </p:sp>
       <p:sp>
         <p:nvSpPr>
@@ -2702,7 +2456,7 @@
         </p:nvSpPr>
         <p:spPr>
           <a:xfrm>
-            <a:off x="9342120" y="1600200"/>
+            <a:off x="3688080" y="5110338"/>
             <a:ext cx="73152" cy="73152"/>
           </a:xfrm>
           <a:prstGeom prst="ellipse">
@@ -2718,6 +2472,13 @@
             <a:prstDash val="solid"/>
           </a:ln>
         </p:spPr>
+        <p:txBody>
+          <a:bodyPr/>
+          <a:lstStyle/>
+          <a:p>
+            <a:endParaRPr lang="ru-RU"/>
+          </a:p>
+        </p:txBody>
       </p:sp>
       <p:sp>
         <p:nvSpPr>
@@ -2727,7 +2488,7 @@
         </p:nvSpPr>
         <p:spPr>
           <a:xfrm>
-            <a:off x="9451848" y="1545336"/>
+            <a:off x="3797808" y="5055474"/>
             <a:ext cx="457200" cy="182880"/>
           </a:xfrm>
           <a:prstGeom prst="rect">
@@ -2766,7 +2527,7 @@
         </p:nvSpPr>
         <p:spPr>
           <a:xfrm>
-            <a:off x="9342120" y="1728216"/>
+            <a:off x="3688080" y="5238354"/>
             <a:ext cx="883920" cy="109728"/>
           </a:xfrm>
           <a:prstGeom prst="rect">
@@ -2805,7 +2566,7 @@
         </p:nvSpPr>
         <p:spPr>
           <a:xfrm>
-            <a:off x="10427208" y="1207008"/>
+            <a:off x="4773168" y="4717146"/>
             <a:ext cx="1158240" cy="1417320"/>
           </a:xfrm>
           <a:prstGeom prst="roundRect">
@@ -2823,6 +2584,13 @@
             <a:prstDash val="solid"/>
           </a:ln>
         </p:spPr>
+        <p:txBody>
+          <a:bodyPr/>
+          <a:lstStyle/>
+          <a:p>
+            <a:endParaRPr lang="ru-RU"/>
+          </a:p>
+        </p:txBody>
       </p:sp>
       <p:sp>
         <p:nvSpPr>
@@ -2832,7 +2600,7 @@
         </p:nvSpPr>
         <p:spPr>
           <a:xfrm>
-            <a:off x="10491216" y="1252728"/>
+            <a:off x="4837176" y="4762866"/>
             <a:ext cx="1030224" cy="201168"/>
           </a:xfrm>
           <a:prstGeom prst="rect">
@@ -2871,7 +2639,7 @@
         </p:nvSpPr>
         <p:spPr>
           <a:xfrm>
-            <a:off x="10491216" y="1481328"/>
+            <a:off x="4837176" y="4991466"/>
             <a:ext cx="1030224" cy="384048"/>
           </a:xfrm>
           <a:prstGeom prst="roundRect">
@@ -2889,6 +2657,13 @@
             <a:prstDash val="solid"/>
           </a:ln>
         </p:spPr>
+        <p:txBody>
+          <a:bodyPr/>
+          <a:lstStyle/>
+          <a:p>
+            <a:endParaRPr lang="ru-RU"/>
+          </a:p>
+        </p:txBody>
       </p:sp>
       <p:sp>
         <p:nvSpPr>
@@ -2898,7 +2673,7 @@
         </p:nvSpPr>
         <p:spPr>
           <a:xfrm>
-            <a:off x="10564368" y="1600200"/>
+            <a:off x="4910328" y="5110338"/>
             <a:ext cx="73152" cy="73152"/>
           </a:xfrm>
           <a:prstGeom prst="ellipse">
@@ -2914,6 +2689,13 @@
             <a:prstDash val="solid"/>
           </a:ln>
         </p:spPr>
+        <p:txBody>
+          <a:bodyPr/>
+          <a:lstStyle/>
+          <a:p>
+            <a:endParaRPr lang="ru-RU"/>
+          </a:p>
+        </p:txBody>
       </p:sp>
       <p:sp>
         <p:nvSpPr>
@@ -2923,7 +2705,7 @@
         </p:nvSpPr>
         <p:spPr>
           <a:xfrm>
-            <a:off x="10674096" y="1545336"/>
+            <a:off x="5020056" y="5055474"/>
             <a:ext cx="457200" cy="182880"/>
           </a:xfrm>
           <a:prstGeom prst="rect">
@@ -2962,7 +2744,7 @@
         </p:nvSpPr>
         <p:spPr>
           <a:xfrm>
-            <a:off x="10564368" y="1728216"/>
+            <a:off x="4910328" y="5238354"/>
             <a:ext cx="883920" cy="109728"/>
           </a:xfrm>
           <a:prstGeom prst="rect">
@@ -3001,7 +2783,7 @@
         </p:nvSpPr>
         <p:spPr>
           <a:xfrm>
-            <a:off x="7785110" y="3154680"/>
+            <a:off x="8679630" y="4603531"/>
             <a:ext cx="3584448" cy="228600"/>
           </a:xfrm>
           <a:prstGeom prst="rect">
@@ -3018,7 +2800,7 @@
               <a:buNone/>
             </a:pPr>
             <a:r>
-              <a:rPr lang="en-US" sz="2800" kern="0" spc="300" dirty="0">
+              <a:rPr lang="en-US" sz="2400" kern="0" spc="300" dirty="0">
                 <a:solidFill>
                   <a:srgbClr val="8A8580"/>
                 </a:solidFill>
@@ -3028,7 +2810,7 @@
               </a:rPr>
               <a:t>ВЫПОЛНИЛИ</a:t>
             </a:r>
-            <a:endParaRPr lang="en-US" sz="2800" dirty="0"/>
+            <a:endParaRPr lang="en-US" sz="2400" dirty="0"/>
           </a:p>
         </p:txBody>
       </p:sp>
@@ -3040,7 +2822,7 @@
         </p:nvSpPr>
         <p:spPr>
           <a:xfrm>
-            <a:off x="7818120" y="4206240"/>
+            <a:off x="8677656" y="5437945"/>
             <a:ext cx="3931920" cy="365760"/>
           </a:xfrm>
           <a:prstGeom prst="rect">
@@ -3057,7 +2839,7 @@
               <a:buNone/>
             </a:pPr>
             <a:r>
-              <a:rPr lang="ru-RU" sz="2800" dirty="0">
+              <a:rPr lang="ru-RU" sz="2400" dirty="0">
                 <a:solidFill>
                   <a:srgbClr val="0A0A0A"/>
                 </a:solidFill>
@@ -3068,7 +2850,7 @@
               <a:t>Ст. </a:t>
             </a:r>
             <a:r>
-              <a:rPr lang="en-US" sz="2800" dirty="0" err="1">
+              <a:rPr lang="en-US" sz="2400" dirty="0" err="1">
                 <a:solidFill>
                   <a:srgbClr val="0A0A0A"/>
                 </a:solidFill>
@@ -3079,7 +2861,7 @@
               <a:t>гр</a:t>
             </a:r>
             <a:r>
-              <a:rPr lang="en-US" sz="2800" dirty="0">
+              <a:rPr lang="en-US" sz="2400" dirty="0">
                 <a:solidFill>
                   <a:srgbClr val="0A0A0A"/>
                 </a:solidFill>
@@ -3089,7 +2871,7 @@
               </a:rPr>
               <a:t>. ПРИ-123 </a:t>
             </a:r>
-            <a:endParaRPr lang="ru-RU" sz="2800" dirty="0">
+            <a:endParaRPr lang="ru-RU" sz="2400" dirty="0">
               <a:solidFill>
                 <a:srgbClr val="0A0A0A"/>
               </a:solidFill>
@@ -3103,7 +2885,7 @@
               <a:buNone/>
             </a:pPr>
             <a:r>
-              <a:rPr lang="en-US" sz="2800" dirty="0">
+              <a:rPr lang="en-US" sz="2400" dirty="0">
                 <a:solidFill>
                   <a:srgbClr val="0A0A0A"/>
                 </a:solidFill>
@@ -3111,10 +2893,10 @@
                 <a:ea typeface="Inter" pitchFamily="34" charset="-122"/>
                 <a:cs typeface="Inter" pitchFamily="34" charset="-120"/>
               </a:rPr>
-              <a:t>Парфёнов Роман  ·  Степанцева </a:t>
-            </a:r>
-            <a:r>
-              <a:rPr lang="en-US" sz="2800" dirty="0" err="1">
+              <a:t>Парфёнов </a:t>
+            </a:r>
+            <a:r>
+              <a:rPr lang="en-US" sz="2400" dirty="0" err="1">
                 <a:solidFill>
                   <a:srgbClr val="0A0A0A"/>
                 </a:solidFill>
@@ -3122,10 +2904,67 @@
                 <a:ea typeface="Inter" pitchFamily="34" charset="-122"/>
                 <a:cs typeface="Inter" pitchFamily="34" charset="-120"/>
               </a:rPr>
+              <a:t>Роман</a:t>
+            </a:r>
+            <a:r>
+              <a:rPr lang="en-US" sz="2400" dirty="0">
+                <a:solidFill>
+                  <a:srgbClr val="0A0A0A"/>
+                </a:solidFill>
+                <a:latin typeface="Inter" pitchFamily="34" charset="0"/>
+                <a:ea typeface="Inter" pitchFamily="34" charset="-122"/>
+                <a:cs typeface="Inter" pitchFamily="34" charset="-120"/>
+              </a:rPr>
+              <a:t>   </a:t>
+            </a:r>
+            <a:endParaRPr lang="ru-RU" sz="2400" dirty="0">
+              <a:solidFill>
+                <a:srgbClr val="0A0A0A"/>
+              </a:solidFill>
+              <a:latin typeface="Inter" pitchFamily="34" charset="0"/>
+              <a:ea typeface="Inter" pitchFamily="34" charset="-122"/>
+              <a:cs typeface="Inter" pitchFamily="34" charset="-120"/>
+            </a:endParaRPr>
+          </a:p>
+          <a:p>
+            <a:pPr marL="0" indent="0">
+              <a:buNone/>
+            </a:pPr>
+            <a:r>
+              <a:rPr lang="en-US" sz="2400" dirty="0" err="1">
+                <a:solidFill>
+                  <a:srgbClr val="0A0A0A"/>
+                </a:solidFill>
+                <a:latin typeface="Inter" pitchFamily="34" charset="0"/>
+                <a:ea typeface="Inter" pitchFamily="34" charset="-122"/>
+                <a:cs typeface="Inter" pitchFamily="34" charset="-120"/>
+              </a:rPr>
+              <a:t>Степанцева</a:t>
+            </a:r>
+            <a:r>
+              <a:rPr lang="en-US" sz="2400" dirty="0">
+                <a:solidFill>
+                  <a:srgbClr val="0A0A0A"/>
+                </a:solidFill>
+                <a:latin typeface="Inter" pitchFamily="34" charset="0"/>
+                <a:ea typeface="Inter" pitchFamily="34" charset="-122"/>
+                <a:cs typeface="Inter" pitchFamily="34" charset="-120"/>
+              </a:rPr>
+              <a:t> </a:t>
+            </a:r>
+            <a:r>
+              <a:rPr lang="en-US" sz="2400" dirty="0" err="1">
+                <a:solidFill>
+                  <a:srgbClr val="0A0A0A"/>
+                </a:solidFill>
+                <a:latin typeface="Inter" pitchFamily="34" charset="0"/>
+                <a:ea typeface="Inter" pitchFamily="34" charset="-122"/>
+                <a:cs typeface="Inter" pitchFamily="34" charset="-120"/>
+              </a:rPr>
               <a:t>Екатерина</a:t>
             </a:r>
             <a:r>
-              <a:rPr lang="en-US" sz="2800" dirty="0">
+              <a:rPr lang="en-US" sz="2400" dirty="0">
                 <a:solidFill>
                   <a:srgbClr val="0A0A0A"/>
                 </a:solidFill>
@@ -3133,59 +2972,9 @@
                 <a:ea typeface="Inter" pitchFamily="34" charset="-122"/>
                 <a:cs typeface="Inter" pitchFamily="34" charset="-120"/>
               </a:rPr>
-              <a:t>  ·</a:t>
+              <a:t> </a:t>
             </a:r>
             <a:endParaRPr lang="en-US" sz="2800" dirty="0"/>
-          </a:p>
-        </p:txBody>
-      </p:sp>
-      <p:sp>
-        <p:nvSpPr>
-          <p:cNvPr id="40" name="Text 38"/>
-          <p:cNvSpPr/>
-          <p:nvPr/>
-        </p:nvSpPr>
-        <p:spPr>
-          <a:xfrm>
-            <a:off x="10332720" y="6400800"/>
-            <a:ext cx="1280160" cy="274320"/>
-          </a:xfrm>
-          <a:prstGeom prst="rect">
-            <a:avLst/>
-          </a:prstGeom>
-          <a:noFill/>
-          <a:ln/>
-        </p:spPr>
-        <p:txBody>
-          <a:bodyPr wrap="square" lIns="0" tIns="0" rIns="0" bIns="0" rtlCol="0" anchor="ctr"/>
-          <a:lstStyle/>
-          <a:p>
-            <a:pPr marL="0" indent="0" algn="r">
-              <a:buNone/>
-            </a:pPr>
-            <a:r>
-              <a:rPr lang="en-US" sz="800" kern="0" spc="300" dirty="0">
-                <a:solidFill>
-                  <a:srgbClr val="8A8580"/>
-                </a:solidFill>
-                <a:latin typeface="Inter" pitchFamily="34" charset="0"/>
-                <a:ea typeface="Inter" pitchFamily="34" charset="-122"/>
-                <a:cs typeface="Inter" pitchFamily="34" charset="-120"/>
-              </a:rPr>
-              <a:t>01  —  </a:t>
-            </a:r>
-            <a:r>
-              <a:rPr lang="ru-RU" sz="800" kern="0" spc="300" dirty="0">
-                <a:solidFill>
-                  <a:srgbClr val="8A8580"/>
-                </a:solidFill>
-                <a:latin typeface="Inter" pitchFamily="34" charset="0"/>
-                <a:ea typeface="Inter" pitchFamily="34" charset="-122"/>
-                <a:cs typeface="Inter" pitchFamily="34" charset="-120"/>
-              </a:rPr>
-              <a:t>17</a:t>
-            </a:r>
-            <a:endParaRPr lang="en-US" sz="800" dirty="0"/>
           </a:p>
         </p:txBody>
       </p:sp>
@@ -3198,1801 +2987,6 @@
 </file>
 
 <file path=ppt/slides/slide10.xml><?xml version="1.0" encoding="utf-8"?>
-<p:sld xmlns:a="http://schemas.openxmlformats.org/drawingml/2006/main" xmlns:r="http://schemas.openxmlformats.org/officeDocument/2006/relationships" xmlns:p="http://schemas.openxmlformats.org/presentationml/2006/main">
-  <p:cSld name="Slide 12">
-    <p:bg>
-      <p:bgPr>
-        <a:solidFill>
-          <a:srgbClr val="F5F4F0"/>
-        </a:solidFill>
-        <a:effectLst/>
-      </p:bgPr>
-    </p:bg>
-    <p:spTree>
-      <p:nvGrpSpPr>
-        <p:cNvPr id="1" name=""/>
-        <p:cNvGrpSpPr/>
-        <p:nvPr/>
-      </p:nvGrpSpPr>
-      <p:grpSpPr>
-        <a:xfrm>
-          <a:off x="0" y="0"/>
-          <a:ext cx="0" cy="0"/>
-          <a:chOff x="0" y="0"/>
-          <a:chExt cx="0" cy="0"/>
-        </a:xfrm>
-      </p:grpSpPr>
-      <p:sp>
-        <p:nvSpPr>
-          <p:cNvPr id="7" name="Text 5"/>
-          <p:cNvSpPr/>
-          <p:nvPr/>
-        </p:nvSpPr>
-        <p:spPr>
-          <a:xfrm>
-            <a:off x="548640" y="914400"/>
-            <a:ext cx="3657600" cy="274320"/>
-          </a:xfrm>
-          <a:prstGeom prst="rect">
-            <a:avLst/>
-          </a:prstGeom>
-          <a:noFill/>
-          <a:ln/>
-        </p:spPr>
-        <p:txBody>
-          <a:bodyPr wrap="square" lIns="0" tIns="0" rIns="0" bIns="0" rtlCol="0" anchor="ctr"/>
-          <a:lstStyle/>
-          <a:p>
-            <a:pPr marL="0" indent="0">
-              <a:buNone/>
-            </a:pPr>
-            <a:r>
-              <a:rPr lang="ru-RU" sz="900" b="1" kern="0" spc="400" dirty="0">
-                <a:solidFill>
-                  <a:srgbClr val="C97B5B"/>
-                </a:solidFill>
-                <a:latin typeface="Inter" pitchFamily="34" charset="0"/>
-                <a:ea typeface="Inter" pitchFamily="34" charset="-122"/>
-                <a:cs typeface="Inter" pitchFamily="34" charset="-120"/>
-              </a:rPr>
-              <a:t>9</a:t>
-            </a:r>
-            <a:r>
-              <a:rPr lang="en-US" sz="900" b="1" kern="0" spc="400" dirty="0">
-                <a:solidFill>
-                  <a:srgbClr val="C97B5B"/>
-                </a:solidFill>
-                <a:latin typeface="Inter" pitchFamily="34" charset="0"/>
-                <a:ea typeface="Inter" pitchFamily="34" charset="-122"/>
-                <a:cs typeface="Inter" pitchFamily="34" charset="-120"/>
-              </a:rPr>
-              <a:t>  /  СЦЕНАРИЙ</a:t>
-            </a:r>
-            <a:endParaRPr lang="en-US" sz="900" dirty="0"/>
-          </a:p>
-        </p:txBody>
-      </p:sp>
-      <p:sp>
-        <p:nvSpPr>
-          <p:cNvPr id="8" name="Text 6"/>
-          <p:cNvSpPr/>
-          <p:nvPr/>
-        </p:nvSpPr>
-        <p:spPr>
-          <a:xfrm>
-            <a:off x="548640" y="1280160"/>
-            <a:ext cx="11064240" cy="914400"/>
-          </a:xfrm>
-          <a:prstGeom prst="rect">
-            <a:avLst/>
-          </a:prstGeom>
-          <a:noFill/>
-          <a:ln/>
-        </p:spPr>
-        <p:txBody>
-          <a:bodyPr wrap="square" lIns="0" tIns="0" rIns="0" bIns="0" rtlCol="0" anchor="ctr">
-            <a:normAutofit/>
-          </a:bodyPr>
-          <a:lstStyle/>
-          <a:p>
-            <a:pPr marL="0" indent="0" algn="l">
-              <a:buNone/>
-            </a:pPr>
-            <a:r>
-              <a:rPr lang="en-US" sz="4800" b="1" dirty="0">
-                <a:solidFill>
-                  <a:srgbClr val="0A0A0A"/>
-                </a:solidFill>
-                <a:latin typeface="Playfair Display" pitchFamily="34" charset="0"/>
-                <a:ea typeface="Playfair Display" pitchFamily="34" charset="-122"/>
-                <a:cs typeface="Playfair Display" pitchFamily="34" charset="-120"/>
-              </a:rPr>
-              <a:t>Жизненный цикл сессии.</a:t>
-            </a:r>
-            <a:endParaRPr lang="en-US" sz="4800" dirty="0"/>
-          </a:p>
-        </p:txBody>
-      </p:sp>
-      <p:sp>
-        <p:nvSpPr>
-          <p:cNvPr id="9" name="Shape 7"/>
-          <p:cNvSpPr/>
-          <p:nvPr/>
-        </p:nvSpPr>
-        <p:spPr>
-          <a:xfrm>
-            <a:off x="548640" y="2468880"/>
-            <a:ext cx="2194560" cy="3291840"/>
-          </a:xfrm>
-          <a:prstGeom prst="roundRect">
-            <a:avLst>
-              <a:gd name="adj" fmla="val 3333"/>
-            </a:avLst>
-          </a:prstGeom>
-          <a:solidFill>
-            <a:srgbClr val="FFFFFF"/>
-          </a:solidFill>
-          <a:ln w="6350">
-            <a:solidFill>
-              <a:srgbClr val="D9D5CE"/>
-            </a:solidFill>
-            <a:prstDash val="solid"/>
-          </a:ln>
-        </p:spPr>
-      </p:sp>
-      <p:sp>
-        <p:nvSpPr>
-          <p:cNvPr id="10" name="Text 8"/>
-          <p:cNvSpPr/>
-          <p:nvPr/>
-        </p:nvSpPr>
-        <p:spPr>
-          <a:xfrm>
-            <a:off x="777240" y="2743200"/>
-            <a:ext cx="1737360" cy="457200"/>
-          </a:xfrm>
-          <a:prstGeom prst="rect">
-            <a:avLst/>
-          </a:prstGeom>
-          <a:noFill/>
-          <a:ln/>
-        </p:spPr>
-        <p:txBody>
-          <a:bodyPr wrap="square" lIns="0" tIns="0" rIns="0" bIns="0" rtlCol="0" anchor="ctr"/>
-          <a:lstStyle/>
-          <a:p>
-            <a:pPr marL="0" indent="0">
-              <a:buNone/>
-            </a:pPr>
-            <a:r>
-              <a:rPr lang="en-US" sz="3800" b="1" dirty="0">
-                <a:solidFill>
-                  <a:srgbClr val="C97B5B"/>
-                </a:solidFill>
-                <a:latin typeface="Playfair Display" pitchFamily="34" charset="0"/>
-                <a:ea typeface="Playfair Display" pitchFamily="34" charset="-122"/>
-                <a:cs typeface="Playfair Display" pitchFamily="34" charset="-120"/>
-              </a:rPr>
-              <a:t>01</a:t>
-            </a:r>
-            <a:endParaRPr lang="en-US" sz="3800" dirty="0"/>
-          </a:p>
-        </p:txBody>
-      </p:sp>
-      <p:sp>
-        <p:nvSpPr>
-          <p:cNvPr id="11" name="Text 9"/>
-          <p:cNvSpPr/>
-          <p:nvPr/>
-        </p:nvSpPr>
-        <p:spPr>
-          <a:xfrm>
-            <a:off x="777240" y="3383280"/>
-            <a:ext cx="1737360" cy="457200"/>
-          </a:xfrm>
-          <a:prstGeom prst="rect">
-            <a:avLst/>
-          </a:prstGeom>
-          <a:noFill/>
-          <a:ln/>
-        </p:spPr>
-        <p:txBody>
-          <a:bodyPr wrap="square" lIns="0" tIns="0" rIns="0" bIns="0" rtlCol="0" anchor="ctr"/>
-          <a:lstStyle/>
-          <a:p>
-            <a:pPr marL="0" indent="0">
-              <a:buNone/>
-            </a:pPr>
-            <a:r>
-              <a:rPr lang="en-US" sz="2200" b="1" dirty="0">
-                <a:solidFill>
-                  <a:srgbClr val="0A0A0A"/>
-                </a:solidFill>
-                <a:latin typeface="Playfair Display" pitchFamily="34" charset="0"/>
-                <a:ea typeface="Playfair Display" pitchFamily="34" charset="-122"/>
-                <a:cs typeface="Playfair Display" pitchFamily="34" charset="-120"/>
-              </a:rPr>
-              <a:t>Login</a:t>
-            </a:r>
-            <a:endParaRPr lang="en-US" sz="2200" dirty="0"/>
-          </a:p>
-        </p:txBody>
-      </p:sp>
-      <p:sp>
-        <p:nvSpPr>
-          <p:cNvPr id="12" name="Shape 10"/>
-          <p:cNvSpPr/>
-          <p:nvPr/>
-        </p:nvSpPr>
-        <p:spPr>
-          <a:xfrm>
-            <a:off x="777240" y="3886200"/>
-            <a:ext cx="1737360" cy="0"/>
-          </a:xfrm>
-          <a:prstGeom prst="line">
-            <a:avLst/>
-          </a:prstGeom>
-          <a:noFill/>
-          <a:ln w="6350">
-            <a:solidFill>
-              <a:srgbClr val="D9D5CE"/>
-            </a:solidFill>
-            <a:prstDash val="solid"/>
-          </a:ln>
-        </p:spPr>
-      </p:sp>
-      <p:sp>
-        <p:nvSpPr>
-          <p:cNvPr id="13" name="Text 11"/>
-          <p:cNvSpPr/>
-          <p:nvPr/>
-        </p:nvSpPr>
-        <p:spPr>
-          <a:xfrm>
-            <a:off x="777240" y="4023360"/>
-            <a:ext cx="1737360" cy="1554480"/>
-          </a:xfrm>
-          <a:prstGeom prst="rect">
-            <a:avLst/>
-          </a:prstGeom>
-          <a:noFill/>
-          <a:ln/>
-        </p:spPr>
-        <p:txBody>
-          <a:bodyPr wrap="square" lIns="0" tIns="0" rIns="0" bIns="0" rtlCol="0" anchor="ctr"/>
-          <a:lstStyle/>
-          <a:p>
-            <a:pPr marL="0" indent="0">
-              <a:lnSpc>
-                <a:spcPct val="140000"/>
-              </a:lnSpc>
-              <a:buNone/>
-            </a:pPr>
-            <a:r>
-              <a:rPr lang="en-US" sz="1100" dirty="0">
-                <a:solidFill>
-                  <a:srgbClr val="8A8580"/>
-                </a:solidFill>
-                <a:latin typeface="Inter" pitchFamily="34" charset="0"/>
-                <a:ea typeface="Inter" pitchFamily="34" charset="-122"/>
-                <a:cs typeface="Inter" pitchFamily="34" charset="-120"/>
-              </a:rPr>
-              <a:t>POST /auth/login → проверка BCrypt → выдача access + refresh в HttpOnly cookies</a:t>
-            </a:r>
-            <a:endParaRPr lang="en-US" sz="1100" dirty="0"/>
-          </a:p>
-        </p:txBody>
-      </p:sp>
-      <p:sp>
-        <p:nvSpPr>
-          <p:cNvPr id="14" name="Shape 12"/>
-          <p:cNvSpPr/>
-          <p:nvPr/>
-        </p:nvSpPr>
-        <p:spPr>
-          <a:xfrm>
-            <a:off x="2862072" y="2468880"/>
-            <a:ext cx="2194560" cy="3291840"/>
-          </a:xfrm>
-          <a:prstGeom prst="roundRect">
-            <a:avLst>
-              <a:gd name="adj" fmla="val 3333"/>
-            </a:avLst>
-          </a:prstGeom>
-          <a:solidFill>
-            <a:srgbClr val="FFFFFF"/>
-          </a:solidFill>
-          <a:ln w="6350">
-            <a:solidFill>
-              <a:srgbClr val="D9D5CE"/>
-            </a:solidFill>
-            <a:prstDash val="solid"/>
-          </a:ln>
-        </p:spPr>
-      </p:sp>
-      <p:sp>
-        <p:nvSpPr>
-          <p:cNvPr id="15" name="Text 13"/>
-          <p:cNvSpPr/>
-          <p:nvPr/>
-        </p:nvSpPr>
-        <p:spPr>
-          <a:xfrm>
-            <a:off x="3090672" y="2743200"/>
-            <a:ext cx="1737360" cy="457200"/>
-          </a:xfrm>
-          <a:prstGeom prst="rect">
-            <a:avLst/>
-          </a:prstGeom>
-          <a:noFill/>
-          <a:ln/>
-        </p:spPr>
-        <p:txBody>
-          <a:bodyPr wrap="square" lIns="0" tIns="0" rIns="0" bIns="0" rtlCol="0" anchor="ctr"/>
-          <a:lstStyle/>
-          <a:p>
-            <a:pPr marL="0" indent="0">
-              <a:buNone/>
-            </a:pPr>
-            <a:r>
-              <a:rPr lang="en-US" sz="3800" b="1" dirty="0">
-                <a:solidFill>
-                  <a:srgbClr val="C97B5B"/>
-                </a:solidFill>
-                <a:latin typeface="Playfair Display" pitchFamily="34" charset="0"/>
-                <a:ea typeface="Playfair Display" pitchFamily="34" charset="-122"/>
-                <a:cs typeface="Playfair Display" pitchFamily="34" charset="-120"/>
-              </a:rPr>
-              <a:t>02</a:t>
-            </a:r>
-            <a:endParaRPr lang="en-US" sz="3800" dirty="0"/>
-          </a:p>
-        </p:txBody>
-      </p:sp>
-      <p:sp>
-        <p:nvSpPr>
-          <p:cNvPr id="16" name="Text 14"/>
-          <p:cNvSpPr/>
-          <p:nvPr/>
-        </p:nvSpPr>
-        <p:spPr>
-          <a:xfrm>
-            <a:off x="3090672" y="3383280"/>
-            <a:ext cx="1737360" cy="457200"/>
-          </a:xfrm>
-          <a:prstGeom prst="rect">
-            <a:avLst/>
-          </a:prstGeom>
-          <a:noFill/>
-          <a:ln/>
-        </p:spPr>
-        <p:txBody>
-          <a:bodyPr wrap="square" lIns="0" tIns="0" rIns="0" bIns="0" rtlCol="0" anchor="ctr"/>
-          <a:lstStyle/>
-          <a:p>
-            <a:pPr marL="0" indent="0">
-              <a:buNone/>
-            </a:pPr>
-            <a:r>
-              <a:rPr lang="en-US" sz="2200" b="1" dirty="0">
-                <a:solidFill>
-                  <a:srgbClr val="0A0A0A"/>
-                </a:solidFill>
-                <a:latin typeface="Playfair Display" pitchFamily="34" charset="0"/>
-                <a:ea typeface="Playfair Display" pitchFamily="34" charset="-122"/>
-                <a:cs typeface="Playfair Display" pitchFamily="34" charset="-120"/>
-              </a:rPr>
-              <a:t>Запрос</a:t>
-            </a:r>
-            <a:endParaRPr lang="en-US" sz="2200" dirty="0"/>
-          </a:p>
-        </p:txBody>
-      </p:sp>
-      <p:sp>
-        <p:nvSpPr>
-          <p:cNvPr id="17" name="Shape 15"/>
-          <p:cNvSpPr/>
-          <p:nvPr/>
-        </p:nvSpPr>
-        <p:spPr>
-          <a:xfrm>
-            <a:off x="3090672" y="3886200"/>
-            <a:ext cx="1737360" cy="0"/>
-          </a:xfrm>
-          <a:prstGeom prst="line">
-            <a:avLst/>
-          </a:prstGeom>
-          <a:noFill/>
-          <a:ln w="6350">
-            <a:solidFill>
-              <a:srgbClr val="D9D5CE"/>
-            </a:solidFill>
-            <a:prstDash val="solid"/>
-          </a:ln>
-        </p:spPr>
-      </p:sp>
-      <p:sp>
-        <p:nvSpPr>
-          <p:cNvPr id="18" name="Text 16"/>
-          <p:cNvSpPr/>
-          <p:nvPr/>
-        </p:nvSpPr>
-        <p:spPr>
-          <a:xfrm>
-            <a:off x="3090672" y="4023360"/>
-            <a:ext cx="1737360" cy="1554480"/>
-          </a:xfrm>
-          <a:prstGeom prst="rect">
-            <a:avLst/>
-          </a:prstGeom>
-          <a:noFill/>
-          <a:ln/>
-        </p:spPr>
-        <p:txBody>
-          <a:bodyPr wrap="square" lIns="0" tIns="0" rIns="0" bIns="0" rtlCol="0" anchor="ctr"/>
-          <a:lstStyle/>
-          <a:p>
-            <a:pPr marL="0" indent="0">
-              <a:lnSpc>
-                <a:spcPct val="140000"/>
-              </a:lnSpc>
-              <a:buNone/>
-            </a:pPr>
-            <a:r>
-              <a:rPr lang="en-US" sz="1100" dirty="0">
-                <a:solidFill>
-                  <a:srgbClr val="8A8580"/>
-                </a:solidFill>
-                <a:latin typeface="Inter" pitchFamily="34" charset="0"/>
-                <a:ea typeface="Inter" pitchFamily="34" charset="-122"/>
-                <a:cs typeface="Inter" pitchFamily="34" charset="-120"/>
-              </a:rPr>
-              <a:t>Axios шлёт withCredentials: true; JwtAuthenticationFilter парсит токен</a:t>
-            </a:r>
-            <a:endParaRPr lang="en-US" sz="1100" dirty="0"/>
-          </a:p>
-        </p:txBody>
-      </p:sp>
-      <p:sp>
-        <p:nvSpPr>
-          <p:cNvPr id="19" name="Shape 17"/>
-          <p:cNvSpPr/>
-          <p:nvPr/>
-        </p:nvSpPr>
-        <p:spPr>
-          <a:xfrm>
-            <a:off x="5175504" y="2468880"/>
-            <a:ext cx="2194560" cy="3291840"/>
-          </a:xfrm>
-          <a:prstGeom prst="roundRect">
-            <a:avLst>
-              <a:gd name="adj" fmla="val 3333"/>
-            </a:avLst>
-          </a:prstGeom>
-          <a:solidFill>
-            <a:srgbClr val="FFFFFF"/>
-          </a:solidFill>
-          <a:ln w="6350">
-            <a:solidFill>
-              <a:srgbClr val="D9D5CE"/>
-            </a:solidFill>
-            <a:prstDash val="solid"/>
-          </a:ln>
-        </p:spPr>
-      </p:sp>
-      <p:sp>
-        <p:nvSpPr>
-          <p:cNvPr id="20" name="Text 18"/>
-          <p:cNvSpPr/>
-          <p:nvPr/>
-        </p:nvSpPr>
-        <p:spPr>
-          <a:xfrm>
-            <a:off x="5404104" y="2743200"/>
-            <a:ext cx="1737360" cy="457200"/>
-          </a:xfrm>
-          <a:prstGeom prst="rect">
-            <a:avLst/>
-          </a:prstGeom>
-          <a:noFill/>
-          <a:ln/>
-        </p:spPr>
-        <p:txBody>
-          <a:bodyPr wrap="square" lIns="0" tIns="0" rIns="0" bIns="0" rtlCol="0" anchor="ctr"/>
-          <a:lstStyle/>
-          <a:p>
-            <a:pPr marL="0" indent="0">
-              <a:buNone/>
-            </a:pPr>
-            <a:r>
-              <a:rPr lang="en-US" sz="3800" b="1" dirty="0">
-                <a:solidFill>
-                  <a:srgbClr val="C97B5B"/>
-                </a:solidFill>
-                <a:latin typeface="Playfair Display" pitchFamily="34" charset="0"/>
-                <a:ea typeface="Playfair Display" pitchFamily="34" charset="-122"/>
-                <a:cs typeface="Playfair Display" pitchFamily="34" charset="-120"/>
-              </a:rPr>
-              <a:t>03</a:t>
-            </a:r>
-            <a:endParaRPr lang="en-US" sz="3800" dirty="0"/>
-          </a:p>
-        </p:txBody>
-      </p:sp>
-      <p:sp>
-        <p:nvSpPr>
-          <p:cNvPr id="21" name="Text 19"/>
-          <p:cNvSpPr/>
-          <p:nvPr/>
-        </p:nvSpPr>
-        <p:spPr>
-          <a:xfrm>
-            <a:off x="5404104" y="3383280"/>
-            <a:ext cx="1737360" cy="457200"/>
-          </a:xfrm>
-          <a:prstGeom prst="rect">
-            <a:avLst/>
-          </a:prstGeom>
-          <a:noFill/>
-          <a:ln/>
-        </p:spPr>
-        <p:txBody>
-          <a:bodyPr wrap="square" lIns="0" tIns="0" rIns="0" bIns="0" rtlCol="0" anchor="ctr"/>
-          <a:lstStyle/>
-          <a:p>
-            <a:pPr marL="0" indent="0">
-              <a:buNone/>
-            </a:pPr>
-            <a:r>
-              <a:rPr lang="en-US" sz="2200" b="1" dirty="0">
-                <a:solidFill>
-                  <a:srgbClr val="0A0A0A"/>
-                </a:solidFill>
-                <a:latin typeface="Playfair Display" pitchFamily="34" charset="0"/>
-                <a:ea typeface="Playfair Display" pitchFamily="34" charset="-122"/>
-                <a:cs typeface="Playfair Display" pitchFamily="34" charset="-120"/>
-              </a:rPr>
-              <a:t>401</a:t>
-            </a:r>
-            <a:endParaRPr lang="en-US" sz="2200" dirty="0"/>
-          </a:p>
-        </p:txBody>
-      </p:sp>
-      <p:sp>
-        <p:nvSpPr>
-          <p:cNvPr id="22" name="Shape 20"/>
-          <p:cNvSpPr/>
-          <p:nvPr/>
-        </p:nvSpPr>
-        <p:spPr>
-          <a:xfrm>
-            <a:off x="5404104" y="3886200"/>
-            <a:ext cx="1737360" cy="0"/>
-          </a:xfrm>
-          <a:prstGeom prst="line">
-            <a:avLst/>
-          </a:prstGeom>
-          <a:noFill/>
-          <a:ln w="6350">
-            <a:solidFill>
-              <a:srgbClr val="D9D5CE"/>
-            </a:solidFill>
-            <a:prstDash val="solid"/>
-          </a:ln>
-        </p:spPr>
-      </p:sp>
-      <p:sp>
-        <p:nvSpPr>
-          <p:cNvPr id="23" name="Text 21"/>
-          <p:cNvSpPr/>
-          <p:nvPr/>
-        </p:nvSpPr>
-        <p:spPr>
-          <a:xfrm>
-            <a:off x="5404104" y="4023360"/>
-            <a:ext cx="1737360" cy="1554480"/>
-          </a:xfrm>
-          <a:prstGeom prst="rect">
-            <a:avLst/>
-          </a:prstGeom>
-          <a:noFill/>
-          <a:ln/>
-        </p:spPr>
-        <p:txBody>
-          <a:bodyPr wrap="square" lIns="0" tIns="0" rIns="0" bIns="0" rtlCol="0" anchor="ctr"/>
-          <a:lstStyle/>
-          <a:p>
-            <a:pPr marL="0" indent="0">
-              <a:lnSpc>
-                <a:spcPct val="140000"/>
-              </a:lnSpc>
-              <a:buNone/>
-            </a:pPr>
-            <a:r>
-              <a:rPr lang="en-US" sz="1100" dirty="0">
-                <a:solidFill>
-                  <a:srgbClr val="8A8580"/>
-                </a:solidFill>
-                <a:latin typeface="Inter" pitchFamily="34" charset="0"/>
-                <a:ea typeface="Inter" pitchFamily="34" charset="-122"/>
-                <a:cs typeface="Inter" pitchFamily="34" charset="-120"/>
-              </a:rPr>
-              <a:t>Access протух → interceptor ловит ответ, помечает _retry</a:t>
-            </a:r>
-            <a:endParaRPr lang="en-US" sz="1100" dirty="0"/>
-          </a:p>
-        </p:txBody>
-      </p:sp>
-      <p:sp>
-        <p:nvSpPr>
-          <p:cNvPr id="24" name="Shape 22"/>
-          <p:cNvSpPr/>
-          <p:nvPr/>
-        </p:nvSpPr>
-        <p:spPr>
-          <a:xfrm>
-            <a:off x="7488936" y="2468880"/>
-            <a:ext cx="2194560" cy="3291840"/>
-          </a:xfrm>
-          <a:prstGeom prst="roundRect">
-            <a:avLst>
-              <a:gd name="adj" fmla="val 3333"/>
-            </a:avLst>
-          </a:prstGeom>
-          <a:solidFill>
-            <a:srgbClr val="FFFFFF"/>
-          </a:solidFill>
-          <a:ln w="6350">
-            <a:solidFill>
-              <a:srgbClr val="D9D5CE"/>
-            </a:solidFill>
-            <a:prstDash val="solid"/>
-          </a:ln>
-        </p:spPr>
-      </p:sp>
-      <p:sp>
-        <p:nvSpPr>
-          <p:cNvPr id="25" name="Text 23"/>
-          <p:cNvSpPr/>
-          <p:nvPr/>
-        </p:nvSpPr>
-        <p:spPr>
-          <a:xfrm>
-            <a:off x="7717536" y="2743200"/>
-            <a:ext cx="1737360" cy="457200"/>
-          </a:xfrm>
-          <a:prstGeom prst="rect">
-            <a:avLst/>
-          </a:prstGeom>
-          <a:noFill/>
-          <a:ln/>
-        </p:spPr>
-        <p:txBody>
-          <a:bodyPr wrap="square" lIns="0" tIns="0" rIns="0" bIns="0" rtlCol="0" anchor="ctr"/>
-          <a:lstStyle/>
-          <a:p>
-            <a:pPr marL="0" indent="0">
-              <a:buNone/>
-            </a:pPr>
-            <a:r>
-              <a:rPr lang="en-US" sz="3800" b="1" dirty="0">
-                <a:solidFill>
-                  <a:srgbClr val="C97B5B"/>
-                </a:solidFill>
-                <a:latin typeface="Playfair Display" pitchFamily="34" charset="0"/>
-                <a:ea typeface="Playfair Display" pitchFamily="34" charset="-122"/>
-                <a:cs typeface="Playfair Display" pitchFamily="34" charset="-120"/>
-              </a:rPr>
-              <a:t>04</a:t>
-            </a:r>
-            <a:endParaRPr lang="en-US" sz="3800" dirty="0"/>
-          </a:p>
-        </p:txBody>
-      </p:sp>
-      <p:sp>
-        <p:nvSpPr>
-          <p:cNvPr id="26" name="Text 24"/>
-          <p:cNvSpPr/>
-          <p:nvPr/>
-        </p:nvSpPr>
-        <p:spPr>
-          <a:xfrm>
-            <a:off x="7717536" y="3383280"/>
-            <a:ext cx="1737360" cy="457200"/>
-          </a:xfrm>
-          <a:prstGeom prst="rect">
-            <a:avLst/>
-          </a:prstGeom>
-          <a:noFill/>
-          <a:ln/>
-        </p:spPr>
-        <p:txBody>
-          <a:bodyPr wrap="square" lIns="0" tIns="0" rIns="0" bIns="0" rtlCol="0" anchor="ctr"/>
-          <a:lstStyle/>
-          <a:p>
-            <a:pPr marL="0" indent="0">
-              <a:buNone/>
-            </a:pPr>
-            <a:r>
-              <a:rPr lang="en-US" sz="2200" b="1" dirty="0">
-                <a:solidFill>
-                  <a:srgbClr val="0A0A0A"/>
-                </a:solidFill>
-                <a:latin typeface="Playfair Display" pitchFamily="34" charset="0"/>
-                <a:ea typeface="Playfair Display" pitchFamily="34" charset="-122"/>
-                <a:cs typeface="Playfair Display" pitchFamily="34" charset="-120"/>
-              </a:rPr>
-              <a:t>Refresh</a:t>
-            </a:r>
-            <a:endParaRPr lang="en-US" sz="2200" dirty="0"/>
-          </a:p>
-        </p:txBody>
-      </p:sp>
-      <p:sp>
-        <p:nvSpPr>
-          <p:cNvPr id="27" name="Shape 25"/>
-          <p:cNvSpPr/>
-          <p:nvPr/>
-        </p:nvSpPr>
-        <p:spPr>
-          <a:xfrm>
-            <a:off x="7717536" y="3886200"/>
-            <a:ext cx="1737360" cy="0"/>
-          </a:xfrm>
-          <a:prstGeom prst="line">
-            <a:avLst/>
-          </a:prstGeom>
-          <a:noFill/>
-          <a:ln w="6350">
-            <a:solidFill>
-              <a:srgbClr val="D9D5CE"/>
-            </a:solidFill>
-            <a:prstDash val="solid"/>
-          </a:ln>
-        </p:spPr>
-      </p:sp>
-      <p:sp>
-        <p:nvSpPr>
-          <p:cNvPr id="28" name="Text 26"/>
-          <p:cNvSpPr/>
-          <p:nvPr/>
-        </p:nvSpPr>
-        <p:spPr>
-          <a:xfrm>
-            <a:off x="7717536" y="4023360"/>
-            <a:ext cx="1737360" cy="1554480"/>
-          </a:xfrm>
-          <a:prstGeom prst="rect">
-            <a:avLst/>
-          </a:prstGeom>
-          <a:noFill/>
-          <a:ln/>
-        </p:spPr>
-        <p:txBody>
-          <a:bodyPr wrap="square" lIns="0" tIns="0" rIns="0" bIns="0" rtlCol="0" anchor="ctr"/>
-          <a:lstStyle/>
-          <a:p>
-            <a:pPr marL="0" indent="0">
-              <a:lnSpc>
-                <a:spcPct val="140000"/>
-              </a:lnSpc>
-              <a:buNone/>
-            </a:pPr>
-            <a:r>
-              <a:rPr lang="en-US" sz="1100" dirty="0">
-                <a:solidFill>
-                  <a:srgbClr val="8A8580"/>
-                </a:solidFill>
-                <a:latin typeface="Inter" pitchFamily="34" charset="0"/>
-                <a:ea typeface="Inter" pitchFamily="34" charset="-122"/>
-                <a:cs typeface="Inter" pitchFamily="34" charset="-120"/>
-              </a:rPr>
-              <a:t>Singleton-promise: один запрос /auth/refresh на N параллельных 401</a:t>
-            </a:r>
-            <a:endParaRPr lang="en-US" sz="1100" dirty="0"/>
-          </a:p>
-        </p:txBody>
-      </p:sp>
-      <p:sp>
-        <p:nvSpPr>
-          <p:cNvPr id="29" name="Shape 27"/>
-          <p:cNvSpPr/>
-          <p:nvPr/>
-        </p:nvSpPr>
-        <p:spPr>
-          <a:xfrm>
-            <a:off x="9802368" y="2468880"/>
-            <a:ext cx="2194560" cy="3291840"/>
-          </a:xfrm>
-          <a:prstGeom prst="roundRect">
-            <a:avLst>
-              <a:gd name="adj" fmla="val 3333"/>
-            </a:avLst>
-          </a:prstGeom>
-          <a:solidFill>
-            <a:srgbClr val="FFFFFF"/>
-          </a:solidFill>
-          <a:ln w="6350">
-            <a:solidFill>
-              <a:srgbClr val="D9D5CE"/>
-            </a:solidFill>
-            <a:prstDash val="solid"/>
-          </a:ln>
-        </p:spPr>
-      </p:sp>
-      <p:sp>
-        <p:nvSpPr>
-          <p:cNvPr id="30" name="Text 28"/>
-          <p:cNvSpPr/>
-          <p:nvPr/>
-        </p:nvSpPr>
-        <p:spPr>
-          <a:xfrm>
-            <a:off x="10030968" y="2743200"/>
-            <a:ext cx="1737360" cy="457200"/>
-          </a:xfrm>
-          <a:prstGeom prst="rect">
-            <a:avLst/>
-          </a:prstGeom>
-          <a:noFill/>
-          <a:ln/>
-        </p:spPr>
-        <p:txBody>
-          <a:bodyPr wrap="square" lIns="0" tIns="0" rIns="0" bIns="0" rtlCol="0" anchor="ctr"/>
-          <a:lstStyle/>
-          <a:p>
-            <a:pPr marL="0" indent="0">
-              <a:buNone/>
-            </a:pPr>
-            <a:r>
-              <a:rPr lang="en-US" sz="3800" b="1" dirty="0">
-                <a:solidFill>
-                  <a:srgbClr val="C97B5B"/>
-                </a:solidFill>
-                <a:latin typeface="Playfair Display" pitchFamily="34" charset="0"/>
-                <a:ea typeface="Playfair Display" pitchFamily="34" charset="-122"/>
-                <a:cs typeface="Playfair Display" pitchFamily="34" charset="-120"/>
-              </a:rPr>
-              <a:t>05</a:t>
-            </a:r>
-            <a:endParaRPr lang="en-US" sz="3800" dirty="0"/>
-          </a:p>
-        </p:txBody>
-      </p:sp>
-      <p:sp>
-        <p:nvSpPr>
-          <p:cNvPr id="31" name="Text 29"/>
-          <p:cNvSpPr/>
-          <p:nvPr/>
-        </p:nvSpPr>
-        <p:spPr>
-          <a:xfrm>
-            <a:off x="10030968" y="3383280"/>
-            <a:ext cx="1737360" cy="457200"/>
-          </a:xfrm>
-          <a:prstGeom prst="rect">
-            <a:avLst/>
-          </a:prstGeom>
-          <a:noFill/>
-          <a:ln/>
-        </p:spPr>
-        <p:txBody>
-          <a:bodyPr wrap="square" lIns="0" tIns="0" rIns="0" bIns="0" rtlCol="0" anchor="ctr"/>
-          <a:lstStyle/>
-          <a:p>
-            <a:pPr marL="0" indent="0">
-              <a:buNone/>
-            </a:pPr>
-            <a:r>
-              <a:rPr lang="en-US" sz="2200" b="1" dirty="0">
-                <a:solidFill>
-                  <a:srgbClr val="0A0A0A"/>
-                </a:solidFill>
-                <a:latin typeface="Playfair Display" pitchFamily="34" charset="0"/>
-                <a:ea typeface="Playfair Display" pitchFamily="34" charset="-122"/>
-                <a:cs typeface="Playfair Display" pitchFamily="34" charset="-120"/>
-              </a:rPr>
-              <a:t>Повтор</a:t>
-            </a:r>
-            <a:endParaRPr lang="en-US" sz="2200" dirty="0"/>
-          </a:p>
-        </p:txBody>
-      </p:sp>
-      <p:sp>
-        <p:nvSpPr>
-          <p:cNvPr id="32" name="Shape 30"/>
-          <p:cNvSpPr/>
-          <p:nvPr/>
-        </p:nvSpPr>
-        <p:spPr>
-          <a:xfrm>
-            <a:off x="10030968" y="3886200"/>
-            <a:ext cx="1737360" cy="0"/>
-          </a:xfrm>
-          <a:prstGeom prst="line">
-            <a:avLst/>
-          </a:prstGeom>
-          <a:noFill/>
-          <a:ln w="6350">
-            <a:solidFill>
-              <a:srgbClr val="D9D5CE"/>
-            </a:solidFill>
-            <a:prstDash val="solid"/>
-          </a:ln>
-        </p:spPr>
-      </p:sp>
-      <p:sp>
-        <p:nvSpPr>
-          <p:cNvPr id="33" name="Text 31"/>
-          <p:cNvSpPr/>
-          <p:nvPr/>
-        </p:nvSpPr>
-        <p:spPr>
-          <a:xfrm>
-            <a:off x="10030968" y="4023360"/>
-            <a:ext cx="1737360" cy="1554480"/>
-          </a:xfrm>
-          <a:prstGeom prst="rect">
-            <a:avLst/>
-          </a:prstGeom>
-          <a:noFill/>
-          <a:ln/>
-        </p:spPr>
-        <p:txBody>
-          <a:bodyPr wrap="square" lIns="0" tIns="0" rIns="0" bIns="0" rtlCol="0" anchor="ctr"/>
-          <a:lstStyle/>
-          <a:p>
-            <a:pPr marL="0" indent="0">
-              <a:lnSpc>
-                <a:spcPct val="140000"/>
-              </a:lnSpc>
-              <a:buNone/>
-            </a:pPr>
-            <a:r>
-              <a:rPr lang="en-US" sz="1100" dirty="0">
-                <a:solidFill>
-                  <a:srgbClr val="8A8580"/>
-                </a:solidFill>
-                <a:latin typeface="Inter" pitchFamily="34" charset="0"/>
-                <a:ea typeface="Inter" pitchFamily="34" charset="-122"/>
-                <a:cs typeface="Inter" pitchFamily="34" charset="-120"/>
-              </a:rPr>
-              <a:t>Исходный запрос повторяется автоматически с новым access</a:t>
-            </a:r>
-            <a:endParaRPr lang="en-US" sz="1100" dirty="0"/>
-          </a:p>
-        </p:txBody>
-      </p:sp>
-      <p:sp>
-        <p:nvSpPr>
-          <p:cNvPr id="35" name="Text 33"/>
-          <p:cNvSpPr/>
-          <p:nvPr/>
-        </p:nvSpPr>
-        <p:spPr>
-          <a:xfrm>
-            <a:off x="548640" y="6400800"/>
-            <a:ext cx="3657600" cy="320040"/>
-          </a:xfrm>
-          <a:prstGeom prst="rect">
-            <a:avLst/>
-          </a:prstGeom>
-          <a:noFill/>
-          <a:ln/>
-        </p:spPr>
-        <p:txBody>
-          <a:bodyPr wrap="square" lIns="0" tIns="0" rIns="0" bIns="0" rtlCol="0" anchor="ctr"/>
-          <a:lstStyle/>
-          <a:p>
-            <a:pPr marL="0" indent="0">
-              <a:buNone/>
-            </a:pPr>
-            <a:r>
-              <a:rPr lang="en-US" sz="800" kern="0" spc="300" dirty="0">
-                <a:solidFill>
-                  <a:srgbClr val="8A8580"/>
-                </a:solidFill>
-                <a:latin typeface="Inter" pitchFamily="34" charset="0"/>
-                <a:ea typeface="Inter" pitchFamily="34" charset="-122"/>
-                <a:cs typeface="Inter" pitchFamily="34" charset="-120"/>
-              </a:rPr>
-              <a:t>KANBAN  /  </a:t>
-            </a:r>
-            <a:r>
-              <a:rPr lang="ru-RU" sz="800" kern="0" spc="300" dirty="0">
-                <a:solidFill>
-                  <a:srgbClr val="8A8580"/>
-                </a:solidFill>
-                <a:latin typeface="Inter" pitchFamily="34" charset="0"/>
-                <a:ea typeface="Inter" pitchFamily="34" charset="-122"/>
-                <a:cs typeface="Inter" pitchFamily="34" charset="-120"/>
-              </a:rPr>
-              <a:t>10</a:t>
-            </a:r>
-            <a:r>
-              <a:rPr lang="en-US" sz="800" kern="0" spc="300" dirty="0">
-                <a:solidFill>
-                  <a:srgbClr val="8A8580"/>
-                </a:solidFill>
-                <a:latin typeface="Inter" pitchFamily="34" charset="0"/>
-                <a:ea typeface="Inter" pitchFamily="34" charset="-122"/>
-                <a:cs typeface="Inter" pitchFamily="34" charset="-120"/>
-              </a:rPr>
-              <a:t> — </a:t>
-            </a:r>
-            <a:r>
-              <a:rPr lang="ru-RU" sz="800" kern="0" spc="300" dirty="0">
-                <a:solidFill>
-                  <a:srgbClr val="8A8580"/>
-                </a:solidFill>
-                <a:latin typeface="Inter" pitchFamily="34" charset="0"/>
-                <a:ea typeface="Inter" pitchFamily="34" charset="-122"/>
-                <a:cs typeface="Inter" pitchFamily="34" charset="-120"/>
-              </a:rPr>
-              <a:t>17</a:t>
-            </a:r>
-            <a:endParaRPr lang="en-US" sz="800" dirty="0"/>
-          </a:p>
-        </p:txBody>
-      </p:sp>
-    </p:spTree>
-  </p:cSld>
-  <p:clrMapOvr>
-    <a:masterClrMapping/>
-  </p:clrMapOvr>
-</p:sld>
-</file>
-
-<file path=ppt/slides/slide11.xml><?xml version="1.0" encoding="utf-8"?>
-<p:sld xmlns:a="http://schemas.openxmlformats.org/drawingml/2006/main" xmlns:r="http://schemas.openxmlformats.org/officeDocument/2006/relationships" xmlns:p="http://schemas.openxmlformats.org/presentationml/2006/main">
-  <p:cSld name="Slide 13">
-    <p:bg>
-      <p:bgPr>
-        <a:solidFill>
-          <a:srgbClr val="F5F4F0"/>
-        </a:solidFill>
-        <a:effectLst/>
-      </p:bgPr>
-    </p:bg>
-    <p:spTree>
-      <p:nvGrpSpPr>
-        <p:cNvPr id="1" name=""/>
-        <p:cNvGrpSpPr/>
-        <p:nvPr/>
-      </p:nvGrpSpPr>
-      <p:grpSpPr>
-        <a:xfrm>
-          <a:off x="0" y="0"/>
-          <a:ext cx="0" cy="0"/>
-          <a:chOff x="0" y="0"/>
-          <a:chExt cx="0" cy="0"/>
-        </a:xfrm>
-      </p:grpSpPr>
-      <p:sp>
-        <p:nvSpPr>
-          <p:cNvPr id="7" name="Text 5"/>
-          <p:cNvSpPr/>
-          <p:nvPr/>
-        </p:nvSpPr>
-        <p:spPr>
-          <a:xfrm>
-            <a:off x="548640" y="914400"/>
-            <a:ext cx="3657600" cy="274320"/>
-          </a:xfrm>
-          <a:prstGeom prst="rect">
-            <a:avLst/>
-          </a:prstGeom>
-          <a:noFill/>
-          <a:ln/>
-        </p:spPr>
-        <p:txBody>
-          <a:bodyPr wrap="square" lIns="0" tIns="0" rIns="0" bIns="0" rtlCol="0" anchor="ctr"/>
-          <a:lstStyle/>
-          <a:p>
-            <a:pPr marL="0" indent="0">
-              <a:buNone/>
-            </a:pPr>
-            <a:r>
-              <a:rPr lang="ru-RU" sz="900" b="1" kern="0" spc="400" dirty="0">
-                <a:solidFill>
-                  <a:srgbClr val="C97B5B"/>
-                </a:solidFill>
-                <a:latin typeface="Inter" pitchFamily="34" charset="0"/>
-                <a:ea typeface="Inter" pitchFamily="34" charset="-122"/>
-                <a:cs typeface="Inter" pitchFamily="34" charset="-120"/>
-              </a:rPr>
-              <a:t>10</a:t>
-            </a:r>
-            <a:r>
-              <a:rPr lang="en-US" sz="900" b="1" kern="0" spc="400" dirty="0">
-                <a:solidFill>
-                  <a:srgbClr val="C97B5B"/>
-                </a:solidFill>
-                <a:latin typeface="Inter" pitchFamily="34" charset="0"/>
-                <a:ea typeface="Inter" pitchFamily="34" charset="-122"/>
-                <a:cs typeface="Inter" pitchFamily="34" charset="-120"/>
-              </a:rPr>
-              <a:t>  /  DRAG &amp; DROP</a:t>
-            </a:r>
-            <a:endParaRPr lang="en-US" sz="900" dirty="0"/>
-          </a:p>
-        </p:txBody>
-      </p:sp>
-      <p:sp>
-        <p:nvSpPr>
-          <p:cNvPr id="8" name="Text 6"/>
-          <p:cNvSpPr/>
-          <p:nvPr/>
-        </p:nvSpPr>
-        <p:spPr>
-          <a:xfrm>
-            <a:off x="548640" y="1280160"/>
-            <a:ext cx="11064240" cy="914400"/>
-          </a:xfrm>
-          <a:prstGeom prst="rect">
-            <a:avLst/>
-          </a:prstGeom>
-          <a:noFill/>
-          <a:ln/>
-        </p:spPr>
-        <p:txBody>
-          <a:bodyPr wrap="square" lIns="0" tIns="0" rIns="0" bIns="0" rtlCol="0" anchor="ctr">
-            <a:normAutofit/>
-          </a:bodyPr>
-          <a:lstStyle/>
-          <a:p>
-            <a:pPr marL="0" indent="0" algn="l">
-              <a:buNone/>
-            </a:pPr>
-            <a:r>
-              <a:rPr lang="en-US" sz="4800" b="1" dirty="0">
-                <a:solidFill>
-                  <a:srgbClr val="0A0A0A"/>
-                </a:solidFill>
-                <a:latin typeface="Playfair Display" pitchFamily="34" charset="0"/>
-                <a:ea typeface="Playfair Display" pitchFamily="34" charset="-122"/>
-                <a:cs typeface="Playfair Display" pitchFamily="34" charset="-120"/>
-              </a:rPr>
-              <a:t>Optimistic updates на DnD.</a:t>
-            </a:r>
-            <a:endParaRPr lang="en-US" sz="4800" dirty="0"/>
-          </a:p>
-        </p:txBody>
-      </p:sp>
-      <p:sp>
-        <p:nvSpPr>
-          <p:cNvPr id="9" name="Text 7"/>
-          <p:cNvSpPr/>
-          <p:nvPr/>
-        </p:nvSpPr>
-        <p:spPr>
-          <a:xfrm>
-            <a:off x="548640" y="2423160"/>
-            <a:ext cx="3657600" cy="274320"/>
-          </a:xfrm>
-          <a:prstGeom prst="rect">
-            <a:avLst/>
-          </a:prstGeom>
-          <a:noFill/>
-          <a:ln/>
-        </p:spPr>
-        <p:txBody>
-          <a:bodyPr wrap="square" lIns="0" tIns="0" rIns="0" bIns="0" rtlCol="0" anchor="ctr"/>
-          <a:lstStyle/>
-          <a:p>
-            <a:pPr marL="0" indent="0">
-              <a:buNone/>
-            </a:pPr>
-            <a:r>
-              <a:rPr lang="en-US" sz="900" b="1" kern="0" spc="300" dirty="0">
-                <a:solidFill>
-                  <a:srgbClr val="C97B5B"/>
-                </a:solidFill>
-                <a:latin typeface="Inter" pitchFamily="34" charset="0"/>
-                <a:ea typeface="Inter" pitchFamily="34" charset="-122"/>
-                <a:cs typeface="Inter" pitchFamily="34" charset="-120"/>
-              </a:rPr>
-              <a:t>ПРОБЛЕМА</a:t>
-            </a:r>
-            <a:endParaRPr lang="en-US" sz="900" dirty="0"/>
-          </a:p>
-        </p:txBody>
-      </p:sp>
-      <p:sp>
-        <p:nvSpPr>
-          <p:cNvPr id="10" name="Text 8"/>
-          <p:cNvSpPr/>
-          <p:nvPr/>
-        </p:nvSpPr>
-        <p:spPr>
-          <a:xfrm>
-            <a:off x="548640" y="2743200"/>
-            <a:ext cx="5303520" cy="1371600"/>
-          </a:xfrm>
-          <a:prstGeom prst="rect">
-            <a:avLst/>
-          </a:prstGeom>
-          <a:noFill/>
-          <a:ln/>
-        </p:spPr>
-        <p:txBody>
-          <a:bodyPr wrap="square" lIns="0" tIns="0" rIns="0" bIns="0" rtlCol="0" anchor="ctr"/>
-          <a:lstStyle/>
-          <a:p>
-            <a:pPr marL="0" indent="0">
-              <a:lnSpc>
-                <a:spcPct val="140000"/>
-              </a:lnSpc>
-              <a:buNone/>
-            </a:pPr>
-            <a:r>
-              <a:rPr lang="en-US" sz="1300" dirty="0">
-                <a:solidFill>
-                  <a:srgbClr val="0A0A0A"/>
-                </a:solidFill>
-                <a:latin typeface="Inter" pitchFamily="34" charset="0"/>
-                <a:ea typeface="Inter" pitchFamily="34" charset="-122"/>
-                <a:cs typeface="Inter" pitchFamily="34" charset="-120"/>
-              </a:rPr>
-              <a:t>Пользователь перетаскивает карточку — карточка возвращается в исходную колонку на время запроса (200-500 мс), потом «прыгает» назад. UX страдает.</a:t>
-            </a:r>
-            <a:endParaRPr lang="en-US" sz="1300" dirty="0"/>
-          </a:p>
-        </p:txBody>
-      </p:sp>
-      <p:sp>
-        <p:nvSpPr>
-          <p:cNvPr id="11" name="Text 9"/>
-          <p:cNvSpPr/>
-          <p:nvPr/>
-        </p:nvSpPr>
-        <p:spPr>
-          <a:xfrm>
-            <a:off x="548640" y="4023360"/>
-            <a:ext cx="3657600" cy="274320"/>
-          </a:xfrm>
-          <a:prstGeom prst="rect">
-            <a:avLst/>
-          </a:prstGeom>
-          <a:noFill/>
-          <a:ln/>
-        </p:spPr>
-        <p:txBody>
-          <a:bodyPr wrap="square" lIns="0" tIns="0" rIns="0" bIns="0" rtlCol="0" anchor="ctr"/>
-          <a:lstStyle/>
-          <a:p>
-            <a:pPr marL="0" indent="0">
-              <a:buNone/>
-            </a:pPr>
-            <a:r>
-              <a:rPr lang="en-US" sz="900" b="1" kern="0" spc="300" dirty="0">
-                <a:solidFill>
-                  <a:srgbClr val="C97B5B"/>
-                </a:solidFill>
-                <a:latin typeface="Inter" pitchFamily="34" charset="0"/>
-                <a:ea typeface="Inter" pitchFamily="34" charset="-122"/>
-                <a:cs typeface="Inter" pitchFamily="34" charset="-120"/>
-              </a:rPr>
-              <a:t>РЕШЕНИЕ</a:t>
-            </a:r>
-            <a:endParaRPr lang="en-US" sz="900" dirty="0"/>
-          </a:p>
-        </p:txBody>
-      </p:sp>
-      <p:sp>
-        <p:nvSpPr>
-          <p:cNvPr id="12" name="Text 10"/>
-          <p:cNvSpPr/>
-          <p:nvPr/>
-        </p:nvSpPr>
-        <p:spPr>
-          <a:xfrm>
-            <a:off x="548640" y="4343400"/>
-            <a:ext cx="5303520" cy="1463040"/>
-          </a:xfrm>
-          <a:prstGeom prst="rect">
-            <a:avLst/>
-          </a:prstGeom>
-          <a:noFill/>
-          <a:ln/>
-        </p:spPr>
-        <p:txBody>
-          <a:bodyPr wrap="square" lIns="0" tIns="0" rIns="0" bIns="0" rtlCol="0" anchor="ctr"/>
-          <a:lstStyle/>
-          <a:p>
-            <a:pPr marL="0" indent="0">
-              <a:lnSpc>
-                <a:spcPct val="140000"/>
-              </a:lnSpc>
-              <a:buNone/>
-            </a:pPr>
-            <a:r>
-              <a:rPr lang="en-US" sz="1300" dirty="0">
-                <a:solidFill>
-                  <a:srgbClr val="0A0A0A"/>
-                </a:solidFill>
-                <a:latin typeface="Inter" pitchFamily="34" charset="0"/>
-                <a:ea typeface="Inter" pitchFamily="34" charset="-122"/>
-                <a:cs typeface="Inter" pitchFamily="34" charset="-120"/>
-              </a:rPr>
-              <a:t>useMoveTask в TanStack Query: onMutate сразу обновляет cache, onError откатывает к сохранённому prev, onSettled инвалидирует ключ tasksKey(boardId).</a:t>
-            </a:r>
-            <a:endParaRPr lang="en-US" sz="1300" dirty="0"/>
-          </a:p>
-        </p:txBody>
-      </p:sp>
-      <p:sp>
-        <p:nvSpPr>
-          <p:cNvPr id="13" name="Shape 11"/>
-          <p:cNvSpPr/>
-          <p:nvPr/>
-        </p:nvSpPr>
-        <p:spPr>
-          <a:xfrm>
-            <a:off x="6217920" y="2423160"/>
-            <a:ext cx="5394960" cy="3383280"/>
-          </a:xfrm>
-          <a:prstGeom prst="roundRect">
-            <a:avLst>
-              <a:gd name="adj" fmla="val 2162"/>
-            </a:avLst>
-          </a:prstGeom>
-          <a:solidFill>
-            <a:srgbClr val="0A0A0A"/>
-          </a:solidFill>
-          <a:ln w="12700">
-            <a:solidFill>
-              <a:srgbClr val="0A0A0A"/>
-            </a:solidFill>
-            <a:prstDash val="solid"/>
-          </a:ln>
-        </p:spPr>
-      </p:sp>
-      <p:sp>
-        <p:nvSpPr>
-          <p:cNvPr id="14" name="Text 12"/>
-          <p:cNvSpPr/>
-          <p:nvPr/>
-        </p:nvSpPr>
-        <p:spPr>
-          <a:xfrm>
-            <a:off x="6492240" y="2606040"/>
-            <a:ext cx="4846320" cy="274320"/>
-          </a:xfrm>
-          <a:prstGeom prst="rect">
-            <a:avLst/>
-          </a:prstGeom>
-          <a:noFill/>
-          <a:ln/>
-        </p:spPr>
-        <p:txBody>
-          <a:bodyPr wrap="square" lIns="0" tIns="0" rIns="0" bIns="0" rtlCol="0" anchor="ctr"/>
-          <a:lstStyle/>
-          <a:p>
-            <a:pPr marL="0" indent="0">
-              <a:buNone/>
-            </a:pPr>
-            <a:r>
-              <a:rPr lang="en-US" sz="1000" dirty="0">
-                <a:solidFill>
-                  <a:srgbClr val="8A8580"/>
-                </a:solidFill>
-                <a:latin typeface="Consolas" pitchFamily="34" charset="0"/>
-                <a:ea typeface="Consolas" pitchFamily="34" charset="-122"/>
-                <a:cs typeface="Consolas" pitchFamily="34" charset="-120"/>
-              </a:rPr>
-              <a:t>useMoveTask.js</a:t>
-            </a:r>
-            <a:endParaRPr lang="en-US" sz="1000" dirty="0"/>
-          </a:p>
-        </p:txBody>
-      </p:sp>
-      <p:sp>
-        <p:nvSpPr>
-          <p:cNvPr id="15" name="Shape 13"/>
-          <p:cNvSpPr/>
-          <p:nvPr/>
-        </p:nvSpPr>
-        <p:spPr>
-          <a:xfrm>
-            <a:off x="6492240" y="2926080"/>
-            <a:ext cx="1828800" cy="0"/>
-          </a:xfrm>
-          <a:prstGeom prst="line">
-            <a:avLst/>
-          </a:prstGeom>
-          <a:noFill/>
-          <a:ln w="6350">
-            <a:solidFill>
-              <a:srgbClr val="3D3D3D"/>
-            </a:solidFill>
-            <a:prstDash val="solid"/>
-          </a:ln>
-        </p:spPr>
-      </p:sp>
-      <p:sp>
-        <p:nvSpPr>
-          <p:cNvPr id="16" name="Text 14"/>
-          <p:cNvSpPr/>
-          <p:nvPr/>
-        </p:nvSpPr>
-        <p:spPr>
-          <a:xfrm>
-            <a:off x="6492240" y="3063240"/>
-            <a:ext cx="4846320" cy="2606040"/>
-          </a:xfrm>
-          <a:prstGeom prst="rect">
-            <a:avLst/>
-          </a:prstGeom>
-          <a:noFill/>
-          <a:ln/>
-        </p:spPr>
-        <p:txBody>
-          <a:bodyPr wrap="square" lIns="0" tIns="0" rIns="0" bIns="0" rtlCol="0" anchor="ctr"/>
-          <a:lstStyle/>
-          <a:p>
-            <a:pPr marL="0" indent="0">
-              <a:lnSpc>
-                <a:spcPct val="130000"/>
-              </a:lnSpc>
-              <a:buNone/>
-            </a:pPr>
-            <a:r>
-              <a:rPr lang="en-US" sz="1000" dirty="0">
-                <a:solidFill>
-                  <a:srgbClr val="ECEAE4"/>
-                </a:solidFill>
-                <a:latin typeface="Consolas" pitchFamily="34" charset="0"/>
-                <a:ea typeface="Consolas" pitchFamily="34" charset="-122"/>
-                <a:cs typeface="Consolas" pitchFamily="34" charset="-120"/>
-              </a:rPr>
-              <a:t>onMutate: async ({ taskId, toColumn, newPos }) =&gt; {</a:t>
-            </a:r>
-            <a:endParaRPr lang="en-US" sz="1000" dirty="0"/>
-          </a:p>
-          <a:p>
-            <a:pPr marL="0" indent="0">
-              <a:lnSpc>
-                <a:spcPct val="130000"/>
-              </a:lnSpc>
-              <a:buNone/>
-            </a:pPr>
-            <a:r>
-              <a:rPr lang="en-US" sz="1000" dirty="0">
-                <a:solidFill>
-                  <a:srgbClr val="ECEAE4"/>
-                </a:solidFill>
-                <a:latin typeface="Consolas" pitchFamily="34" charset="0"/>
-                <a:ea typeface="Consolas" pitchFamily="34" charset="-122"/>
-                <a:cs typeface="Consolas" pitchFamily="34" charset="-120"/>
-              </a:rPr>
-              <a:t>  await qc.cancelQueries(tasksKey(boardId));</a:t>
-            </a:r>
-            <a:endParaRPr lang="en-US" sz="1000" dirty="0"/>
-          </a:p>
-          <a:p>
-            <a:pPr marL="0" indent="0">
-              <a:lnSpc>
-                <a:spcPct val="130000"/>
-              </a:lnSpc>
-              <a:buNone/>
-            </a:pPr>
-            <a:r>
-              <a:rPr lang="en-US" sz="1000" dirty="0">
-                <a:solidFill>
-                  <a:srgbClr val="ECEAE4"/>
-                </a:solidFill>
-                <a:latin typeface="Consolas" pitchFamily="34" charset="0"/>
-                <a:ea typeface="Consolas" pitchFamily="34" charset="-122"/>
-                <a:cs typeface="Consolas" pitchFamily="34" charset="-120"/>
-              </a:rPr>
-              <a:t>  const prev = qc.getQueryData(tasksKey(boardId));</a:t>
-            </a:r>
-            <a:endParaRPr lang="en-US" sz="1000" dirty="0"/>
-          </a:p>
-          <a:p>
-            <a:pPr marL="0" indent="0">
-              <a:lnSpc>
-                <a:spcPct val="130000"/>
-              </a:lnSpc>
-              <a:buNone/>
-            </a:pPr>
-            <a:r>
-              <a:rPr lang="en-US" sz="1000" dirty="0">
-                <a:solidFill>
-                  <a:srgbClr val="ECEAE4"/>
-                </a:solidFill>
-                <a:latin typeface="Consolas" pitchFamily="34" charset="0"/>
-                <a:ea typeface="Consolas" pitchFamily="34" charset="-122"/>
-                <a:cs typeface="Consolas" pitchFamily="34" charset="-120"/>
-              </a:rPr>
-              <a:t>  qc.setQueryData(tasksKey(boardId), (old) =&gt;</a:t>
-            </a:r>
-            <a:endParaRPr lang="en-US" sz="1000" dirty="0"/>
-          </a:p>
-          <a:p>
-            <a:pPr marL="0" indent="0">
-              <a:lnSpc>
-                <a:spcPct val="130000"/>
-              </a:lnSpc>
-              <a:buNone/>
-            </a:pPr>
-            <a:r>
-              <a:rPr lang="en-US" sz="1000" dirty="0">
-                <a:solidFill>
-                  <a:srgbClr val="ECEAE4"/>
-                </a:solidFill>
-                <a:latin typeface="Consolas" pitchFamily="34" charset="0"/>
-                <a:ea typeface="Consolas" pitchFamily="34" charset="-122"/>
-                <a:cs typeface="Consolas" pitchFamily="34" charset="-120"/>
-              </a:rPr>
-              <a:t>    reorderOptimistic(old, taskId, toColumn, newPos)</a:t>
-            </a:r>
-            <a:endParaRPr lang="en-US" sz="1000" dirty="0"/>
-          </a:p>
-          <a:p>
-            <a:pPr marL="0" indent="0">
-              <a:lnSpc>
-                <a:spcPct val="130000"/>
-              </a:lnSpc>
-              <a:buNone/>
-            </a:pPr>
-            <a:r>
-              <a:rPr lang="en-US" sz="1000" dirty="0">
-                <a:solidFill>
-                  <a:srgbClr val="ECEAE4"/>
-                </a:solidFill>
-                <a:latin typeface="Consolas" pitchFamily="34" charset="0"/>
-                <a:ea typeface="Consolas" pitchFamily="34" charset="-122"/>
-                <a:cs typeface="Consolas" pitchFamily="34" charset="-120"/>
-              </a:rPr>
-              <a:t>  );</a:t>
-            </a:r>
-            <a:endParaRPr lang="en-US" sz="1000" dirty="0"/>
-          </a:p>
-          <a:p>
-            <a:pPr marL="0" indent="0">
-              <a:lnSpc>
-                <a:spcPct val="130000"/>
-              </a:lnSpc>
-              <a:buNone/>
-            </a:pPr>
-            <a:r>
-              <a:rPr lang="en-US" sz="1000" dirty="0">
-                <a:solidFill>
-                  <a:srgbClr val="ECEAE4"/>
-                </a:solidFill>
-                <a:latin typeface="Consolas" pitchFamily="34" charset="0"/>
-                <a:ea typeface="Consolas" pitchFamily="34" charset="-122"/>
-                <a:cs typeface="Consolas" pitchFamily="34" charset="-120"/>
-              </a:rPr>
-              <a:t>  return { prev };</a:t>
-            </a:r>
-            <a:endParaRPr lang="en-US" sz="1000" dirty="0"/>
-          </a:p>
-          <a:p>
-            <a:pPr marL="0" indent="0">
-              <a:lnSpc>
-                <a:spcPct val="130000"/>
-              </a:lnSpc>
-              <a:buNone/>
-            </a:pPr>
-            <a:r>
-              <a:rPr lang="en-US" sz="1000" dirty="0">
-                <a:solidFill>
-                  <a:srgbClr val="ECEAE4"/>
-                </a:solidFill>
-                <a:latin typeface="Consolas" pitchFamily="34" charset="0"/>
-                <a:ea typeface="Consolas" pitchFamily="34" charset="-122"/>
-                <a:cs typeface="Consolas" pitchFamily="34" charset="-120"/>
-              </a:rPr>
-              <a:t>},</a:t>
-            </a:r>
-            <a:endParaRPr lang="en-US" sz="1000" dirty="0"/>
-          </a:p>
-          <a:p>
-            <a:pPr marL="0" indent="0">
-              <a:lnSpc>
-                <a:spcPct val="130000"/>
-              </a:lnSpc>
-              <a:buNone/>
-            </a:pPr>
-            <a:r>
-              <a:rPr lang="en-US" sz="1000" dirty="0">
-                <a:solidFill>
-                  <a:srgbClr val="ECEAE4"/>
-                </a:solidFill>
-                <a:latin typeface="Consolas" pitchFamily="34" charset="0"/>
-                <a:ea typeface="Consolas" pitchFamily="34" charset="-122"/>
-                <a:cs typeface="Consolas" pitchFamily="34" charset="-120"/>
-              </a:rPr>
-              <a:t>onError: (err, vars, ctx) =&gt; {</a:t>
-            </a:r>
-            <a:endParaRPr lang="en-US" sz="1000" dirty="0"/>
-          </a:p>
-          <a:p>
-            <a:pPr marL="0" indent="0">
-              <a:lnSpc>
-                <a:spcPct val="130000"/>
-              </a:lnSpc>
-              <a:buNone/>
-            </a:pPr>
-            <a:r>
-              <a:rPr lang="en-US" sz="1000" dirty="0">
-                <a:solidFill>
-                  <a:srgbClr val="ECEAE4"/>
-                </a:solidFill>
-                <a:latin typeface="Consolas" pitchFamily="34" charset="0"/>
-                <a:ea typeface="Consolas" pitchFamily="34" charset="-122"/>
-                <a:cs typeface="Consolas" pitchFamily="34" charset="-120"/>
-              </a:rPr>
-              <a:t>  qc.setQueryData(tasksKey(boardId), ctx.prev);</a:t>
-            </a:r>
-            <a:endParaRPr lang="en-US" sz="1000" dirty="0"/>
-          </a:p>
-          <a:p>
-            <a:pPr marL="0" indent="0">
-              <a:lnSpc>
-                <a:spcPct val="130000"/>
-              </a:lnSpc>
-              <a:buNone/>
-            </a:pPr>
-            <a:r>
-              <a:rPr lang="en-US" sz="1000" dirty="0">
-                <a:solidFill>
-                  <a:srgbClr val="ECEAE4"/>
-                </a:solidFill>
-                <a:latin typeface="Consolas" pitchFamily="34" charset="0"/>
-                <a:ea typeface="Consolas" pitchFamily="34" charset="-122"/>
-                <a:cs typeface="Consolas" pitchFamily="34" charset="-120"/>
-              </a:rPr>
-              <a:t>},</a:t>
-            </a:r>
-            <a:endParaRPr lang="en-US" sz="1000" dirty="0"/>
-          </a:p>
-          <a:p>
-            <a:pPr marL="0" indent="0">
-              <a:lnSpc>
-                <a:spcPct val="130000"/>
-              </a:lnSpc>
-              <a:buNone/>
-            </a:pPr>
-            <a:r>
-              <a:rPr lang="en-US" sz="1000" dirty="0">
-                <a:solidFill>
-                  <a:srgbClr val="ECEAE4"/>
-                </a:solidFill>
-                <a:latin typeface="Consolas" pitchFamily="34" charset="0"/>
-                <a:ea typeface="Consolas" pitchFamily="34" charset="-122"/>
-                <a:cs typeface="Consolas" pitchFamily="34" charset="-120"/>
-              </a:rPr>
-              <a:t>onSettled: () =&gt; {</a:t>
-            </a:r>
-            <a:endParaRPr lang="en-US" sz="1000" dirty="0"/>
-          </a:p>
-          <a:p>
-            <a:pPr marL="0" indent="0">
-              <a:lnSpc>
-                <a:spcPct val="130000"/>
-              </a:lnSpc>
-              <a:buNone/>
-            </a:pPr>
-            <a:r>
-              <a:rPr lang="en-US" sz="1000" dirty="0">
-                <a:solidFill>
-                  <a:srgbClr val="ECEAE4"/>
-                </a:solidFill>
-                <a:latin typeface="Consolas" pitchFamily="34" charset="0"/>
-                <a:ea typeface="Consolas" pitchFamily="34" charset="-122"/>
-                <a:cs typeface="Consolas" pitchFamily="34" charset="-120"/>
-              </a:rPr>
-              <a:t>  qc.invalidateQueries(tasksKey(boardId));</a:t>
-            </a:r>
-            <a:endParaRPr lang="en-US" sz="1000" dirty="0"/>
-          </a:p>
-          <a:p>
-            <a:pPr marL="0" indent="0">
-              <a:lnSpc>
-                <a:spcPct val="130000"/>
-              </a:lnSpc>
-              <a:buNone/>
-            </a:pPr>
-            <a:r>
-              <a:rPr lang="en-US" sz="1000" dirty="0">
-                <a:solidFill>
-                  <a:srgbClr val="ECEAE4"/>
-                </a:solidFill>
-                <a:latin typeface="Consolas" pitchFamily="34" charset="0"/>
-                <a:ea typeface="Consolas" pitchFamily="34" charset="-122"/>
-                <a:cs typeface="Consolas" pitchFamily="34" charset="-120"/>
-              </a:rPr>
-              <a:t>}</a:t>
-            </a:r>
-            <a:endParaRPr lang="en-US" sz="1000" dirty="0"/>
-          </a:p>
-        </p:txBody>
-      </p:sp>
-      <p:sp>
-        <p:nvSpPr>
-          <p:cNvPr id="18" name="Text 16"/>
-          <p:cNvSpPr/>
-          <p:nvPr/>
-        </p:nvSpPr>
-        <p:spPr>
-          <a:xfrm>
-            <a:off x="548640" y="6400800"/>
-            <a:ext cx="3657600" cy="320040"/>
-          </a:xfrm>
-          <a:prstGeom prst="rect">
-            <a:avLst/>
-          </a:prstGeom>
-          <a:noFill/>
-          <a:ln/>
-        </p:spPr>
-        <p:txBody>
-          <a:bodyPr wrap="square" lIns="0" tIns="0" rIns="0" bIns="0" rtlCol="0" anchor="ctr"/>
-          <a:lstStyle/>
-          <a:p>
-            <a:pPr marL="0" indent="0">
-              <a:buNone/>
-            </a:pPr>
-            <a:r>
-              <a:rPr lang="en-US" sz="800" kern="0" spc="300" dirty="0">
-                <a:solidFill>
-                  <a:srgbClr val="8A8580"/>
-                </a:solidFill>
-                <a:latin typeface="Inter" pitchFamily="34" charset="0"/>
-                <a:ea typeface="Inter" pitchFamily="34" charset="-122"/>
-                <a:cs typeface="Inter" pitchFamily="34" charset="-120"/>
-              </a:rPr>
-              <a:t>KANBAN  /  1</a:t>
-            </a:r>
-            <a:r>
-              <a:rPr lang="ru-RU" sz="800" kern="0" spc="300" dirty="0">
-                <a:solidFill>
-                  <a:srgbClr val="8A8580"/>
-                </a:solidFill>
-                <a:latin typeface="Inter" pitchFamily="34" charset="0"/>
-                <a:ea typeface="Inter" pitchFamily="34" charset="-122"/>
-                <a:cs typeface="Inter" pitchFamily="34" charset="-120"/>
-              </a:rPr>
-              <a:t>1</a:t>
-            </a:r>
-            <a:r>
-              <a:rPr lang="en-US" sz="800" kern="0" spc="300" dirty="0">
-                <a:solidFill>
-                  <a:srgbClr val="8A8580"/>
-                </a:solidFill>
-                <a:latin typeface="Inter" pitchFamily="34" charset="0"/>
-                <a:ea typeface="Inter" pitchFamily="34" charset="-122"/>
-                <a:cs typeface="Inter" pitchFamily="34" charset="-120"/>
-              </a:rPr>
-              <a:t> — </a:t>
-            </a:r>
-            <a:r>
-              <a:rPr lang="ru-RU" sz="800" kern="0" spc="300" dirty="0">
-                <a:solidFill>
-                  <a:srgbClr val="8A8580"/>
-                </a:solidFill>
-                <a:latin typeface="Inter" pitchFamily="34" charset="0"/>
-                <a:ea typeface="Inter" pitchFamily="34" charset="-122"/>
-                <a:cs typeface="Inter" pitchFamily="34" charset="-120"/>
-              </a:rPr>
-              <a:t>17</a:t>
-            </a:r>
-            <a:endParaRPr lang="en-US" sz="800" dirty="0"/>
-          </a:p>
-        </p:txBody>
-      </p:sp>
-    </p:spTree>
-  </p:cSld>
-  <p:clrMapOvr>
-    <a:masterClrMapping/>
-  </p:clrMapOvr>
-</p:sld>
-</file>
-
-<file path=ppt/slides/slide12.xml><?xml version="1.0" encoding="utf-8"?>
 <p:sld xmlns:a="http://schemas.openxmlformats.org/drawingml/2006/main" xmlns:r="http://schemas.openxmlformats.org/officeDocument/2006/relationships" xmlns:p="http://schemas.openxmlformats.org/presentationml/2006/main">
   <p:cSld name="Slide 15">
     <p:bg>
@@ -5042,7 +3036,7 @@
               <a:buNone/>
             </a:pPr>
             <a:r>
-              <a:rPr lang="en-US" sz="900" b="1" kern="0" spc="400" dirty="0">
+              <a:rPr lang="ru-RU" sz="900" b="1" kern="0" spc="400" dirty="0">
                 <a:solidFill>
                   <a:srgbClr val="C97B5B"/>
                 </a:solidFill>
@@ -5050,18 +3044,7 @@
                 <a:ea typeface="Inter" pitchFamily="34" charset="-122"/>
                 <a:cs typeface="Inter" pitchFamily="34" charset="-120"/>
               </a:rPr>
-              <a:t>1</a:t>
-            </a:r>
-            <a:r>
-              <a:rPr lang="ru-RU" sz="900" b="1" kern="0" spc="400" dirty="0">
-                <a:solidFill>
-                  <a:srgbClr val="C97B5B"/>
-                </a:solidFill>
-                <a:latin typeface="Inter" pitchFamily="34" charset="0"/>
-                <a:ea typeface="Inter" pitchFamily="34" charset="-122"/>
-                <a:cs typeface="Inter" pitchFamily="34" charset="-120"/>
-              </a:rPr>
-              <a:t>1</a:t>
+              <a:t>10</a:t>
             </a:r>
             <a:r>
               <a:rPr lang="en-US" sz="900" b="1" kern="0" spc="400" dirty="0">
@@ -5204,6 +3187,13 @@
             <a:prstDash val="solid"/>
           </a:ln>
         </p:spPr>
+        <p:txBody>
+          <a:bodyPr/>
+          <a:lstStyle/>
+          <a:p>
+            <a:endParaRPr lang="ru-RU"/>
+          </a:p>
+        </p:txBody>
       </p:sp>
       <p:sp>
         <p:nvSpPr>
@@ -5229,6 +3219,13 @@
             <a:prstDash val="solid"/>
           </a:ln>
         </p:spPr>
+        <p:txBody>
+          <a:bodyPr/>
+          <a:lstStyle/>
+          <a:p>
+            <a:endParaRPr lang="ru-RU"/>
+          </a:p>
+        </p:txBody>
       </p:sp>
       <p:sp>
         <p:nvSpPr>
@@ -5337,6 +3334,13 @@
             <a:prstDash val="solid"/>
           </a:ln>
         </p:spPr>
+        <p:txBody>
+          <a:bodyPr/>
+          <a:lstStyle/>
+          <a:p>
+            <a:endParaRPr lang="ru-RU"/>
+          </a:p>
+        </p:txBody>
       </p:sp>
       <p:sp>
         <p:nvSpPr>
@@ -5362,6 +3366,13 @@
             <a:prstDash val="solid"/>
           </a:ln>
         </p:spPr>
+        <p:txBody>
+          <a:bodyPr/>
+          <a:lstStyle/>
+          <a:p>
+            <a:endParaRPr lang="ru-RU"/>
+          </a:p>
+        </p:txBody>
       </p:sp>
       <p:sp>
         <p:nvSpPr>
@@ -5470,6 +3481,13 @@
             <a:prstDash val="solid"/>
           </a:ln>
         </p:spPr>
+        <p:txBody>
+          <a:bodyPr/>
+          <a:lstStyle/>
+          <a:p>
+            <a:endParaRPr lang="ru-RU"/>
+          </a:p>
+        </p:txBody>
       </p:sp>
       <p:sp>
         <p:nvSpPr>
@@ -5495,6 +3513,13 @@
             <a:prstDash val="solid"/>
           </a:ln>
         </p:spPr>
+        <p:txBody>
+          <a:bodyPr/>
+          <a:lstStyle/>
+          <a:p>
+            <a:endParaRPr lang="ru-RU"/>
+          </a:p>
+        </p:txBody>
       </p:sp>
       <p:sp>
         <p:nvSpPr>
@@ -5603,6 +3628,13 @@
             <a:prstDash val="solid"/>
           </a:ln>
         </p:spPr>
+        <p:txBody>
+          <a:bodyPr/>
+          <a:lstStyle/>
+          <a:p>
+            <a:endParaRPr lang="ru-RU"/>
+          </a:p>
+        </p:txBody>
       </p:sp>
       <p:sp>
         <p:nvSpPr>
@@ -5628,6 +3660,13 @@
             <a:prstDash val="solid"/>
           </a:ln>
         </p:spPr>
+        <p:txBody>
+          <a:bodyPr/>
+          <a:lstStyle/>
+          <a:p>
+            <a:endParaRPr lang="ru-RU"/>
+          </a:p>
+        </p:txBody>
       </p:sp>
       <p:sp>
         <p:nvSpPr>
@@ -5707,78 +3746,6 @@
               <a:t>Удаление задачи (запись остаётся в истории даже после удаления).</a:t>
             </a:r>
             <a:endParaRPr lang="en-US" sz="1100" dirty="0"/>
-          </a:p>
-        </p:txBody>
-      </p:sp>
-      <p:sp>
-        <p:nvSpPr>
-          <p:cNvPr id="26" name="Text 24"/>
-          <p:cNvSpPr/>
-          <p:nvPr/>
-        </p:nvSpPr>
-        <p:spPr>
-          <a:xfrm>
-            <a:off x="548640" y="6400800"/>
-            <a:ext cx="3657600" cy="320040"/>
-          </a:xfrm>
-          <a:prstGeom prst="rect">
-            <a:avLst/>
-          </a:prstGeom>
-          <a:noFill/>
-          <a:ln/>
-        </p:spPr>
-        <p:txBody>
-          <a:bodyPr wrap="square" lIns="0" tIns="0" rIns="0" bIns="0" rtlCol="0" anchor="ctr"/>
-          <a:lstStyle/>
-          <a:p>
-            <a:pPr marL="0" indent="0">
-              <a:buNone/>
-            </a:pPr>
-            <a:r>
-              <a:rPr lang="en-US" sz="800" kern="0" spc="300" dirty="0">
-                <a:solidFill>
-                  <a:srgbClr val="8A8580"/>
-                </a:solidFill>
-                <a:latin typeface="Inter" pitchFamily="34" charset="0"/>
-                <a:ea typeface="Inter" pitchFamily="34" charset="-122"/>
-                <a:cs typeface="Inter" pitchFamily="34" charset="-120"/>
-              </a:rPr>
-              <a:t>KANBAN  /  1</a:t>
-            </a:r>
-            <a:r>
-              <a:rPr lang="ru-RU" sz="800" kern="0" spc="300" dirty="0">
-                <a:solidFill>
-                  <a:srgbClr val="8A8580"/>
-                </a:solidFill>
-                <a:latin typeface="Inter" pitchFamily="34" charset="0"/>
-                <a:ea typeface="Inter" pitchFamily="34" charset="-122"/>
-                <a:cs typeface="Inter" pitchFamily="34" charset="-120"/>
-              </a:rPr>
-              <a:t>2</a:t>
-            </a:r>
-            <a:r>
-              <a:rPr lang="en-US" sz="800" kern="0" spc="300" dirty="0">
-                <a:solidFill>
-                  <a:srgbClr val="8A8580"/>
-                </a:solidFill>
-                <a:latin typeface="Inter" pitchFamily="34" charset="0"/>
-                <a:ea typeface="Inter" pitchFamily="34" charset="-122"/>
-                <a:cs typeface="Inter" pitchFamily="34" charset="-120"/>
-              </a:rPr>
-              <a:t> — </a:t>
-            </a:r>
-            <a:r>
-              <a:rPr lang="ru-RU" sz="800" kern="0" spc="300" dirty="0">
-                <a:solidFill>
-                  <a:srgbClr val="8A8580"/>
-                </a:solidFill>
-                <a:latin typeface="Inter" pitchFamily="34" charset="0"/>
-                <a:ea typeface="Inter" pitchFamily="34" charset="-122"/>
-                <a:cs typeface="Inter" pitchFamily="34" charset="-120"/>
-              </a:rPr>
-              <a:t>17</a:t>
-            </a:r>
-            <a:endParaRPr lang="en-US" sz="800" dirty="0"/>
           </a:p>
         </p:txBody>
       </p:sp>
@@ -5790,1738 +3757,7 @@
 </p:sld>
 </file>
 
-<file path=ppt/slides/slide13.xml><?xml version="1.0" encoding="utf-8"?>
-<p:sld xmlns:a="http://schemas.openxmlformats.org/drawingml/2006/main" xmlns:r="http://schemas.openxmlformats.org/officeDocument/2006/relationships" xmlns:p="http://schemas.openxmlformats.org/presentationml/2006/main">
-  <p:cSld name="Slide 16">
-    <p:bg>
-      <p:bgPr>
-        <a:solidFill>
-          <a:srgbClr val="F5F4F0"/>
-        </a:solidFill>
-        <a:effectLst/>
-      </p:bgPr>
-    </p:bg>
-    <p:spTree>
-      <p:nvGrpSpPr>
-        <p:cNvPr id="1" name=""/>
-        <p:cNvGrpSpPr/>
-        <p:nvPr/>
-      </p:nvGrpSpPr>
-      <p:grpSpPr>
-        <a:xfrm>
-          <a:off x="0" y="0"/>
-          <a:ext cx="0" cy="0"/>
-          <a:chOff x="0" y="0"/>
-          <a:chExt cx="0" cy="0"/>
-        </a:xfrm>
-      </p:grpSpPr>
-      <p:sp>
-        <p:nvSpPr>
-          <p:cNvPr id="7" name="Text 5"/>
-          <p:cNvSpPr/>
-          <p:nvPr/>
-        </p:nvSpPr>
-        <p:spPr>
-          <a:xfrm>
-            <a:off x="548640" y="914400"/>
-            <a:ext cx="3657600" cy="274320"/>
-          </a:xfrm>
-          <a:prstGeom prst="rect">
-            <a:avLst/>
-          </a:prstGeom>
-          <a:noFill/>
-          <a:ln/>
-        </p:spPr>
-        <p:txBody>
-          <a:bodyPr wrap="square" lIns="0" tIns="0" rIns="0" bIns="0" rtlCol="0" anchor="ctr"/>
-          <a:lstStyle/>
-          <a:p>
-            <a:pPr marL="0" indent="0">
-              <a:buNone/>
-            </a:pPr>
-            <a:r>
-              <a:rPr lang="en-US" sz="900" b="1" kern="0" spc="400" dirty="0">
-                <a:solidFill>
-                  <a:srgbClr val="C97B5B"/>
-                </a:solidFill>
-                <a:latin typeface="Inter" pitchFamily="34" charset="0"/>
-                <a:ea typeface="Inter" pitchFamily="34" charset="-122"/>
-                <a:cs typeface="Inter" pitchFamily="34" charset="-120"/>
-              </a:rPr>
-              <a:t>1</a:t>
-            </a:r>
-            <a:r>
-              <a:rPr lang="ru-RU" sz="900" b="1" kern="0" spc="400" dirty="0">
-                <a:solidFill>
-                  <a:srgbClr val="C97B5B"/>
-                </a:solidFill>
-                <a:latin typeface="Inter" pitchFamily="34" charset="0"/>
-                <a:ea typeface="Inter" pitchFamily="34" charset="-122"/>
-                <a:cs typeface="Inter" pitchFamily="34" charset="-120"/>
-              </a:rPr>
-              <a:t>2</a:t>
-            </a:r>
-            <a:r>
-              <a:rPr lang="en-US" sz="900" b="1" kern="0" spc="400" dirty="0">
-                <a:solidFill>
-                  <a:srgbClr val="C97B5B"/>
-                </a:solidFill>
-                <a:latin typeface="Inter" pitchFamily="34" charset="0"/>
-                <a:ea typeface="Inter" pitchFamily="34" charset="-122"/>
-                <a:cs typeface="Inter" pitchFamily="34" charset="-120"/>
-              </a:rPr>
-              <a:t>  /  ОШИБКИ</a:t>
-            </a:r>
-            <a:endParaRPr lang="en-US" sz="900" dirty="0"/>
-          </a:p>
-        </p:txBody>
-      </p:sp>
-      <p:sp>
-        <p:nvSpPr>
-          <p:cNvPr id="8" name="Text 6"/>
-          <p:cNvSpPr/>
-          <p:nvPr/>
-        </p:nvSpPr>
-        <p:spPr>
-          <a:xfrm>
-            <a:off x="548640" y="1280160"/>
-            <a:ext cx="11064240" cy="914400"/>
-          </a:xfrm>
-          <a:prstGeom prst="rect">
-            <a:avLst/>
-          </a:prstGeom>
-          <a:noFill/>
-          <a:ln/>
-        </p:spPr>
-        <p:txBody>
-          <a:bodyPr wrap="square" lIns="0" tIns="0" rIns="0" bIns="0" rtlCol="0" anchor="ctr">
-            <a:normAutofit/>
-          </a:bodyPr>
-          <a:lstStyle/>
-          <a:p>
-            <a:pPr marL="0" indent="0" algn="l">
-              <a:buNone/>
-            </a:pPr>
-            <a:r>
-              <a:rPr lang="en-US" sz="4800" b="1" dirty="0">
-                <a:solidFill>
-                  <a:srgbClr val="0A0A0A"/>
-                </a:solidFill>
-                <a:latin typeface="Playfair Display" pitchFamily="34" charset="0"/>
-                <a:ea typeface="Playfair Display" pitchFamily="34" charset="-122"/>
-                <a:cs typeface="Playfair Display" pitchFamily="34" charset="-120"/>
-              </a:rPr>
-              <a:t>Единый формат ошибок.</a:t>
-            </a:r>
-            <a:endParaRPr lang="en-US" sz="4800" dirty="0"/>
-          </a:p>
-        </p:txBody>
-      </p:sp>
-      <p:sp>
-        <p:nvSpPr>
-          <p:cNvPr id="9" name="Text 7"/>
-          <p:cNvSpPr/>
-          <p:nvPr/>
-        </p:nvSpPr>
-        <p:spPr>
-          <a:xfrm>
-            <a:off x="548640" y="2377440"/>
-            <a:ext cx="5212080" cy="365760"/>
-          </a:xfrm>
-          <a:prstGeom prst="rect">
-            <a:avLst/>
-          </a:prstGeom>
-          <a:noFill/>
-          <a:ln/>
-        </p:spPr>
-        <p:txBody>
-          <a:bodyPr wrap="square" lIns="0" tIns="0" rIns="0" bIns="0" rtlCol="0" anchor="ctr"/>
-          <a:lstStyle/>
-          <a:p>
-            <a:pPr marL="0" indent="0">
-              <a:buNone/>
-            </a:pPr>
-            <a:r>
-              <a:rPr lang="en-US" sz="2200" b="1" dirty="0">
-                <a:solidFill>
-                  <a:srgbClr val="0A0A0A"/>
-                </a:solidFill>
-                <a:latin typeface="Playfair Display" pitchFamily="34" charset="0"/>
-                <a:ea typeface="Playfair Display" pitchFamily="34" charset="-122"/>
-                <a:cs typeface="Playfair Display" pitchFamily="34" charset="-120"/>
-              </a:rPr>
-              <a:t>GlobalExceptionHandler</a:t>
-            </a:r>
-            <a:endParaRPr lang="en-US" sz="2200" dirty="0"/>
-          </a:p>
-        </p:txBody>
-      </p:sp>
-      <p:sp>
-        <p:nvSpPr>
-          <p:cNvPr id="10" name="Text 8"/>
-          <p:cNvSpPr/>
-          <p:nvPr/>
-        </p:nvSpPr>
-        <p:spPr>
-          <a:xfrm>
-            <a:off x="548640" y="2834640"/>
-            <a:ext cx="5212080" cy="914400"/>
-          </a:xfrm>
-          <a:prstGeom prst="rect">
-            <a:avLst/>
-          </a:prstGeom>
-          <a:noFill/>
-          <a:ln/>
-        </p:spPr>
-        <p:txBody>
-          <a:bodyPr wrap="square" lIns="0" tIns="0" rIns="0" bIns="0" rtlCol="0" anchor="ctr"/>
-          <a:lstStyle/>
-          <a:p>
-            <a:pPr marL="0" indent="0">
-              <a:lnSpc>
-                <a:spcPct val="140000"/>
-              </a:lnSpc>
-              <a:buNone/>
-            </a:pPr>
-            <a:r>
-              <a:rPr lang="en-US" sz="1200" dirty="0">
-                <a:solidFill>
-                  <a:srgbClr val="3D3D3D"/>
-                </a:solidFill>
-                <a:latin typeface="Inter" pitchFamily="34" charset="0"/>
-                <a:ea typeface="Inter" pitchFamily="34" charset="-122"/>
-                <a:cs typeface="Inter" pitchFamily="34" charset="-120"/>
-              </a:rPr>
-              <a:t>@RestControllerAdvice ловит все ApiException и приводит к единому JSON-ответу. HTTP-код берётся из @ResponseStatus.</a:t>
-            </a:r>
-            <a:endParaRPr lang="en-US" sz="1200" dirty="0"/>
-          </a:p>
-        </p:txBody>
-      </p:sp>
-      <p:sp>
-        <p:nvSpPr>
-          <p:cNvPr id="11" name="Text 9"/>
-          <p:cNvSpPr/>
-          <p:nvPr/>
-        </p:nvSpPr>
-        <p:spPr>
-          <a:xfrm>
-            <a:off x="548640" y="3840480"/>
-            <a:ext cx="5212080" cy="365760"/>
-          </a:xfrm>
-          <a:prstGeom prst="rect">
-            <a:avLst/>
-          </a:prstGeom>
-          <a:noFill/>
-          <a:ln/>
-        </p:spPr>
-        <p:txBody>
-          <a:bodyPr wrap="square" lIns="0" tIns="0" rIns="0" bIns="0" rtlCol="0" anchor="ctr"/>
-          <a:lstStyle/>
-          <a:p>
-            <a:pPr marL="0" indent="0">
-              <a:buNone/>
-            </a:pPr>
-            <a:r>
-              <a:rPr lang="en-US" sz="2200" b="1" dirty="0">
-                <a:solidFill>
-                  <a:srgbClr val="0A0A0A"/>
-                </a:solidFill>
-                <a:latin typeface="Playfair Display" pitchFamily="34" charset="0"/>
-                <a:ea typeface="Playfair Display" pitchFamily="34" charset="-122"/>
-                <a:cs typeface="Playfair Display" pitchFamily="34" charset="-120"/>
-              </a:rPr>
-              <a:t>ErrorCode</a:t>
-            </a:r>
-            <a:endParaRPr lang="en-US" sz="2200" dirty="0"/>
-          </a:p>
-        </p:txBody>
-      </p:sp>
-      <p:sp>
-        <p:nvSpPr>
-          <p:cNvPr id="12" name="Text 10"/>
-          <p:cNvSpPr/>
-          <p:nvPr/>
-        </p:nvSpPr>
-        <p:spPr>
-          <a:xfrm>
-            <a:off x="548640" y="4297680"/>
-            <a:ext cx="5212080" cy="1554480"/>
-          </a:xfrm>
-          <a:prstGeom prst="rect">
-            <a:avLst/>
-          </a:prstGeom>
-          <a:noFill/>
-          <a:ln/>
-        </p:spPr>
-        <p:txBody>
-          <a:bodyPr wrap="square" lIns="0" tIns="0" rIns="0" bIns="0" rtlCol="0" anchor="ctr"/>
-          <a:lstStyle/>
-          <a:p>
-            <a:pPr marL="0" indent="0">
-              <a:lnSpc>
-                <a:spcPct val="140000"/>
-              </a:lnSpc>
-              <a:buNone/>
-            </a:pPr>
-            <a:r>
-              <a:rPr lang="en-US" sz="1200" dirty="0">
-                <a:solidFill>
-                  <a:srgbClr val="3D3D3D"/>
-                </a:solidFill>
-                <a:latin typeface="Inter" pitchFamily="34" charset="0"/>
-                <a:ea typeface="Inter" pitchFamily="34" charset="-122"/>
-                <a:cs typeface="Inter" pitchFamily="34" charset="-120"/>
-              </a:rPr>
-              <a:t>Двухбуквенный префикс + 4 цифры: AU0001, US0002, BD0001 и т. д. Фронт берёт перевод по коду из i18n-словаря — message с сервера это только fallback.</a:t>
-            </a:r>
-            <a:endParaRPr lang="en-US" sz="1200" dirty="0"/>
-          </a:p>
-        </p:txBody>
-      </p:sp>
-      <p:sp>
-        <p:nvSpPr>
-          <p:cNvPr id="13" name="Shape 11"/>
-          <p:cNvSpPr/>
-          <p:nvPr/>
-        </p:nvSpPr>
-        <p:spPr>
-          <a:xfrm>
-            <a:off x="6126480" y="2377440"/>
-            <a:ext cx="5486400" cy="4023360"/>
-          </a:xfrm>
-          <a:prstGeom prst="roundRect">
-            <a:avLst>
-              <a:gd name="adj" fmla="val 1818"/>
-            </a:avLst>
-          </a:prstGeom>
-          <a:solidFill>
-            <a:srgbClr val="0A0A0A"/>
-          </a:solidFill>
-          <a:ln w="12700">
-            <a:solidFill>
-              <a:srgbClr val="0A0A0A"/>
-            </a:solidFill>
-            <a:prstDash val="solid"/>
-          </a:ln>
-        </p:spPr>
-      </p:sp>
-      <p:sp>
-        <p:nvSpPr>
-          <p:cNvPr id="14" name="Text 12"/>
-          <p:cNvSpPr/>
-          <p:nvPr/>
-        </p:nvSpPr>
-        <p:spPr>
-          <a:xfrm>
-            <a:off x="6400800" y="2560320"/>
-            <a:ext cx="4937760" cy="274320"/>
-          </a:xfrm>
-          <a:prstGeom prst="rect">
-            <a:avLst/>
-          </a:prstGeom>
-          <a:noFill/>
-          <a:ln/>
-        </p:spPr>
-        <p:txBody>
-          <a:bodyPr wrap="square" lIns="0" tIns="0" rIns="0" bIns="0" rtlCol="0" anchor="ctr"/>
-          <a:lstStyle/>
-          <a:p>
-            <a:pPr marL="0" indent="0">
-              <a:buNone/>
-            </a:pPr>
-            <a:r>
-              <a:rPr lang="en-US" sz="1000" dirty="0">
-                <a:solidFill>
-                  <a:srgbClr val="8A8580"/>
-                </a:solidFill>
-                <a:latin typeface="Consolas" pitchFamily="34" charset="0"/>
-                <a:ea typeface="Consolas" pitchFamily="34" charset="-122"/>
-                <a:cs typeface="Consolas" pitchFamily="34" charset="-120"/>
-              </a:rPr>
-              <a:t>ErrorResponse JSON</a:t>
-            </a:r>
-            <a:endParaRPr lang="en-US" sz="1000" dirty="0"/>
-          </a:p>
-        </p:txBody>
-      </p:sp>
-      <p:sp>
-        <p:nvSpPr>
-          <p:cNvPr id="15" name="Shape 13"/>
-          <p:cNvSpPr/>
-          <p:nvPr/>
-        </p:nvSpPr>
-        <p:spPr>
-          <a:xfrm>
-            <a:off x="6400800" y="2880360"/>
-            <a:ext cx="1828800" cy="0"/>
-          </a:xfrm>
-          <a:prstGeom prst="line">
-            <a:avLst/>
-          </a:prstGeom>
-          <a:noFill/>
-          <a:ln w="6350">
-            <a:solidFill>
-              <a:srgbClr val="3D3D3D"/>
-            </a:solidFill>
-            <a:prstDash val="solid"/>
-          </a:ln>
-        </p:spPr>
-      </p:sp>
-      <p:sp>
-        <p:nvSpPr>
-          <p:cNvPr id="16" name="Text 14"/>
-          <p:cNvSpPr/>
-          <p:nvPr/>
-        </p:nvSpPr>
-        <p:spPr>
-          <a:xfrm>
-            <a:off x="6400800" y="3063240"/>
-            <a:ext cx="4937760" cy="3200400"/>
-          </a:xfrm>
-          <a:prstGeom prst="rect">
-            <a:avLst/>
-          </a:prstGeom>
-          <a:noFill/>
-          <a:ln/>
-        </p:spPr>
-        <p:txBody>
-          <a:bodyPr wrap="square" lIns="0" tIns="0" rIns="0" bIns="0" rtlCol="0" anchor="ctr"/>
-          <a:lstStyle/>
-          <a:p>
-            <a:pPr marL="0" indent="0">
-              <a:lnSpc>
-                <a:spcPct val="125000"/>
-              </a:lnSpc>
-              <a:buNone/>
-            </a:pPr>
-            <a:r>
-              <a:rPr lang="en-US" sz="1000" dirty="0">
-                <a:solidFill>
-                  <a:srgbClr val="ECEAE4"/>
-                </a:solidFill>
-                <a:latin typeface="Consolas" pitchFamily="34" charset="0"/>
-                <a:ea typeface="Consolas" pitchFamily="34" charset="-122"/>
-                <a:cs typeface="Consolas" pitchFamily="34" charset="-120"/>
-              </a:rPr>
-              <a:t>// HTTP 403 Forbidden</a:t>
-            </a:r>
-            <a:endParaRPr lang="en-US" sz="1000" dirty="0"/>
-          </a:p>
-          <a:p>
-            <a:pPr marL="0" indent="0">
-              <a:lnSpc>
-                <a:spcPct val="125000"/>
-              </a:lnSpc>
-              <a:buNone/>
-            </a:pPr>
-            <a:r>
-              <a:rPr lang="en-US" sz="1000" dirty="0">
-                <a:solidFill>
-                  <a:srgbClr val="ECEAE4"/>
-                </a:solidFill>
-                <a:latin typeface="Consolas" pitchFamily="34" charset="0"/>
-                <a:ea typeface="Consolas" pitchFamily="34" charset="-122"/>
-                <a:cs typeface="Consolas" pitchFamily="34" charset="-120"/>
-              </a:rPr>
-              <a:t>{</a:t>
-            </a:r>
-            <a:endParaRPr lang="en-US" sz="1000" dirty="0"/>
-          </a:p>
-          <a:p>
-            <a:pPr marL="0" indent="0">
-              <a:lnSpc>
-                <a:spcPct val="125000"/>
-              </a:lnSpc>
-              <a:buNone/>
-            </a:pPr>
-            <a:r>
-              <a:rPr lang="en-US" sz="1000" dirty="0">
-                <a:solidFill>
-                  <a:srgbClr val="ECEAE4"/>
-                </a:solidFill>
-                <a:latin typeface="Consolas" pitchFamily="34" charset="0"/>
-                <a:ea typeface="Consolas" pitchFamily="34" charset="-122"/>
-                <a:cs typeface="Consolas" pitchFamily="34" charset="-120"/>
-              </a:rPr>
-              <a:t>  "code": "GR0001",</a:t>
-            </a:r>
-            <a:endParaRPr lang="en-US" sz="1000" dirty="0"/>
-          </a:p>
-          <a:p>
-            <a:pPr marL="0" indent="0">
-              <a:lnSpc>
-                <a:spcPct val="125000"/>
-              </a:lnSpc>
-              <a:buNone/>
-            </a:pPr>
-            <a:r>
-              <a:rPr lang="en-US" sz="1000" dirty="0">
-                <a:solidFill>
-                  <a:srgbClr val="ECEAE4"/>
-                </a:solidFill>
-                <a:latin typeface="Consolas" pitchFamily="34" charset="0"/>
-                <a:ea typeface="Consolas" pitchFamily="34" charset="-122"/>
-                <a:cs typeface="Consolas" pitchFamily="34" charset="-120"/>
-              </a:rPr>
-              <a:t>  "message": "Требуются права администратора",</a:t>
-            </a:r>
-            <a:endParaRPr lang="en-US" sz="1000" dirty="0"/>
-          </a:p>
-          <a:p>
-            <a:pPr marL="0" indent="0">
-              <a:lnSpc>
-                <a:spcPct val="125000"/>
-              </a:lnSpc>
-              <a:buNone/>
-            </a:pPr>
-            <a:r>
-              <a:rPr lang="en-US" sz="1000" dirty="0">
-                <a:solidFill>
-                  <a:srgbClr val="ECEAE4"/>
-                </a:solidFill>
-                <a:latin typeface="Consolas" pitchFamily="34" charset="0"/>
-                <a:ea typeface="Consolas" pitchFamily="34" charset="-122"/>
-                <a:cs typeface="Consolas" pitchFamily="34" charset="-120"/>
-              </a:rPr>
-              <a:t>  "details": null</a:t>
-            </a:r>
-            <a:endParaRPr lang="en-US" sz="1000" dirty="0"/>
-          </a:p>
-          <a:p>
-            <a:pPr marL="0" indent="0">
-              <a:lnSpc>
-                <a:spcPct val="125000"/>
-              </a:lnSpc>
-              <a:buNone/>
-            </a:pPr>
-            <a:r>
-              <a:rPr lang="en-US" sz="1000" dirty="0">
-                <a:solidFill>
-                  <a:srgbClr val="ECEAE4"/>
-                </a:solidFill>
-                <a:latin typeface="Consolas" pitchFamily="34" charset="0"/>
-                <a:ea typeface="Consolas" pitchFamily="34" charset="-122"/>
-                <a:cs typeface="Consolas" pitchFamily="34" charset="-120"/>
-              </a:rPr>
-              <a:t>}</a:t>
-            </a:r>
-            <a:endParaRPr lang="en-US" sz="1000" dirty="0"/>
-          </a:p>
-          <a:p>
-            <a:pPr marL="0" indent="0">
-              <a:lnSpc>
-                <a:spcPct val="125000"/>
-              </a:lnSpc>
-              <a:buNone/>
-            </a:pPr>
-            <a:endParaRPr lang="en-US" sz="1000" dirty="0"/>
-          </a:p>
-          <a:p>
-            <a:pPr marL="0" indent="0">
-              <a:lnSpc>
-                <a:spcPct val="125000"/>
-              </a:lnSpc>
-              <a:buNone/>
-            </a:pPr>
-            <a:r>
-              <a:rPr lang="en-US" sz="1000" dirty="0">
-                <a:solidFill>
-                  <a:srgbClr val="ECEAE4"/>
-                </a:solidFill>
-                <a:latin typeface="Consolas" pitchFamily="34" charset="0"/>
-                <a:ea typeface="Consolas" pitchFamily="34" charset="-122"/>
-                <a:cs typeface="Consolas" pitchFamily="34" charset="-120"/>
-              </a:rPr>
-              <a:t>// HTTP 400 — валидация (несколько полей)</a:t>
-            </a:r>
-            <a:endParaRPr lang="en-US" sz="1000" dirty="0"/>
-          </a:p>
-          <a:p>
-            <a:pPr marL="0" indent="0">
-              <a:lnSpc>
-                <a:spcPct val="125000"/>
-              </a:lnSpc>
-              <a:buNone/>
-            </a:pPr>
-            <a:r>
-              <a:rPr lang="en-US" sz="1000" dirty="0">
-                <a:solidFill>
-                  <a:srgbClr val="ECEAE4"/>
-                </a:solidFill>
-                <a:latin typeface="Consolas" pitchFamily="34" charset="0"/>
-                <a:ea typeface="Consolas" pitchFamily="34" charset="-122"/>
-                <a:cs typeface="Consolas" pitchFamily="34" charset="-120"/>
-              </a:rPr>
-              <a:t>{</a:t>
-            </a:r>
-            <a:endParaRPr lang="en-US" sz="1000" dirty="0"/>
-          </a:p>
-          <a:p>
-            <a:pPr marL="0" indent="0">
-              <a:lnSpc>
-                <a:spcPct val="125000"/>
-              </a:lnSpc>
-              <a:buNone/>
-            </a:pPr>
-            <a:r>
-              <a:rPr lang="en-US" sz="1000" dirty="0">
-                <a:solidFill>
-                  <a:srgbClr val="ECEAE4"/>
-                </a:solidFill>
-                <a:latin typeface="Consolas" pitchFamily="34" charset="0"/>
-                <a:ea typeface="Consolas" pitchFamily="34" charset="-122"/>
-                <a:cs typeface="Consolas" pitchFamily="34" charset="-120"/>
-              </a:rPr>
-              <a:t>  "code": "VA0001",</a:t>
-            </a:r>
-            <a:endParaRPr lang="en-US" sz="1000" dirty="0"/>
-          </a:p>
-          <a:p>
-            <a:pPr marL="0" indent="0">
-              <a:lnSpc>
-                <a:spcPct val="125000"/>
-              </a:lnSpc>
-              <a:buNone/>
-            </a:pPr>
-            <a:r>
-              <a:rPr lang="en-US" sz="1000" dirty="0">
-                <a:solidFill>
-                  <a:srgbClr val="ECEAE4"/>
-                </a:solidFill>
-                <a:latin typeface="Consolas" pitchFamily="34" charset="0"/>
-                <a:ea typeface="Consolas" pitchFamily="34" charset="-122"/>
-                <a:cs typeface="Consolas" pitchFamily="34" charset="-120"/>
-              </a:rPr>
-              <a:t>  "message": "Ошибка валидации",</a:t>
-            </a:r>
-            <a:endParaRPr lang="en-US" sz="1000" dirty="0"/>
-          </a:p>
-          <a:p>
-            <a:pPr marL="0" indent="0">
-              <a:lnSpc>
-                <a:spcPct val="125000"/>
-              </a:lnSpc>
-              <a:buNone/>
-            </a:pPr>
-            <a:r>
-              <a:rPr lang="en-US" sz="1000" dirty="0">
-                <a:solidFill>
-                  <a:srgbClr val="ECEAE4"/>
-                </a:solidFill>
-                <a:latin typeface="Consolas" pitchFamily="34" charset="0"/>
-                <a:ea typeface="Consolas" pitchFamily="34" charset="-122"/>
-                <a:cs typeface="Consolas" pitchFamily="34" charset="-120"/>
-              </a:rPr>
-              <a:t>  "details": {</a:t>
-            </a:r>
-            <a:endParaRPr lang="en-US" sz="1000" dirty="0"/>
-          </a:p>
-          <a:p>
-            <a:pPr marL="0" indent="0">
-              <a:lnSpc>
-                <a:spcPct val="125000"/>
-              </a:lnSpc>
-              <a:buNone/>
-            </a:pPr>
-            <a:r>
-              <a:rPr lang="en-US" sz="1000" dirty="0">
-                <a:solidFill>
-                  <a:srgbClr val="ECEAE4"/>
-                </a:solidFill>
-                <a:latin typeface="Consolas" pitchFamily="34" charset="0"/>
-                <a:ea typeface="Consolas" pitchFamily="34" charset="-122"/>
-                <a:cs typeface="Consolas" pitchFamily="34" charset="-120"/>
-              </a:rPr>
-              <a:t>    "fields": {</a:t>
-            </a:r>
-            <a:endParaRPr lang="en-US" sz="1000" dirty="0"/>
-          </a:p>
-          <a:p>
-            <a:pPr marL="0" indent="0">
-              <a:lnSpc>
-                <a:spcPct val="125000"/>
-              </a:lnSpc>
-              <a:buNone/>
-            </a:pPr>
-            <a:r>
-              <a:rPr lang="en-US" sz="1000" dirty="0">
-                <a:solidFill>
-                  <a:srgbClr val="ECEAE4"/>
-                </a:solidFill>
-                <a:latin typeface="Consolas" pitchFamily="34" charset="0"/>
-                <a:ea typeface="Consolas" pitchFamily="34" charset="-122"/>
-                <a:cs typeface="Consolas" pitchFamily="34" charset="-120"/>
-              </a:rPr>
-              <a:t>      "email": "Некорректный email",</a:t>
-            </a:r>
-            <a:endParaRPr lang="en-US" sz="1000" dirty="0"/>
-          </a:p>
-          <a:p>
-            <a:pPr marL="0" indent="0">
-              <a:lnSpc>
-                <a:spcPct val="125000"/>
-              </a:lnSpc>
-              <a:buNone/>
-            </a:pPr>
-            <a:r>
-              <a:rPr lang="en-US" sz="1000" dirty="0">
-                <a:solidFill>
-                  <a:srgbClr val="ECEAE4"/>
-                </a:solidFill>
-                <a:latin typeface="Consolas" pitchFamily="34" charset="0"/>
-                <a:ea typeface="Consolas" pitchFamily="34" charset="-122"/>
-                <a:cs typeface="Consolas" pitchFamily="34" charset="-120"/>
-              </a:rPr>
-              <a:t>      "password": "Минимум 8 символов"</a:t>
-            </a:r>
-            <a:endParaRPr lang="en-US" sz="1000" dirty="0"/>
-          </a:p>
-          <a:p>
-            <a:pPr marL="0" indent="0">
-              <a:lnSpc>
-                <a:spcPct val="125000"/>
-              </a:lnSpc>
-              <a:buNone/>
-            </a:pPr>
-            <a:r>
-              <a:rPr lang="en-US" sz="1000" dirty="0">
-                <a:solidFill>
-                  <a:srgbClr val="ECEAE4"/>
-                </a:solidFill>
-                <a:latin typeface="Consolas" pitchFamily="34" charset="0"/>
-                <a:ea typeface="Consolas" pitchFamily="34" charset="-122"/>
-                <a:cs typeface="Consolas" pitchFamily="34" charset="-120"/>
-              </a:rPr>
-              <a:t>} } }</a:t>
-            </a:r>
-            <a:endParaRPr lang="en-US" sz="1000" dirty="0"/>
-          </a:p>
-        </p:txBody>
-      </p:sp>
-      <p:sp>
-        <p:nvSpPr>
-          <p:cNvPr id="17" name="Text 15"/>
-          <p:cNvSpPr/>
-          <p:nvPr/>
-        </p:nvSpPr>
-        <p:spPr>
-          <a:xfrm>
-            <a:off x="548640" y="6400800"/>
-            <a:ext cx="3657600" cy="320040"/>
-          </a:xfrm>
-          <a:prstGeom prst="rect">
-            <a:avLst/>
-          </a:prstGeom>
-          <a:noFill/>
-          <a:ln/>
-        </p:spPr>
-        <p:txBody>
-          <a:bodyPr wrap="square" lIns="0" tIns="0" rIns="0" bIns="0" rtlCol="0" anchor="ctr"/>
-          <a:lstStyle/>
-          <a:p>
-            <a:pPr marL="0" indent="0">
-              <a:buNone/>
-            </a:pPr>
-            <a:r>
-              <a:rPr lang="en-US" sz="800" kern="0" spc="300" dirty="0">
-                <a:solidFill>
-                  <a:srgbClr val="8A8580"/>
-                </a:solidFill>
-                <a:latin typeface="Inter" pitchFamily="34" charset="0"/>
-                <a:ea typeface="Inter" pitchFamily="34" charset="-122"/>
-                <a:cs typeface="Inter" pitchFamily="34" charset="-120"/>
-              </a:rPr>
-              <a:t>KANBAN  /  1</a:t>
-            </a:r>
-            <a:r>
-              <a:rPr lang="ru-RU" sz="800" kern="0" spc="300" dirty="0">
-                <a:solidFill>
-                  <a:srgbClr val="8A8580"/>
-                </a:solidFill>
-                <a:latin typeface="Inter" pitchFamily="34" charset="0"/>
-                <a:ea typeface="Inter" pitchFamily="34" charset="-122"/>
-                <a:cs typeface="Inter" pitchFamily="34" charset="-120"/>
-              </a:rPr>
-              <a:t>3</a:t>
-            </a:r>
-            <a:r>
-              <a:rPr lang="en-US" sz="800" kern="0" spc="300" dirty="0">
-                <a:solidFill>
-                  <a:srgbClr val="8A8580"/>
-                </a:solidFill>
-                <a:latin typeface="Inter" pitchFamily="34" charset="0"/>
-                <a:ea typeface="Inter" pitchFamily="34" charset="-122"/>
-                <a:cs typeface="Inter" pitchFamily="34" charset="-120"/>
-              </a:rPr>
-              <a:t> — </a:t>
-            </a:r>
-            <a:r>
-              <a:rPr lang="ru-RU" sz="800" kern="0" spc="300" dirty="0">
-                <a:solidFill>
-                  <a:srgbClr val="8A8580"/>
-                </a:solidFill>
-                <a:latin typeface="Inter" pitchFamily="34" charset="0"/>
-                <a:ea typeface="Inter" pitchFamily="34" charset="-122"/>
-                <a:cs typeface="Inter" pitchFamily="34" charset="-120"/>
-              </a:rPr>
-              <a:t>17</a:t>
-            </a:r>
-            <a:endParaRPr lang="en-US" sz="800" dirty="0"/>
-          </a:p>
-        </p:txBody>
-      </p:sp>
-    </p:spTree>
-  </p:cSld>
-  <p:clrMapOvr>
-    <a:masterClrMapping/>
-  </p:clrMapOvr>
-</p:sld>
-</file>
-
-<file path=ppt/slides/slide14.xml><?xml version="1.0" encoding="utf-8"?>
-<p:sld xmlns:a="http://schemas.openxmlformats.org/drawingml/2006/main" xmlns:r="http://schemas.openxmlformats.org/officeDocument/2006/relationships" xmlns:p="http://schemas.openxmlformats.org/presentationml/2006/main">
-  <p:cSld name="Slide 17">
-    <p:bg>
-      <p:bgPr>
-        <a:solidFill>
-          <a:srgbClr val="F5F4F0"/>
-        </a:solidFill>
-        <a:effectLst/>
-      </p:bgPr>
-    </p:bg>
-    <p:spTree>
-      <p:nvGrpSpPr>
-        <p:cNvPr id="1" name=""/>
-        <p:cNvGrpSpPr/>
-        <p:nvPr/>
-      </p:nvGrpSpPr>
-      <p:grpSpPr>
-        <a:xfrm>
-          <a:off x="0" y="0"/>
-          <a:ext cx="0" cy="0"/>
-          <a:chOff x="0" y="0"/>
-          <a:chExt cx="0" cy="0"/>
-        </a:xfrm>
-      </p:grpSpPr>
-      <p:sp>
-        <p:nvSpPr>
-          <p:cNvPr id="2" name="Text 0"/>
-          <p:cNvSpPr/>
-          <p:nvPr/>
-        </p:nvSpPr>
-        <p:spPr>
-          <a:xfrm>
-            <a:off x="548640" y="292608"/>
-            <a:ext cx="1828800" cy="411480"/>
-          </a:xfrm>
-          <a:prstGeom prst="rect">
-            <a:avLst/>
-          </a:prstGeom>
-          <a:noFill/>
-          <a:ln/>
-        </p:spPr>
-        <p:txBody>
-          <a:bodyPr wrap="square" lIns="0" tIns="0" rIns="0" bIns="0" rtlCol="0" anchor="ctr"/>
-          <a:lstStyle/>
-          <a:p>
-            <a:pPr marL="0" indent="0">
-              <a:buNone/>
-            </a:pPr>
-            <a:r>
-              <a:rPr lang="en-US" sz="1400" b="1" kern="0" spc="400" dirty="0">
-                <a:solidFill>
-                  <a:srgbClr val="0A0A0A"/>
-                </a:solidFill>
-                <a:latin typeface="Inter" pitchFamily="34" charset="0"/>
-                <a:ea typeface="Inter" pitchFamily="34" charset="-122"/>
-                <a:cs typeface="Inter" pitchFamily="34" charset="-120"/>
-              </a:rPr>
-              <a:t>KANBAN</a:t>
-            </a:r>
-            <a:endParaRPr lang="en-US" sz="1400" dirty="0"/>
-          </a:p>
-        </p:txBody>
-      </p:sp>
-      <p:sp>
-        <p:nvSpPr>
-          <p:cNvPr id="3" name="Text 1"/>
-          <p:cNvSpPr/>
-          <p:nvPr/>
-        </p:nvSpPr>
-        <p:spPr>
-          <a:xfrm>
-            <a:off x="4206240" y="292608"/>
-            <a:ext cx="3749040" cy="411480"/>
-          </a:xfrm>
-          <a:prstGeom prst="rect">
-            <a:avLst/>
-          </a:prstGeom>
-          <a:noFill/>
-          <a:ln/>
-        </p:spPr>
-        <p:txBody>
-          <a:bodyPr wrap="square" lIns="0" tIns="0" rIns="0" bIns="0" rtlCol="0" anchor="ctr"/>
-          <a:lstStyle/>
-          <a:p>
-            <a:pPr marL="0" indent="0" algn="ctr">
-              <a:buNone/>
-            </a:pPr>
-            <a:r>
-              <a:rPr lang="en-US" sz="900" kern="0" spc="300" dirty="0">
-                <a:solidFill>
-                  <a:srgbClr val="8A8580"/>
-                </a:solidFill>
-                <a:latin typeface="Inter" pitchFamily="34" charset="0"/>
-                <a:ea typeface="Inter" pitchFamily="34" charset="-122"/>
-                <a:cs typeface="Inter" pitchFamily="34" charset="-120"/>
-              </a:rPr>
-              <a:t>FEATURES   HOW IT WORKS   STATS</a:t>
-            </a:r>
-            <a:endParaRPr lang="en-US" sz="900" dirty="0"/>
-          </a:p>
-        </p:txBody>
-      </p:sp>
-      <p:sp>
-        <p:nvSpPr>
-          <p:cNvPr id="4" name="Text 2"/>
-          <p:cNvSpPr/>
-          <p:nvPr/>
-        </p:nvSpPr>
-        <p:spPr>
-          <a:xfrm>
-            <a:off x="9509760" y="292608"/>
-            <a:ext cx="914400" cy="411480"/>
-          </a:xfrm>
-          <a:prstGeom prst="rect">
-            <a:avLst/>
-          </a:prstGeom>
-          <a:noFill/>
-          <a:ln/>
-        </p:spPr>
-        <p:txBody>
-          <a:bodyPr wrap="square" lIns="0" tIns="0" rIns="0" bIns="0" rtlCol="0" anchor="ctr"/>
-          <a:lstStyle/>
-          <a:p>
-            <a:pPr marL="0" indent="0" algn="r">
-              <a:buNone/>
-            </a:pPr>
-            <a:r>
-              <a:rPr lang="en-US" sz="900" kern="0" spc="300" dirty="0">
-                <a:solidFill>
-                  <a:srgbClr val="8A8580"/>
-                </a:solidFill>
-                <a:latin typeface="Inter" pitchFamily="34" charset="0"/>
-                <a:ea typeface="Inter" pitchFamily="34" charset="-122"/>
-                <a:cs typeface="Inter" pitchFamily="34" charset="-120"/>
-              </a:rPr>
-              <a:t>SIGN IN</a:t>
-            </a:r>
-            <a:endParaRPr lang="en-US" sz="900" dirty="0"/>
-          </a:p>
-        </p:txBody>
-      </p:sp>
-      <p:sp>
-        <p:nvSpPr>
-          <p:cNvPr id="5" name="Shape 3"/>
-          <p:cNvSpPr/>
-          <p:nvPr/>
-        </p:nvSpPr>
-        <p:spPr>
-          <a:xfrm>
-            <a:off x="10561320" y="292608"/>
-            <a:ext cx="1051560" cy="411480"/>
-          </a:xfrm>
-          <a:prstGeom prst="roundRect">
-            <a:avLst>
-              <a:gd name="adj" fmla="val 48889"/>
-            </a:avLst>
-          </a:prstGeom>
-          <a:solidFill>
-            <a:srgbClr val="0A0A0A"/>
-          </a:solidFill>
-          <a:ln w="12700">
-            <a:solidFill>
-              <a:srgbClr val="0A0A0A"/>
-            </a:solidFill>
-            <a:prstDash val="solid"/>
-          </a:ln>
-        </p:spPr>
-      </p:sp>
-      <p:sp>
-        <p:nvSpPr>
-          <p:cNvPr id="6" name="Text 4"/>
-          <p:cNvSpPr/>
-          <p:nvPr/>
-        </p:nvSpPr>
-        <p:spPr>
-          <a:xfrm>
-            <a:off x="10561320" y="292608"/>
-            <a:ext cx="1051560" cy="411480"/>
-          </a:xfrm>
-          <a:prstGeom prst="rect">
-            <a:avLst/>
-          </a:prstGeom>
-          <a:noFill/>
-          <a:ln/>
-        </p:spPr>
-        <p:txBody>
-          <a:bodyPr wrap="square" lIns="0" tIns="0" rIns="0" bIns="0" rtlCol="0" anchor="ctr"/>
-          <a:lstStyle/>
-          <a:p>
-            <a:pPr marL="0" indent="0" algn="ctr">
-              <a:buNone/>
-            </a:pPr>
-            <a:r>
-              <a:rPr lang="en-US" sz="1000" b="1" dirty="0">
-                <a:solidFill>
-                  <a:srgbClr val="FFFFFF"/>
-                </a:solidFill>
-                <a:latin typeface="Inter" pitchFamily="34" charset="0"/>
-                <a:ea typeface="Inter" pitchFamily="34" charset="-122"/>
-                <a:cs typeface="Inter" pitchFamily="34" charset="-120"/>
-              </a:rPr>
-              <a:t>Get Started</a:t>
-            </a:r>
-            <a:endParaRPr lang="en-US" sz="1000" dirty="0"/>
-          </a:p>
-        </p:txBody>
-      </p:sp>
-      <p:sp>
-        <p:nvSpPr>
-          <p:cNvPr id="7" name="Text 5"/>
-          <p:cNvSpPr/>
-          <p:nvPr/>
-        </p:nvSpPr>
-        <p:spPr>
-          <a:xfrm>
-            <a:off x="548640" y="914400"/>
-            <a:ext cx="3657600" cy="274320"/>
-          </a:xfrm>
-          <a:prstGeom prst="rect">
-            <a:avLst/>
-          </a:prstGeom>
-          <a:noFill/>
-          <a:ln/>
-        </p:spPr>
-        <p:txBody>
-          <a:bodyPr wrap="square" lIns="0" tIns="0" rIns="0" bIns="0" rtlCol="0" anchor="ctr"/>
-          <a:lstStyle/>
-          <a:p>
-            <a:pPr marL="0" indent="0">
-              <a:buNone/>
-            </a:pPr>
-            <a:r>
-              <a:rPr lang="en-US" sz="900" b="1" kern="0" spc="400" dirty="0">
-                <a:solidFill>
-                  <a:srgbClr val="C97B5B"/>
-                </a:solidFill>
-                <a:latin typeface="Inter" pitchFamily="34" charset="0"/>
-                <a:ea typeface="Inter" pitchFamily="34" charset="-122"/>
-                <a:cs typeface="Inter" pitchFamily="34" charset="-120"/>
-              </a:rPr>
-              <a:t>1</a:t>
-            </a:r>
-            <a:r>
-              <a:rPr lang="ru-RU" sz="900" b="1" kern="0" spc="400" dirty="0">
-                <a:solidFill>
-                  <a:srgbClr val="C97B5B"/>
-                </a:solidFill>
-                <a:latin typeface="Inter" pitchFamily="34" charset="0"/>
-                <a:ea typeface="Inter" pitchFamily="34" charset="-122"/>
-                <a:cs typeface="Inter" pitchFamily="34" charset="-120"/>
-              </a:rPr>
-              <a:t>3</a:t>
-            </a:r>
-            <a:r>
-              <a:rPr lang="en-US" sz="900" b="1" kern="0" spc="400" dirty="0">
-                <a:solidFill>
-                  <a:srgbClr val="C97B5B"/>
-                </a:solidFill>
-                <a:latin typeface="Inter" pitchFamily="34" charset="0"/>
-                <a:ea typeface="Inter" pitchFamily="34" charset="-122"/>
-                <a:cs typeface="Inter" pitchFamily="34" charset="-120"/>
-              </a:rPr>
-              <a:t>  /  ЛОКАЛИЗАЦИЯ</a:t>
-            </a:r>
-            <a:endParaRPr lang="en-US" sz="900" dirty="0"/>
-          </a:p>
-        </p:txBody>
-      </p:sp>
-      <p:sp>
-        <p:nvSpPr>
-          <p:cNvPr id="8" name="Text 6"/>
-          <p:cNvSpPr/>
-          <p:nvPr/>
-        </p:nvSpPr>
-        <p:spPr>
-          <a:xfrm>
-            <a:off x="548640" y="1280160"/>
-            <a:ext cx="11064240" cy="914400"/>
-          </a:xfrm>
-          <a:prstGeom prst="rect">
-            <a:avLst/>
-          </a:prstGeom>
-          <a:noFill/>
-          <a:ln/>
-        </p:spPr>
-        <p:txBody>
-          <a:bodyPr wrap="square" lIns="0" tIns="0" rIns="0" bIns="0" rtlCol="0" anchor="ctr">
-            <a:normAutofit/>
-          </a:bodyPr>
-          <a:lstStyle/>
-          <a:p>
-            <a:pPr marL="0" indent="0" algn="l">
-              <a:buNone/>
-            </a:pPr>
-            <a:r>
-              <a:rPr lang="en-US" sz="5200" b="1" dirty="0">
-                <a:solidFill>
-                  <a:srgbClr val="0A0A0A"/>
-                </a:solidFill>
-                <a:latin typeface="Playfair Display" pitchFamily="34" charset="0"/>
-                <a:ea typeface="Playfair Display" pitchFamily="34" charset="-122"/>
-                <a:cs typeface="Playfair Display" pitchFamily="34" charset="-120"/>
-              </a:rPr>
-              <a:t>Русский и английский.</a:t>
-            </a:r>
-            <a:endParaRPr lang="en-US" sz="5200" dirty="0"/>
-          </a:p>
-        </p:txBody>
-      </p:sp>
-      <p:sp>
-        <p:nvSpPr>
-          <p:cNvPr id="9" name="Text 7"/>
-          <p:cNvSpPr/>
-          <p:nvPr/>
-        </p:nvSpPr>
-        <p:spPr>
-          <a:xfrm>
-            <a:off x="548640" y="2286000"/>
-            <a:ext cx="11064240" cy="731520"/>
-          </a:xfrm>
-          <a:prstGeom prst="rect">
-            <a:avLst/>
-          </a:prstGeom>
-          <a:noFill/>
-          <a:ln/>
-        </p:spPr>
-        <p:txBody>
-          <a:bodyPr wrap="square" lIns="0" tIns="0" rIns="0" bIns="0" rtlCol="0" anchor="ctr"/>
-          <a:lstStyle/>
-          <a:p>
-            <a:pPr marL="0" indent="0">
-              <a:lnSpc>
-                <a:spcPct val="140000"/>
-              </a:lnSpc>
-              <a:buNone/>
-            </a:pPr>
-            <a:r>
-              <a:rPr lang="en-US" sz="1300" i="1" dirty="0">
-                <a:solidFill>
-                  <a:srgbClr val="3D3D3D"/>
-                </a:solidFill>
-                <a:latin typeface="Inter" pitchFamily="34" charset="0"/>
-                <a:ea typeface="Inter" pitchFamily="34" charset="-122"/>
-                <a:cs typeface="Inter" pitchFamily="34" charset="-120"/>
-              </a:rPr>
-              <a:t>Zustand-store с persist в localStorage хранит выбранный язык. Хук useTranslation триггерит ре-рендер всех потребителей при смене. Функция t используется вне React (axios-интерсепторы).</a:t>
-            </a:r>
-            <a:endParaRPr lang="en-US" sz="1300" dirty="0"/>
-          </a:p>
-        </p:txBody>
-      </p:sp>
-      <p:sp>
-        <p:nvSpPr>
-          <p:cNvPr id="10" name="Shape 8"/>
-          <p:cNvSpPr/>
-          <p:nvPr/>
-        </p:nvSpPr>
-        <p:spPr>
-          <a:xfrm>
-            <a:off x="548640" y="3337560"/>
-            <a:ext cx="3657600" cy="2560320"/>
-          </a:xfrm>
-          <a:prstGeom prst="roundRect">
-            <a:avLst>
-              <a:gd name="adj" fmla="val 2857"/>
-            </a:avLst>
-          </a:prstGeom>
-          <a:solidFill>
-            <a:srgbClr val="FFFFFF"/>
-          </a:solidFill>
-          <a:ln w="6350">
-            <a:solidFill>
-              <a:srgbClr val="D9D5CE"/>
-            </a:solidFill>
-            <a:prstDash val="solid"/>
-          </a:ln>
-        </p:spPr>
-      </p:sp>
-      <p:sp>
-        <p:nvSpPr>
-          <p:cNvPr id="11" name="Text 9"/>
-          <p:cNvSpPr/>
-          <p:nvPr/>
-        </p:nvSpPr>
-        <p:spPr>
-          <a:xfrm>
-            <a:off x="822960" y="3520440"/>
-            <a:ext cx="3108960" cy="914400"/>
-          </a:xfrm>
-          <a:prstGeom prst="rect">
-            <a:avLst/>
-          </a:prstGeom>
-          <a:noFill/>
-          <a:ln/>
-        </p:spPr>
-        <p:txBody>
-          <a:bodyPr wrap="square" lIns="0" tIns="0" rIns="0" bIns="0" rtlCol="0" anchor="ctr"/>
-          <a:lstStyle/>
-          <a:p>
-            <a:pPr marL="0" indent="0">
-              <a:buNone/>
-            </a:pPr>
-            <a:r>
-              <a:rPr lang="en-US" sz="7000" b="1" dirty="0">
-                <a:solidFill>
-                  <a:srgbClr val="0A0A0A"/>
-                </a:solidFill>
-                <a:latin typeface="Playfair Display" pitchFamily="34" charset="0"/>
-                <a:ea typeface="Playfair Display" pitchFamily="34" charset="-122"/>
-                <a:cs typeface="Playfair Display" pitchFamily="34" charset="-120"/>
-              </a:rPr>
-              <a:t>2</a:t>
-            </a:r>
-            <a:endParaRPr lang="en-US" sz="7000" dirty="0"/>
-          </a:p>
-        </p:txBody>
-      </p:sp>
-      <p:sp>
-        <p:nvSpPr>
-          <p:cNvPr id="12" name="Text 10"/>
-          <p:cNvSpPr/>
-          <p:nvPr/>
-        </p:nvSpPr>
-        <p:spPr>
-          <a:xfrm>
-            <a:off x="822960" y="4572000"/>
-            <a:ext cx="3108960" cy="274320"/>
-          </a:xfrm>
-          <a:prstGeom prst="rect">
-            <a:avLst/>
-          </a:prstGeom>
-          <a:noFill/>
-          <a:ln/>
-        </p:spPr>
-        <p:txBody>
-          <a:bodyPr wrap="square" lIns="0" tIns="0" rIns="0" bIns="0" rtlCol="0" anchor="ctr"/>
-          <a:lstStyle/>
-          <a:p>
-            <a:pPr marL="0" indent="0">
-              <a:buNone/>
-            </a:pPr>
-            <a:r>
-              <a:rPr lang="en-US" sz="900" b="1" kern="0" spc="300" dirty="0">
-                <a:solidFill>
-                  <a:srgbClr val="C97B5B"/>
-                </a:solidFill>
-                <a:latin typeface="Inter" pitchFamily="34" charset="0"/>
-                <a:ea typeface="Inter" pitchFamily="34" charset="-122"/>
-                <a:cs typeface="Inter" pitchFamily="34" charset="-120"/>
-              </a:rPr>
-              <a:t>ЯЗЫКА</a:t>
-            </a:r>
-            <a:endParaRPr lang="en-US" sz="900" dirty="0"/>
-          </a:p>
-        </p:txBody>
-      </p:sp>
-      <p:sp>
-        <p:nvSpPr>
-          <p:cNvPr id="13" name="Shape 11"/>
-          <p:cNvSpPr/>
-          <p:nvPr/>
-        </p:nvSpPr>
-        <p:spPr>
-          <a:xfrm>
-            <a:off x="822960" y="4937760"/>
-            <a:ext cx="3108960" cy="0"/>
-          </a:xfrm>
-          <a:prstGeom prst="line">
-            <a:avLst/>
-          </a:prstGeom>
-          <a:noFill/>
-          <a:ln w="6350">
-            <a:solidFill>
-              <a:srgbClr val="D9D5CE"/>
-            </a:solidFill>
-            <a:prstDash val="solid"/>
-          </a:ln>
-        </p:spPr>
-      </p:sp>
-      <p:sp>
-        <p:nvSpPr>
-          <p:cNvPr id="14" name="Text 12"/>
-          <p:cNvSpPr/>
-          <p:nvPr/>
-        </p:nvSpPr>
-        <p:spPr>
-          <a:xfrm>
-            <a:off x="822960" y="5074920"/>
-            <a:ext cx="3108960" cy="731520"/>
-          </a:xfrm>
-          <a:prstGeom prst="rect">
-            <a:avLst/>
-          </a:prstGeom>
-          <a:noFill/>
-          <a:ln/>
-        </p:spPr>
-        <p:txBody>
-          <a:bodyPr wrap="square" lIns="0" tIns="0" rIns="0" bIns="0" rtlCol="0" anchor="ctr"/>
-          <a:lstStyle/>
-          <a:p>
-            <a:pPr marL="0" indent="0">
-              <a:lnSpc>
-                <a:spcPct val="140000"/>
-              </a:lnSpc>
-              <a:buNone/>
-            </a:pPr>
-            <a:r>
-              <a:rPr lang="en-US" sz="1100" dirty="0">
-                <a:solidFill>
-                  <a:srgbClr val="8A8580"/>
-                </a:solidFill>
-                <a:latin typeface="Inter" pitchFamily="34" charset="0"/>
-                <a:ea typeface="Inter" pitchFamily="34" charset="-122"/>
-                <a:cs typeface="Inter" pitchFamily="34" charset="-120"/>
-              </a:rPr>
-              <a:t>ru (по умолчанию) и en. Mirror-структура словарей.</a:t>
-            </a:r>
-            <a:endParaRPr lang="en-US" sz="1100" dirty="0"/>
-          </a:p>
-        </p:txBody>
-      </p:sp>
-      <p:sp>
-        <p:nvSpPr>
-          <p:cNvPr id="15" name="Shape 13"/>
-          <p:cNvSpPr/>
-          <p:nvPr/>
-        </p:nvSpPr>
-        <p:spPr>
-          <a:xfrm>
-            <a:off x="4343400" y="3337560"/>
-            <a:ext cx="3657600" cy="2560320"/>
-          </a:xfrm>
-          <a:prstGeom prst="roundRect">
-            <a:avLst>
-              <a:gd name="adj" fmla="val 2857"/>
-            </a:avLst>
-          </a:prstGeom>
-          <a:solidFill>
-            <a:srgbClr val="FFFFFF"/>
-          </a:solidFill>
-          <a:ln w="6350">
-            <a:solidFill>
-              <a:srgbClr val="D9D5CE"/>
-            </a:solidFill>
-            <a:prstDash val="solid"/>
-          </a:ln>
-        </p:spPr>
-      </p:sp>
-      <p:sp>
-        <p:nvSpPr>
-          <p:cNvPr id="16" name="Text 14"/>
-          <p:cNvSpPr/>
-          <p:nvPr/>
-        </p:nvSpPr>
-        <p:spPr>
-          <a:xfrm>
-            <a:off x="4617720" y="3520440"/>
-            <a:ext cx="3108960" cy="914400"/>
-          </a:xfrm>
-          <a:prstGeom prst="rect">
-            <a:avLst/>
-          </a:prstGeom>
-          <a:noFill/>
-          <a:ln/>
-        </p:spPr>
-        <p:txBody>
-          <a:bodyPr wrap="square" lIns="0" tIns="0" rIns="0" bIns="0" rtlCol="0" anchor="ctr"/>
-          <a:lstStyle/>
-          <a:p>
-            <a:pPr marL="0" indent="0">
-              <a:buNone/>
-            </a:pPr>
-            <a:r>
-              <a:rPr lang="en-US" sz="7000" b="1" dirty="0">
-                <a:solidFill>
-                  <a:srgbClr val="0A0A0A"/>
-                </a:solidFill>
-                <a:latin typeface="Playfair Display" pitchFamily="34" charset="0"/>
-                <a:ea typeface="Playfair Display" pitchFamily="34" charset="-122"/>
-                <a:cs typeface="Playfair Display" pitchFamily="34" charset="-120"/>
-              </a:rPr>
-              <a:t>20+</a:t>
-            </a:r>
-            <a:endParaRPr lang="en-US" sz="7000" dirty="0"/>
-          </a:p>
-        </p:txBody>
-      </p:sp>
-      <p:sp>
-        <p:nvSpPr>
-          <p:cNvPr id="17" name="Text 15"/>
-          <p:cNvSpPr/>
-          <p:nvPr/>
-        </p:nvSpPr>
-        <p:spPr>
-          <a:xfrm>
-            <a:off x="4617720" y="4572000"/>
-            <a:ext cx="3108960" cy="274320"/>
-          </a:xfrm>
-          <a:prstGeom prst="rect">
-            <a:avLst/>
-          </a:prstGeom>
-          <a:noFill/>
-          <a:ln/>
-        </p:spPr>
-        <p:txBody>
-          <a:bodyPr wrap="square" lIns="0" tIns="0" rIns="0" bIns="0" rtlCol="0" anchor="ctr"/>
-          <a:lstStyle/>
-          <a:p>
-            <a:pPr marL="0" indent="0">
-              <a:buNone/>
-            </a:pPr>
-            <a:r>
-              <a:rPr lang="en-US" sz="900" b="1" kern="0" spc="300" dirty="0">
-                <a:solidFill>
-                  <a:srgbClr val="C97B5B"/>
-                </a:solidFill>
-                <a:latin typeface="Inter" pitchFamily="34" charset="0"/>
-                <a:ea typeface="Inter" pitchFamily="34" charset="-122"/>
-                <a:cs typeface="Inter" pitchFamily="34" charset="-120"/>
-              </a:rPr>
-              <a:t>ГРУПП КЛЮЧЕЙ</a:t>
-            </a:r>
-            <a:endParaRPr lang="en-US" sz="900" dirty="0"/>
-          </a:p>
-        </p:txBody>
-      </p:sp>
-      <p:sp>
-        <p:nvSpPr>
-          <p:cNvPr id="18" name="Shape 16"/>
-          <p:cNvSpPr/>
-          <p:nvPr/>
-        </p:nvSpPr>
-        <p:spPr>
-          <a:xfrm>
-            <a:off x="4617720" y="4937760"/>
-            <a:ext cx="3108960" cy="0"/>
-          </a:xfrm>
-          <a:prstGeom prst="line">
-            <a:avLst/>
-          </a:prstGeom>
-          <a:noFill/>
-          <a:ln w="6350">
-            <a:solidFill>
-              <a:srgbClr val="D9D5CE"/>
-            </a:solidFill>
-            <a:prstDash val="solid"/>
-          </a:ln>
-        </p:spPr>
-      </p:sp>
-      <p:sp>
-        <p:nvSpPr>
-          <p:cNvPr id="19" name="Text 17"/>
-          <p:cNvSpPr/>
-          <p:nvPr/>
-        </p:nvSpPr>
-        <p:spPr>
-          <a:xfrm>
-            <a:off x="4617720" y="5074920"/>
-            <a:ext cx="3108960" cy="731520"/>
-          </a:xfrm>
-          <a:prstGeom prst="rect">
-            <a:avLst/>
-          </a:prstGeom>
-          <a:noFill/>
-          <a:ln/>
-        </p:spPr>
-        <p:txBody>
-          <a:bodyPr wrap="square" lIns="0" tIns="0" rIns="0" bIns="0" rtlCol="0" anchor="ctr"/>
-          <a:lstStyle/>
-          <a:p>
-            <a:pPr marL="0" indent="0">
-              <a:lnSpc>
-                <a:spcPct val="140000"/>
-              </a:lnSpc>
-              <a:buNone/>
-            </a:pPr>
-            <a:r>
-              <a:rPr lang="en-US" sz="1100" dirty="0">
-                <a:solidFill>
-                  <a:srgbClr val="8A8580"/>
-                </a:solidFill>
-                <a:latin typeface="Inter" pitchFamily="34" charset="0"/>
-                <a:ea typeface="Inter" pitchFamily="34" charset="-122"/>
-                <a:cs typeface="Inter" pitchFamily="34" charset="-120"/>
-              </a:rPr>
-              <a:t>common, nav, auth, boards, errors, priorities…</a:t>
-            </a:r>
-            <a:endParaRPr lang="en-US" sz="1100" dirty="0"/>
-          </a:p>
-        </p:txBody>
-      </p:sp>
-      <p:sp>
-        <p:nvSpPr>
-          <p:cNvPr id="20" name="Shape 18"/>
-          <p:cNvSpPr/>
-          <p:nvPr/>
-        </p:nvSpPr>
-        <p:spPr>
-          <a:xfrm>
-            <a:off x="8138160" y="3337560"/>
-            <a:ext cx="3657600" cy="2560320"/>
-          </a:xfrm>
-          <a:prstGeom prst="roundRect">
-            <a:avLst>
-              <a:gd name="adj" fmla="val 2857"/>
-            </a:avLst>
-          </a:prstGeom>
-          <a:solidFill>
-            <a:srgbClr val="FFFFFF"/>
-          </a:solidFill>
-          <a:ln w="6350">
-            <a:solidFill>
-              <a:srgbClr val="D9D5CE"/>
-            </a:solidFill>
-            <a:prstDash val="solid"/>
-          </a:ln>
-        </p:spPr>
-      </p:sp>
-      <p:sp>
-        <p:nvSpPr>
-          <p:cNvPr id="21" name="Text 19"/>
-          <p:cNvSpPr/>
-          <p:nvPr/>
-        </p:nvSpPr>
-        <p:spPr>
-          <a:xfrm>
-            <a:off x="8412480" y="3520440"/>
-            <a:ext cx="3108960" cy="914400"/>
-          </a:xfrm>
-          <a:prstGeom prst="rect">
-            <a:avLst/>
-          </a:prstGeom>
-          <a:noFill/>
-          <a:ln/>
-        </p:spPr>
-        <p:txBody>
-          <a:bodyPr wrap="square" lIns="0" tIns="0" rIns="0" bIns="0" rtlCol="0" anchor="ctr"/>
-          <a:lstStyle/>
-          <a:p>
-            <a:pPr marL="0" indent="0">
-              <a:buNone/>
-            </a:pPr>
-            <a:r>
-              <a:rPr lang="en-US" sz="7000" b="1" dirty="0">
-                <a:solidFill>
-                  <a:srgbClr val="0A0A0A"/>
-                </a:solidFill>
-                <a:latin typeface="Playfair Display" pitchFamily="34" charset="0"/>
-                <a:ea typeface="Playfair Display" pitchFamily="34" charset="-122"/>
-                <a:cs typeface="Playfair Display" pitchFamily="34" charset="-120"/>
-              </a:rPr>
-              <a:t>1:1</a:t>
-            </a:r>
-            <a:endParaRPr lang="en-US" sz="7000" dirty="0"/>
-          </a:p>
-        </p:txBody>
-      </p:sp>
-      <p:sp>
-        <p:nvSpPr>
-          <p:cNvPr id="22" name="Text 20"/>
-          <p:cNvSpPr/>
-          <p:nvPr/>
-        </p:nvSpPr>
-        <p:spPr>
-          <a:xfrm>
-            <a:off x="8412480" y="4572000"/>
-            <a:ext cx="3108960" cy="274320"/>
-          </a:xfrm>
-          <a:prstGeom prst="rect">
-            <a:avLst/>
-          </a:prstGeom>
-          <a:noFill/>
-          <a:ln/>
-        </p:spPr>
-        <p:txBody>
-          <a:bodyPr wrap="square" lIns="0" tIns="0" rIns="0" bIns="0" rtlCol="0" anchor="ctr"/>
-          <a:lstStyle/>
-          <a:p>
-            <a:pPr marL="0" indent="0">
-              <a:buNone/>
-            </a:pPr>
-            <a:r>
-              <a:rPr lang="en-US" sz="900" b="1" kern="0" spc="300" dirty="0">
-                <a:solidFill>
-                  <a:srgbClr val="C97B5B"/>
-                </a:solidFill>
-                <a:latin typeface="Inter" pitchFamily="34" charset="0"/>
-                <a:ea typeface="Inter" pitchFamily="34" charset="-122"/>
-                <a:cs typeface="Inter" pitchFamily="34" charset="-120"/>
-              </a:rPr>
-              <a:t>С ERRORCODE</a:t>
-            </a:r>
-            <a:endParaRPr lang="en-US" sz="900" dirty="0"/>
-          </a:p>
-        </p:txBody>
-      </p:sp>
-      <p:sp>
-        <p:nvSpPr>
-          <p:cNvPr id="23" name="Shape 21"/>
-          <p:cNvSpPr/>
-          <p:nvPr/>
-        </p:nvSpPr>
-        <p:spPr>
-          <a:xfrm>
-            <a:off x="8412480" y="4937760"/>
-            <a:ext cx="3108960" cy="0"/>
-          </a:xfrm>
-          <a:prstGeom prst="line">
-            <a:avLst/>
-          </a:prstGeom>
-          <a:noFill/>
-          <a:ln w="6350">
-            <a:solidFill>
-              <a:srgbClr val="D9D5CE"/>
-            </a:solidFill>
-            <a:prstDash val="solid"/>
-          </a:ln>
-        </p:spPr>
-      </p:sp>
-      <p:sp>
-        <p:nvSpPr>
-          <p:cNvPr id="24" name="Text 22"/>
-          <p:cNvSpPr/>
-          <p:nvPr/>
-        </p:nvSpPr>
-        <p:spPr>
-          <a:xfrm>
-            <a:off x="8412480" y="5074920"/>
-            <a:ext cx="3108960" cy="731520"/>
-          </a:xfrm>
-          <a:prstGeom prst="rect">
-            <a:avLst/>
-          </a:prstGeom>
-          <a:noFill/>
-          <a:ln/>
-        </p:spPr>
-        <p:txBody>
-          <a:bodyPr wrap="square" lIns="0" tIns="0" rIns="0" bIns="0" rtlCol="0" anchor="ctr"/>
-          <a:lstStyle/>
-          <a:p>
-            <a:pPr marL="0" indent="0">
-              <a:lnSpc>
-                <a:spcPct val="140000"/>
-              </a:lnSpc>
-              <a:buNone/>
-            </a:pPr>
-            <a:r>
-              <a:rPr lang="en-US" sz="1100" dirty="0">
-                <a:solidFill>
-                  <a:srgbClr val="8A8580"/>
-                </a:solidFill>
-                <a:latin typeface="Inter" pitchFamily="34" charset="0"/>
-                <a:ea typeface="Inter" pitchFamily="34" charset="-122"/>
-                <a:cs typeface="Inter" pitchFamily="34" charset="-120"/>
-              </a:rPr>
-              <a:t>errors.US0001 ↔ ErrorCode.US0001 на бэке.</a:t>
-            </a:r>
-            <a:endParaRPr lang="en-US" sz="1100" dirty="0"/>
-          </a:p>
-        </p:txBody>
-      </p:sp>
-      <p:sp>
-        <p:nvSpPr>
-          <p:cNvPr id="25" name="Text 23"/>
-          <p:cNvSpPr/>
-          <p:nvPr/>
-        </p:nvSpPr>
-        <p:spPr>
-          <a:xfrm>
-            <a:off x="548640" y="6400800"/>
-            <a:ext cx="3657600" cy="320040"/>
-          </a:xfrm>
-          <a:prstGeom prst="rect">
-            <a:avLst/>
-          </a:prstGeom>
-          <a:noFill/>
-          <a:ln/>
-        </p:spPr>
-        <p:txBody>
-          <a:bodyPr wrap="square" lIns="0" tIns="0" rIns="0" bIns="0" rtlCol="0" anchor="ctr"/>
-          <a:lstStyle/>
-          <a:p>
-            <a:pPr marL="0" indent="0">
-              <a:buNone/>
-            </a:pPr>
-            <a:r>
-              <a:rPr lang="en-US" sz="800" kern="0" spc="300" dirty="0">
-                <a:solidFill>
-                  <a:srgbClr val="8A8580"/>
-                </a:solidFill>
-                <a:latin typeface="Inter" pitchFamily="34" charset="0"/>
-                <a:ea typeface="Inter" pitchFamily="34" charset="-122"/>
-                <a:cs typeface="Inter" pitchFamily="34" charset="-120"/>
-              </a:rPr>
-              <a:t>KANBAN  /  1</a:t>
-            </a:r>
-            <a:r>
-              <a:rPr lang="ru-RU" sz="800" kern="0" spc="300" dirty="0">
-                <a:solidFill>
-                  <a:srgbClr val="8A8580"/>
-                </a:solidFill>
-                <a:latin typeface="Inter" pitchFamily="34" charset="0"/>
-                <a:ea typeface="Inter" pitchFamily="34" charset="-122"/>
-                <a:cs typeface="Inter" pitchFamily="34" charset="-120"/>
-              </a:rPr>
-              <a:t>4</a:t>
-            </a:r>
-            <a:r>
-              <a:rPr lang="en-US" sz="800" kern="0" spc="300" dirty="0">
-                <a:solidFill>
-                  <a:srgbClr val="8A8580"/>
-                </a:solidFill>
-                <a:latin typeface="Inter" pitchFamily="34" charset="0"/>
-                <a:ea typeface="Inter" pitchFamily="34" charset="-122"/>
-                <a:cs typeface="Inter" pitchFamily="34" charset="-120"/>
-              </a:rPr>
-              <a:t> — </a:t>
-            </a:r>
-            <a:r>
-              <a:rPr lang="ru-RU" sz="800" kern="0" spc="300" dirty="0">
-                <a:solidFill>
-                  <a:srgbClr val="8A8580"/>
-                </a:solidFill>
-                <a:latin typeface="Inter" pitchFamily="34" charset="0"/>
-                <a:ea typeface="Inter" pitchFamily="34" charset="-122"/>
-                <a:cs typeface="Inter" pitchFamily="34" charset="-120"/>
-              </a:rPr>
-              <a:t>17</a:t>
-            </a:r>
-            <a:endParaRPr lang="en-US" sz="800" dirty="0"/>
-          </a:p>
-        </p:txBody>
-      </p:sp>
-    </p:spTree>
-  </p:cSld>
-  <p:clrMapOvr>
-    <a:masterClrMapping/>
-  </p:clrMapOvr>
-</p:sld>
-</file>
-
-<file path=ppt/slides/slide15.xml><?xml version="1.0" encoding="utf-8"?>
+<file path=ppt/slides/slide11.xml><?xml version="1.0" encoding="utf-8"?>
 <p:sld xmlns:a="http://schemas.openxmlformats.org/drawingml/2006/main" xmlns:r="http://schemas.openxmlformats.org/officeDocument/2006/relationships" xmlns:p="http://schemas.openxmlformats.org/presentationml/2006/main">
   <p:cSld name="Slide 18">
     <p:bg>
@@ -7571,7 +3807,7 @@
               <a:buNone/>
             </a:pPr>
             <a:r>
-              <a:rPr lang="en-US" sz="900" b="1" kern="0" spc="400" dirty="0">
+              <a:rPr lang="ru-RU" sz="900" b="1" kern="0" spc="400" dirty="0">
                 <a:solidFill>
                   <a:srgbClr val="C97B5B"/>
                 </a:solidFill>
@@ -7579,18 +3815,7 @@
                 <a:ea typeface="Inter" pitchFamily="34" charset="-122"/>
                 <a:cs typeface="Inter" pitchFamily="34" charset="-120"/>
               </a:rPr>
-              <a:t>1</a:t>
-            </a:r>
-            <a:r>
-              <a:rPr lang="ru-RU" sz="900" b="1" kern="0" spc="400" dirty="0">
-                <a:solidFill>
-                  <a:srgbClr val="C97B5B"/>
-                </a:solidFill>
-                <a:latin typeface="Inter" pitchFamily="34" charset="0"/>
-                <a:ea typeface="Inter" pitchFamily="34" charset="-122"/>
-                <a:cs typeface="Inter" pitchFamily="34" charset="-120"/>
-              </a:rPr>
-              <a:t>4</a:t>
+              <a:t>11</a:t>
             </a:r>
             <a:r>
               <a:rPr lang="en-US" sz="900" b="1" kern="0" spc="400" dirty="0">
@@ -7645,78 +3870,6 @@
               <a:t>Дашборд и доска.</a:t>
             </a:r>
             <a:endParaRPr lang="en-US" sz="5200" dirty="0"/>
-          </a:p>
-        </p:txBody>
-      </p:sp>
-      <p:sp>
-        <p:nvSpPr>
-          <p:cNvPr id="54" name="Text 52"/>
-          <p:cNvSpPr/>
-          <p:nvPr/>
-        </p:nvSpPr>
-        <p:spPr>
-          <a:xfrm>
-            <a:off x="548640" y="6400800"/>
-            <a:ext cx="3657600" cy="320040"/>
-          </a:xfrm>
-          <a:prstGeom prst="rect">
-            <a:avLst/>
-          </a:prstGeom>
-          <a:noFill/>
-          <a:ln/>
-        </p:spPr>
-        <p:txBody>
-          <a:bodyPr wrap="square" lIns="0" tIns="0" rIns="0" bIns="0" rtlCol="0" anchor="ctr"/>
-          <a:lstStyle/>
-          <a:p>
-            <a:pPr marL="0" indent="0">
-              <a:buNone/>
-            </a:pPr>
-            <a:r>
-              <a:rPr lang="en-US" sz="800" kern="0" spc="300" dirty="0">
-                <a:solidFill>
-                  <a:srgbClr val="8A8580"/>
-                </a:solidFill>
-                <a:latin typeface="Inter" pitchFamily="34" charset="0"/>
-                <a:ea typeface="Inter" pitchFamily="34" charset="-122"/>
-                <a:cs typeface="Inter" pitchFamily="34" charset="-120"/>
-              </a:rPr>
-              <a:t>KANBAN  /  1</a:t>
-            </a:r>
-            <a:r>
-              <a:rPr lang="ru-RU" sz="800" kern="0" spc="300" dirty="0">
-                <a:solidFill>
-                  <a:srgbClr val="8A8580"/>
-                </a:solidFill>
-                <a:latin typeface="Inter" pitchFamily="34" charset="0"/>
-                <a:ea typeface="Inter" pitchFamily="34" charset="-122"/>
-                <a:cs typeface="Inter" pitchFamily="34" charset="-120"/>
-              </a:rPr>
-              <a:t>5</a:t>
-            </a:r>
-            <a:r>
-              <a:rPr lang="en-US" sz="800" kern="0" spc="300" dirty="0">
-                <a:solidFill>
-                  <a:srgbClr val="8A8580"/>
-                </a:solidFill>
-                <a:latin typeface="Inter" pitchFamily="34" charset="0"/>
-                <a:ea typeface="Inter" pitchFamily="34" charset="-122"/>
-                <a:cs typeface="Inter" pitchFamily="34" charset="-120"/>
-              </a:rPr>
-              <a:t> — </a:t>
-            </a:r>
-            <a:r>
-              <a:rPr lang="ru-RU" sz="800" kern="0" spc="300" dirty="0">
-                <a:solidFill>
-                  <a:srgbClr val="8A8580"/>
-                </a:solidFill>
-                <a:latin typeface="Inter" pitchFamily="34" charset="0"/>
-                <a:ea typeface="Inter" pitchFamily="34" charset="-122"/>
-                <a:cs typeface="Inter" pitchFamily="34" charset="-120"/>
-              </a:rPr>
-              <a:t>17</a:t>
-            </a:r>
-            <a:endParaRPr lang="en-US" sz="800" dirty="0"/>
           </a:p>
         </p:txBody>
       </p:sp>
@@ -7818,7 +3971,7 @@
 </p:sld>
 </file>
 
-<file path=ppt/slides/slide16.xml><?xml version="1.0" encoding="utf-8"?>
+<file path=ppt/slides/slide12.xml><?xml version="1.0" encoding="utf-8"?>
 <p:sld xmlns:a="http://schemas.openxmlformats.org/drawingml/2006/main" xmlns:r="http://schemas.openxmlformats.org/officeDocument/2006/relationships" xmlns:p="http://schemas.openxmlformats.org/presentationml/2006/main">
   <p:cSld name="Slide 20">
     <p:bg>
@@ -7868,7 +4021,7 @@
               <a:buNone/>
             </a:pPr>
             <a:r>
-              <a:rPr lang="en-US" sz="900" b="1" kern="0" spc="400" dirty="0">
+              <a:rPr lang="ru-RU" sz="900" b="1" kern="0" spc="400" dirty="0">
                 <a:solidFill>
                   <a:srgbClr val="C97B5B"/>
                 </a:solidFill>
@@ -7876,18 +4029,7 @@
                 <a:ea typeface="Inter" pitchFamily="34" charset="-122"/>
                 <a:cs typeface="Inter" pitchFamily="34" charset="-120"/>
               </a:rPr>
-              <a:t>1</a:t>
-            </a:r>
-            <a:r>
-              <a:rPr lang="ru-RU" sz="900" b="1" kern="0" spc="400" dirty="0">
-                <a:solidFill>
-                  <a:srgbClr val="C97B5B"/>
-                </a:solidFill>
-                <a:latin typeface="Inter" pitchFamily="34" charset="0"/>
-                <a:ea typeface="Inter" pitchFamily="34" charset="-122"/>
-                <a:cs typeface="Inter" pitchFamily="34" charset="-120"/>
-              </a:rPr>
-              <a:t>5</a:t>
+              <a:t>12</a:t>
             </a:r>
             <a:r>
               <a:rPr lang="en-US" sz="900" b="1" kern="0" spc="400" dirty="0">
@@ -7931,7 +4073,7 @@
               <a:buNone/>
             </a:pPr>
             <a:r>
-              <a:rPr lang="en-US" sz="4400" b="1" dirty="0" err="1">
+              <a:rPr lang="en-US" sz="4400" b="1" dirty="0">
                 <a:solidFill>
                   <a:srgbClr val="0A0A0A"/>
                 </a:solidFill>
@@ -7939,29 +4081,7 @@
                 <a:ea typeface="Playfair Display" pitchFamily="34" charset="-122"/>
                 <a:cs typeface="Playfair Display" pitchFamily="34" charset="-120"/>
               </a:rPr>
-              <a:t>Что</a:t>
-            </a:r>
-            <a:r>
-              <a:rPr lang="en-US" sz="4400" b="1" dirty="0">
-                <a:solidFill>
-                  <a:srgbClr val="0A0A0A"/>
-                </a:solidFill>
-                <a:latin typeface="Playfair Display" pitchFamily="34" charset="0"/>
-                <a:ea typeface="Playfair Display" pitchFamily="34" charset="-122"/>
-                <a:cs typeface="Playfair Display" pitchFamily="34" charset="-120"/>
-              </a:rPr>
-              <a:t> </a:t>
-            </a:r>
-            <a:r>
-              <a:rPr lang="en-US" sz="4400" b="1" dirty="0" err="1">
-                <a:solidFill>
-                  <a:srgbClr val="0A0A0A"/>
-                </a:solidFill>
-                <a:latin typeface="Playfair Display" pitchFamily="34" charset="0"/>
-                <a:ea typeface="Playfair Display" pitchFamily="34" charset="-122"/>
-                <a:cs typeface="Playfair Display" pitchFamily="34" charset="-120"/>
-              </a:rPr>
-              <a:t>сделано</a:t>
+              <a:t>Что сделано</a:t>
             </a:r>
             <a:endParaRPr lang="en-US" sz="4400" dirty="0"/>
           </a:p>
@@ -7991,6 +4111,13 @@
             <a:prstDash val="solid"/>
           </a:ln>
         </p:spPr>
+        <p:txBody>
+          <a:bodyPr/>
+          <a:lstStyle/>
+          <a:p>
+            <a:endParaRPr lang="ru-RU"/>
+          </a:p>
+        </p:txBody>
       </p:sp>
       <p:sp>
         <p:nvSpPr>
@@ -8055,6 +4182,13 @@
             <a:prstDash val="solid"/>
           </a:ln>
         </p:spPr>
+        <p:txBody>
+          <a:bodyPr/>
+          <a:lstStyle/>
+          <a:p>
+            <a:endParaRPr lang="ru-RU"/>
+          </a:p>
+        </p:txBody>
       </p:sp>
       <p:sp>
         <p:nvSpPr>
@@ -8119,6 +4253,13 @@
             <a:prstDash val="solid"/>
           </a:ln>
         </p:spPr>
+        <p:txBody>
+          <a:bodyPr/>
+          <a:lstStyle/>
+          <a:p>
+            <a:endParaRPr lang="ru-RU"/>
+          </a:p>
+        </p:txBody>
       </p:sp>
       <p:sp>
         <p:nvSpPr>
@@ -8183,6 +4324,13 @@
             <a:prstDash val="solid"/>
           </a:ln>
         </p:spPr>
+        <p:txBody>
+          <a:bodyPr/>
+          <a:lstStyle/>
+          <a:p>
+            <a:endParaRPr lang="ru-RU"/>
+          </a:p>
+        </p:txBody>
       </p:sp>
       <p:sp>
         <p:nvSpPr>
@@ -8193,7 +4341,7 @@
         <p:spPr>
           <a:xfrm>
             <a:off x="777240" y="3721608"/>
-            <a:ext cx="5029200" cy="274320"/>
+            <a:ext cx="5210810" cy="274320"/>
           </a:xfrm>
           <a:prstGeom prst="rect">
             <a:avLst/>
@@ -8217,7 +4365,29 @@
                 <a:ea typeface="Inter" pitchFamily="34" charset="-122"/>
                 <a:cs typeface="Inter" pitchFamily="34" charset="-120"/>
               </a:rPr>
-              <a:t>Канбан-доски с drag-and-drop колонок и задач</a:t>
+              <a:t>Канбан-доски с drag-and-drop колонок и </a:t>
+            </a:r>
+            <a:r>
+              <a:rPr lang="en-US" sz="2000" dirty="0" err="1">
+                <a:solidFill>
+                  <a:srgbClr val="0A0A0A"/>
+                </a:solidFill>
+                <a:latin typeface="Inter" pitchFamily="34" charset="0"/>
+                <a:ea typeface="Inter" pitchFamily="34" charset="-122"/>
+                <a:cs typeface="Inter" pitchFamily="34" charset="-120"/>
+              </a:rPr>
+              <a:t>за</a:t>
+            </a:r>
+            <a:r>
+              <a:rPr lang="ru-RU" sz="2000" dirty="0">
+                <a:solidFill>
+                  <a:srgbClr val="0A0A0A"/>
+                </a:solidFill>
+                <a:latin typeface="Inter" pitchFamily="34" charset="0"/>
+                <a:ea typeface="Inter" pitchFamily="34" charset="-122"/>
+                <a:cs typeface="Inter" pitchFamily="34" charset="-120"/>
+              </a:rPr>
+              <a:t>дач</a:t>
             </a:r>
             <a:endParaRPr lang="en-US" sz="2000" dirty="0"/>
           </a:p>
@@ -8247,6 +4417,13 @@
             <a:prstDash val="solid"/>
           </a:ln>
         </p:spPr>
+        <p:txBody>
+          <a:bodyPr/>
+          <a:lstStyle/>
+          <a:p>
+            <a:endParaRPr lang="ru-RU"/>
+          </a:p>
+        </p:txBody>
       </p:sp>
       <p:sp>
         <p:nvSpPr>
@@ -8322,6 +4499,13 @@
             <a:prstDash val="solid"/>
           </a:ln>
         </p:spPr>
+        <p:txBody>
+          <a:bodyPr/>
+          <a:lstStyle/>
+          <a:p>
+            <a:endParaRPr lang="ru-RU"/>
+          </a:p>
+        </p:txBody>
       </p:sp>
       <p:sp>
         <p:nvSpPr>
@@ -8386,6 +4570,13 @@
             <a:prstDash val="solid"/>
           </a:ln>
         </p:spPr>
+        <p:txBody>
+          <a:bodyPr/>
+          <a:lstStyle/>
+          <a:p>
+            <a:endParaRPr lang="ru-RU"/>
+          </a:p>
+        </p:txBody>
       </p:sp>
       <p:sp>
         <p:nvSpPr>
@@ -8450,6 +4641,13 @@
             <a:prstDash val="solid"/>
           </a:ln>
         </p:spPr>
+        <p:txBody>
+          <a:bodyPr/>
+          <a:lstStyle/>
+          <a:p>
+            <a:endParaRPr lang="ru-RU"/>
+          </a:p>
+        </p:txBody>
       </p:sp>
       <p:sp>
         <p:nvSpPr>
@@ -8487,78 +4685,6 @@
               <a:t>Локализация ru/en, темизация под бренд</a:t>
             </a:r>
             <a:endParaRPr lang="en-US" sz="2000" dirty="0"/>
-          </a:p>
-        </p:txBody>
-      </p:sp>
-      <p:sp>
-        <p:nvSpPr>
-          <p:cNvPr id="39" name="Text 37"/>
-          <p:cNvSpPr/>
-          <p:nvPr/>
-        </p:nvSpPr>
-        <p:spPr>
-          <a:xfrm>
-            <a:off x="548640" y="6400800"/>
-            <a:ext cx="3657600" cy="320040"/>
-          </a:xfrm>
-          <a:prstGeom prst="rect">
-            <a:avLst/>
-          </a:prstGeom>
-          <a:noFill/>
-          <a:ln/>
-        </p:spPr>
-        <p:txBody>
-          <a:bodyPr wrap="square" lIns="0" tIns="0" rIns="0" bIns="0" rtlCol="0" anchor="ctr"/>
-          <a:lstStyle/>
-          <a:p>
-            <a:pPr marL="0" indent="0">
-              <a:buNone/>
-            </a:pPr>
-            <a:r>
-              <a:rPr lang="en-US" sz="800" kern="0" spc="300" dirty="0">
-                <a:solidFill>
-                  <a:srgbClr val="8A8580"/>
-                </a:solidFill>
-                <a:latin typeface="Inter" pitchFamily="34" charset="0"/>
-                <a:ea typeface="Inter" pitchFamily="34" charset="-122"/>
-                <a:cs typeface="Inter" pitchFamily="34" charset="-120"/>
-              </a:rPr>
-              <a:t>KANBAN  /  </a:t>
-            </a:r>
-            <a:r>
-              <a:rPr lang="ru-RU" sz="800" kern="0" spc="300" dirty="0">
-                <a:solidFill>
-                  <a:srgbClr val="8A8580"/>
-                </a:solidFill>
-                <a:latin typeface="Inter" pitchFamily="34" charset="0"/>
-                <a:ea typeface="Inter" pitchFamily="34" charset="-122"/>
-                <a:cs typeface="Inter" pitchFamily="34" charset="-120"/>
-              </a:rPr>
-              <a:t>16</a:t>
-            </a:r>
-            <a:r>
-              <a:rPr lang="en-US" sz="800" kern="0" spc="300" dirty="0">
-                <a:solidFill>
-                  <a:srgbClr val="8A8580"/>
-                </a:solidFill>
-                <a:latin typeface="Inter" pitchFamily="34" charset="0"/>
-                <a:ea typeface="Inter" pitchFamily="34" charset="-122"/>
-                <a:cs typeface="Inter" pitchFamily="34" charset="-120"/>
-              </a:rPr>
-              <a:t> — </a:t>
-            </a:r>
-            <a:r>
-              <a:rPr lang="ru-RU" sz="800" kern="0" spc="300" dirty="0">
-                <a:solidFill>
-                  <a:srgbClr val="8A8580"/>
-                </a:solidFill>
-                <a:latin typeface="Inter" pitchFamily="34" charset="0"/>
-                <a:ea typeface="Inter" pitchFamily="34" charset="-122"/>
-                <a:cs typeface="Inter" pitchFamily="34" charset="-120"/>
-              </a:rPr>
-              <a:t>17</a:t>
-            </a:r>
-            <a:endParaRPr lang="en-US" sz="800" dirty="0"/>
           </a:p>
         </p:txBody>
       </p:sp>
@@ -8570,7 +4696,7 @@
 </p:sld>
 </file>
 
-<file path=ppt/slides/slide17.xml><?xml version="1.0" encoding="utf-8"?>
+<file path=ppt/slides/slide13.xml><?xml version="1.0" encoding="utf-8"?>
 <p:sld xmlns:a="http://schemas.openxmlformats.org/drawingml/2006/main" xmlns:r="http://schemas.openxmlformats.org/officeDocument/2006/relationships" xmlns:p="http://schemas.openxmlformats.org/presentationml/2006/main">
   <p:cSld name="Slide 21">
     <p:bg>
@@ -8698,7 +4824,7 @@
               <a:buNone/>
             </a:pPr>
             <a:r>
-              <a:rPr lang="en-US" sz="9000" b="1" kern="0" spc="-100" dirty="0">
+              <a:rPr lang="en-US" sz="9000" b="1" kern="0" spc="-100" dirty="0" err="1">
                 <a:solidFill>
                   <a:srgbClr val="0A0A0A"/>
                 </a:solidFill>
@@ -8706,7 +4832,29 @@
                 <a:ea typeface="Playfair Display" pitchFamily="34" charset="-122"/>
                 <a:cs typeface="Playfair Display" pitchFamily="34" charset="-120"/>
               </a:rPr>
-              <a:t>за внимание.</a:t>
+              <a:t>за</a:t>
+            </a:r>
+            <a:r>
+              <a:rPr lang="en-US" sz="9000" b="1" kern="0" spc="-100" dirty="0">
+                <a:solidFill>
+                  <a:srgbClr val="0A0A0A"/>
+                </a:solidFill>
+                <a:latin typeface="Playfair Display" pitchFamily="34" charset="0"/>
+                <a:ea typeface="Playfair Display" pitchFamily="34" charset="-122"/>
+                <a:cs typeface="Playfair Display" pitchFamily="34" charset="-120"/>
+              </a:rPr>
+              <a:t> </a:t>
+            </a:r>
+            <a:r>
+              <a:rPr lang="en-US" sz="9000" b="1" kern="0" spc="-100" dirty="0" err="1">
+                <a:solidFill>
+                  <a:srgbClr val="0A0A0A"/>
+                </a:solidFill>
+                <a:latin typeface="Playfair Display" pitchFamily="34" charset="0"/>
+                <a:ea typeface="Playfair Display" pitchFamily="34" charset="-122"/>
+                <a:cs typeface="Playfair Display" pitchFamily="34" charset="-120"/>
+              </a:rPr>
+              <a:t>внимание</a:t>
             </a:r>
             <a:endParaRPr lang="en-US" sz="9000" dirty="0"/>
           </a:p>
@@ -8745,6 +4893,13 @@
             </a:outerShdw>
           </a:effectLst>
         </p:spPr>
+        <p:txBody>
+          <a:bodyPr/>
+          <a:lstStyle/>
+          <a:p>
+            <a:endParaRPr lang="ru-RU"/>
+          </a:p>
+        </p:txBody>
       </p:sp>
       <p:sp>
         <p:nvSpPr>
@@ -8811,6 +4966,13 @@
             <a:prstDash val="solid"/>
           </a:ln>
         </p:spPr>
+        <p:txBody>
+          <a:bodyPr/>
+          <a:lstStyle/>
+          <a:p>
+            <a:endParaRPr lang="ru-RU"/>
+          </a:p>
+        </p:txBody>
       </p:sp>
       <p:sp>
         <p:nvSpPr>
@@ -8877,6 +5039,13 @@
             <a:prstDash val="solid"/>
           </a:ln>
         </p:spPr>
+        <p:txBody>
+          <a:bodyPr/>
+          <a:lstStyle/>
+          <a:p>
+            <a:endParaRPr lang="ru-RU"/>
+          </a:p>
+        </p:txBody>
       </p:sp>
       <p:sp>
         <p:nvSpPr>
@@ -8902,6 +5071,13 @@
             <a:prstDash val="solid"/>
           </a:ln>
         </p:spPr>
+        <p:txBody>
+          <a:bodyPr/>
+          <a:lstStyle/>
+          <a:p>
+            <a:endParaRPr lang="ru-RU"/>
+          </a:p>
+        </p:txBody>
       </p:sp>
       <p:sp>
         <p:nvSpPr>
@@ -9007,6 +5183,13 @@
             <a:prstDash val="solid"/>
           </a:ln>
         </p:spPr>
+        <p:txBody>
+          <a:bodyPr/>
+          <a:lstStyle/>
+          <a:p>
+            <a:endParaRPr lang="ru-RU"/>
+          </a:p>
+        </p:txBody>
       </p:sp>
       <p:sp>
         <p:nvSpPr>
@@ -9032,6 +5215,13 @@
             <a:prstDash val="solid"/>
           </a:ln>
         </p:spPr>
+        <p:txBody>
+          <a:bodyPr/>
+          <a:lstStyle/>
+          <a:p>
+            <a:endParaRPr lang="ru-RU"/>
+          </a:p>
+        </p:txBody>
       </p:sp>
       <p:sp>
         <p:nvSpPr>
@@ -9137,6 +5327,13 @@
             <a:prstDash val="solid"/>
           </a:ln>
         </p:spPr>
+        <p:txBody>
+          <a:bodyPr/>
+          <a:lstStyle/>
+          <a:p>
+            <a:endParaRPr lang="ru-RU"/>
+          </a:p>
+        </p:txBody>
       </p:sp>
       <p:sp>
         <p:nvSpPr>
@@ -9203,6 +5400,13 @@
             <a:prstDash val="solid"/>
           </a:ln>
         </p:spPr>
+        <p:txBody>
+          <a:bodyPr/>
+          <a:lstStyle/>
+          <a:p>
+            <a:endParaRPr lang="ru-RU"/>
+          </a:p>
+        </p:txBody>
       </p:sp>
       <p:sp>
         <p:nvSpPr>
@@ -9228,6 +5432,13 @@
             <a:prstDash val="solid"/>
           </a:ln>
         </p:spPr>
+        <p:txBody>
+          <a:bodyPr/>
+          <a:lstStyle/>
+          <a:p>
+            <a:endParaRPr lang="ru-RU"/>
+          </a:p>
+        </p:txBody>
       </p:sp>
       <p:sp>
         <p:nvSpPr>
@@ -9333,6 +5544,13 @@
             <a:prstDash val="solid"/>
           </a:ln>
         </p:spPr>
+        <p:txBody>
+          <a:bodyPr/>
+          <a:lstStyle/>
+          <a:p>
+            <a:endParaRPr lang="ru-RU"/>
+          </a:p>
+        </p:txBody>
       </p:sp>
       <p:sp>
         <p:nvSpPr>
@@ -9399,6 +5617,13 @@
             <a:prstDash val="solid"/>
           </a:ln>
         </p:spPr>
+        <p:txBody>
+          <a:bodyPr/>
+          <a:lstStyle/>
+          <a:p>
+            <a:endParaRPr lang="ru-RU"/>
+          </a:p>
+        </p:txBody>
       </p:sp>
       <p:sp>
         <p:nvSpPr>
@@ -9424,6 +5649,13 @@
             <a:prstDash val="solid"/>
           </a:ln>
         </p:spPr>
+        <p:txBody>
+          <a:bodyPr/>
+          <a:lstStyle/>
+          <a:p>
+            <a:endParaRPr lang="ru-RU"/>
+          </a:p>
+        </p:txBody>
       </p:sp>
       <p:sp>
         <p:nvSpPr>
@@ -9505,30 +5737,30 @@
       </p:sp>
       <p:sp>
         <p:nvSpPr>
-          <p:cNvPr id="37" name="Text 35"/>
-          <p:cNvSpPr/>
-          <p:nvPr/>
-        </p:nvSpPr>
-        <p:spPr>
-          <a:xfrm>
-            <a:off x="548640" y="6400800"/>
-            <a:ext cx="5486400" cy="274320"/>
-          </a:xfrm>
-          <a:prstGeom prst="rect">
-            <a:avLst/>
-          </a:prstGeom>
-          <a:noFill/>
-          <a:ln/>
-        </p:spPr>
-        <p:txBody>
-          <a:bodyPr wrap="square" lIns="0" tIns="0" rIns="0" bIns="0" rtlCol="0" anchor="ctr"/>
-          <a:lstStyle/>
-          <a:p>
-            <a:pPr marL="0" indent="0">
-              <a:buNone/>
-            </a:pPr>
-            <a:r>
-              <a:rPr lang="en-US" sz="800" kern="0" spc="300" dirty="0">
+          <p:cNvPr id="38" name="Text 36"/>
+          <p:cNvSpPr/>
+          <p:nvPr/>
+        </p:nvSpPr>
+        <p:spPr>
+          <a:xfrm>
+            <a:off x="10317480" y="6400800"/>
+            <a:ext cx="1280160" cy="274320"/>
+          </a:xfrm>
+          <a:prstGeom prst="rect">
+            <a:avLst/>
+          </a:prstGeom>
+          <a:noFill/>
+          <a:ln/>
+        </p:spPr>
+        <p:txBody>
+          <a:bodyPr wrap="square" lIns="0" tIns="0" rIns="0" bIns="0" rtlCol="0" anchor="ctr"/>
+          <a:lstStyle/>
+          <a:p>
+            <a:pPr marL="0" indent="0" algn="r">
+              <a:buNone/>
+            </a:pPr>
+            <a:r>
+              <a:rPr lang="ru-RU" sz="800" kern="0" spc="300" dirty="0">
                 <a:solidFill>
                   <a:srgbClr val="8A8580"/>
                 </a:solidFill>
@@ -9536,46 +5768,7 @@
                 <a:ea typeface="Inter" pitchFamily="34" charset="-122"/>
                 <a:cs typeface="Inter" pitchFamily="34" charset="-120"/>
               </a:rPr>
-              <a:t>Курсовой проект  /  ПРИ-123  /  2026</a:t>
-            </a:r>
-            <a:endParaRPr lang="en-US" sz="800" dirty="0"/>
-          </a:p>
-        </p:txBody>
-      </p:sp>
-      <p:sp>
-        <p:nvSpPr>
-          <p:cNvPr id="38" name="Text 36"/>
-          <p:cNvSpPr/>
-          <p:nvPr/>
-        </p:nvSpPr>
-        <p:spPr>
-          <a:xfrm>
-            <a:off x="10332720" y="6400800"/>
-            <a:ext cx="1280160" cy="274320"/>
-          </a:xfrm>
-          <a:prstGeom prst="rect">
-            <a:avLst/>
-          </a:prstGeom>
-          <a:noFill/>
-          <a:ln/>
-        </p:spPr>
-        <p:txBody>
-          <a:bodyPr wrap="square" lIns="0" tIns="0" rIns="0" bIns="0" rtlCol="0" anchor="ctr"/>
-          <a:lstStyle/>
-          <a:p>
-            <a:pPr marL="0" indent="0" algn="r">
-              <a:buNone/>
-            </a:pPr>
-            <a:r>
-              <a:rPr lang="ru-RU" sz="800" kern="0" spc="300" dirty="0">
-                <a:solidFill>
-                  <a:srgbClr val="8A8580"/>
-                </a:solidFill>
-                <a:latin typeface="Inter" pitchFamily="34" charset="0"/>
-                <a:ea typeface="Inter" pitchFamily="34" charset="-122"/>
-                <a:cs typeface="Inter" pitchFamily="34" charset="-120"/>
-              </a:rPr>
-              <a:t>17</a:t>
+              <a:t>13</a:t>
             </a:r>
             <a:endParaRPr lang="en-US" sz="800" dirty="0"/>
           </a:p>
@@ -9647,7 +5840,29 @@
                 <a:ea typeface="Inter" pitchFamily="34" charset="-122"/>
                 <a:cs typeface="Inter" pitchFamily="34" charset="-120"/>
               </a:rPr>
-              <a:t>01  /  ВВЕДЕНИЕ</a:t>
+              <a:t>0</a:t>
+            </a:r>
+            <a:r>
+              <a:rPr lang="ru-RU" sz="900" b="1" kern="0" spc="400" dirty="0">
+                <a:solidFill>
+                  <a:srgbClr val="C97B5B"/>
+                </a:solidFill>
+                <a:latin typeface="Inter" pitchFamily="34" charset="0"/>
+                <a:ea typeface="Inter" pitchFamily="34" charset="-122"/>
+                <a:cs typeface="Inter" pitchFamily="34" charset="-120"/>
+              </a:rPr>
+              <a:t>2</a:t>
+            </a:r>
+            <a:r>
+              <a:rPr lang="en-US" sz="900" b="1" kern="0" spc="400" dirty="0">
+                <a:solidFill>
+                  <a:srgbClr val="C97B5B"/>
+                </a:solidFill>
+                <a:latin typeface="Inter" pitchFamily="34" charset="0"/>
+                <a:ea typeface="Inter" pitchFamily="34" charset="-122"/>
+                <a:cs typeface="Inter" pitchFamily="34" charset="-120"/>
+              </a:rPr>
+              <a:t>  /  ВВЕДЕНИЕ</a:t>
             </a:r>
             <a:endParaRPr lang="en-US" sz="900" dirty="0"/>
           </a:p>
@@ -9846,7 +6061,29 @@
                 <a:ea typeface="Inter" pitchFamily="34" charset="-122"/>
                 <a:cs typeface="Inter" pitchFamily="34" charset="-120"/>
               </a:rPr>
-              <a:t> и таблицы не справляются — теряется контекст, кто что делает и в каком статусе.</a:t>
+              <a:t> и таблицы не справляются — теряется контекст, кто </a:t>
+            </a:r>
+            <a:r>
+              <a:rPr lang="en-US" dirty="0" err="1">
+                <a:solidFill>
+                  <a:srgbClr val="3D3D3D"/>
+                </a:solidFill>
+                <a:latin typeface="Inter" pitchFamily="34" charset="0"/>
+                <a:ea typeface="Inter" pitchFamily="34" charset="-122"/>
+                <a:cs typeface="Inter" pitchFamily="34" charset="-120"/>
+              </a:rPr>
+              <a:t>что</a:t>
+            </a:r>
+            <a:r>
+              <a:rPr lang="en-US" dirty="0">
+                <a:solidFill>
+                  <a:srgbClr val="3D3D3D"/>
+                </a:solidFill>
+                <a:latin typeface="Inter" pitchFamily="34" charset="0"/>
+                <a:ea typeface="Inter" pitchFamily="34" charset="-122"/>
+                <a:cs typeface="Inter" pitchFamily="34" charset="-120"/>
+              </a:rPr>
+              <a:t> делает и в каком статусе.</a:t>
             </a:r>
             <a:endParaRPr lang="en-US" dirty="0"/>
           </a:p>
@@ -10033,6 +6270,13 @@
             <a:prstDash val="solid"/>
           </a:ln>
         </p:spPr>
+        <p:txBody>
+          <a:bodyPr/>
+          <a:lstStyle/>
+          <a:p>
+            <a:endParaRPr lang="ru-RU"/>
+          </a:p>
+        </p:txBody>
       </p:sp>
       <p:sp>
         <p:nvSpPr>
@@ -10173,6 +6417,13 @@
             <a:prstDash val="solid"/>
           </a:ln>
         </p:spPr>
+        <p:txBody>
+          <a:bodyPr/>
+          <a:lstStyle/>
+          <a:p>
+            <a:endParaRPr lang="ru-RU"/>
+          </a:p>
+        </p:txBody>
       </p:sp>
       <p:sp>
         <p:nvSpPr>
@@ -10288,56 +6539,6 @@
               <a:t>→ Аудит всех изменений</a:t>
             </a:r>
             <a:endParaRPr lang="en-US" sz="1100" dirty="0"/>
-          </a:p>
-        </p:txBody>
-      </p:sp>
-      <p:sp>
-        <p:nvSpPr>
-          <p:cNvPr id="22" name="Text 20"/>
-          <p:cNvSpPr/>
-          <p:nvPr/>
-        </p:nvSpPr>
-        <p:spPr>
-          <a:xfrm>
-            <a:off x="548640" y="6400800"/>
-            <a:ext cx="3657600" cy="320040"/>
-          </a:xfrm>
-          <a:prstGeom prst="rect">
-            <a:avLst/>
-          </a:prstGeom>
-          <a:noFill/>
-          <a:ln/>
-        </p:spPr>
-        <p:txBody>
-          <a:bodyPr wrap="square" lIns="0" tIns="0" rIns="0" bIns="0" rtlCol="0" anchor="ctr"/>
-          <a:lstStyle/>
-          <a:p>
-            <a:pPr marL="0" indent="0">
-              <a:buNone/>
-            </a:pPr>
-            <a:r>
-              <a:rPr lang="en-US" sz="800" kern="0" spc="300" dirty="0">
-                <a:solidFill>
-                  <a:srgbClr val="8A8580"/>
-                </a:solidFill>
-                <a:latin typeface="Inter" pitchFamily="34" charset="0"/>
-                <a:ea typeface="Inter" pitchFamily="34" charset="-122"/>
-                <a:cs typeface="Inter" pitchFamily="34" charset="-120"/>
-              </a:rPr>
-              <a:t>KANBAN  /  02 — </a:t>
-            </a:r>
-            <a:r>
-              <a:rPr lang="ru-RU" sz="800" kern="0" spc="300" dirty="0">
-                <a:solidFill>
-                  <a:srgbClr val="8A8580"/>
-                </a:solidFill>
-                <a:latin typeface="Inter" pitchFamily="34" charset="0"/>
-                <a:ea typeface="Inter" pitchFamily="34" charset="-122"/>
-                <a:cs typeface="Inter" pitchFamily="34" charset="-120"/>
-              </a:rPr>
-              <a:t>17</a:t>
-            </a:r>
-            <a:endParaRPr lang="en-US" sz="800" dirty="0"/>
           </a:p>
         </p:txBody>
       </p:sp>
@@ -10407,7 +6608,29 @@
                 <a:ea typeface="Inter" pitchFamily="34" charset="-122"/>
                 <a:cs typeface="Inter" pitchFamily="34" charset="-120"/>
               </a:rPr>
-              <a:t>02  /  ЦЕЛЬ ПРОЕКТА</a:t>
+              <a:t>0</a:t>
+            </a:r>
+            <a:r>
+              <a:rPr lang="ru-RU" sz="900" b="1" kern="0" spc="400" dirty="0">
+                <a:solidFill>
+                  <a:srgbClr val="C97B5B"/>
+                </a:solidFill>
+                <a:latin typeface="Inter" pitchFamily="34" charset="0"/>
+                <a:ea typeface="Inter" pitchFamily="34" charset="-122"/>
+                <a:cs typeface="Inter" pitchFamily="34" charset="-120"/>
+              </a:rPr>
+              <a:t>3</a:t>
+            </a:r>
+            <a:r>
+              <a:rPr lang="en-US" sz="900" b="1" kern="0" spc="400" dirty="0">
+                <a:solidFill>
+                  <a:srgbClr val="C97B5B"/>
+                </a:solidFill>
+                <a:latin typeface="Inter" pitchFamily="34" charset="0"/>
+                <a:ea typeface="Inter" pitchFamily="34" charset="-122"/>
+                <a:cs typeface="Inter" pitchFamily="34" charset="-120"/>
+              </a:rPr>
+              <a:t>  /  ЦЕЛЬ ПРОЕКТА</a:t>
             </a:r>
             <a:endParaRPr lang="en-US" sz="900" dirty="0"/>
           </a:p>
@@ -10542,6 +6765,13 @@
             <a:prstDash val="solid"/>
           </a:ln>
         </p:spPr>
+        <p:txBody>
+          <a:bodyPr/>
+          <a:lstStyle/>
+          <a:p>
+            <a:endParaRPr lang="ru-RU"/>
+          </a:p>
+        </p:txBody>
       </p:sp>
       <p:sp>
         <p:nvSpPr>
@@ -10692,6 +6922,13 @@
             <a:prstDash val="solid"/>
           </a:ln>
         </p:spPr>
+        <p:txBody>
+          <a:bodyPr/>
+          <a:lstStyle/>
+          <a:p>
+            <a:endParaRPr lang="ru-RU"/>
+          </a:p>
+        </p:txBody>
       </p:sp>
       <p:sp>
         <p:nvSpPr>
@@ -10842,6 +7079,13 @@
             <a:prstDash val="solid"/>
           </a:ln>
         </p:spPr>
+        <p:txBody>
+          <a:bodyPr/>
+          <a:lstStyle/>
+          <a:p>
+            <a:endParaRPr lang="ru-RU"/>
+          </a:p>
+        </p:txBody>
       </p:sp>
       <p:sp>
         <p:nvSpPr>
@@ -10992,6 +7236,13 @@
             <a:prstDash val="solid"/>
           </a:ln>
         </p:spPr>
+        <p:txBody>
+          <a:bodyPr/>
+          <a:lstStyle/>
+          <a:p>
+            <a:endParaRPr lang="ru-RU"/>
+          </a:p>
+        </p:txBody>
       </p:sp>
       <p:sp>
         <p:nvSpPr>
@@ -11113,56 +7364,6 @@
               <a:t>История полей задачи через события Spring</a:t>
             </a:r>
             <a:endParaRPr lang="en-US" sz="1100" dirty="0"/>
-          </a:p>
-        </p:txBody>
-      </p:sp>
-      <p:sp>
-        <p:nvSpPr>
-          <p:cNvPr id="26" name="Text 24"/>
-          <p:cNvSpPr/>
-          <p:nvPr/>
-        </p:nvSpPr>
-        <p:spPr>
-          <a:xfrm>
-            <a:off x="548640" y="6400800"/>
-            <a:ext cx="3657600" cy="320040"/>
-          </a:xfrm>
-          <a:prstGeom prst="rect">
-            <a:avLst/>
-          </a:prstGeom>
-          <a:noFill/>
-          <a:ln/>
-        </p:spPr>
-        <p:txBody>
-          <a:bodyPr wrap="square" lIns="0" tIns="0" rIns="0" bIns="0" rtlCol="0" anchor="ctr"/>
-          <a:lstStyle/>
-          <a:p>
-            <a:pPr marL="0" indent="0">
-              <a:buNone/>
-            </a:pPr>
-            <a:r>
-              <a:rPr lang="en-US" sz="800" kern="0" spc="300" dirty="0">
-                <a:solidFill>
-                  <a:srgbClr val="8A8580"/>
-                </a:solidFill>
-                <a:latin typeface="Inter" pitchFamily="34" charset="0"/>
-                <a:ea typeface="Inter" pitchFamily="34" charset="-122"/>
-                <a:cs typeface="Inter" pitchFamily="34" charset="-120"/>
-              </a:rPr>
-              <a:t>KANBAN  /  03 — </a:t>
-            </a:r>
-            <a:r>
-              <a:rPr lang="ru-RU" sz="800" kern="0" spc="300" dirty="0">
-                <a:solidFill>
-                  <a:srgbClr val="8A8580"/>
-                </a:solidFill>
-                <a:latin typeface="Inter" pitchFamily="34" charset="0"/>
-                <a:ea typeface="Inter" pitchFamily="34" charset="-122"/>
-                <a:cs typeface="Inter" pitchFamily="34" charset="-120"/>
-              </a:rPr>
-              <a:t>17</a:t>
-            </a:r>
-            <a:endParaRPr lang="en-US" sz="800" dirty="0"/>
           </a:p>
         </p:txBody>
       </p:sp>
@@ -11232,897 +7433,75 @@
                 <a:ea typeface="Inter" pitchFamily="34" charset="-122"/>
                 <a:cs typeface="Inter" pitchFamily="34" charset="-120"/>
               </a:rPr>
-              <a:t>03  /  ОБЗОР СИСТЕМЫ</a:t>
+              <a:t>0</a:t>
+            </a:r>
+            <a:r>
+              <a:rPr lang="ru-RU" sz="900" b="1" kern="0" spc="400" dirty="0">
+                <a:solidFill>
+                  <a:srgbClr val="C97B5B"/>
+                </a:solidFill>
+                <a:latin typeface="Inter" pitchFamily="34" charset="0"/>
+                <a:ea typeface="Inter" pitchFamily="34" charset="-122"/>
+                <a:cs typeface="Inter" pitchFamily="34" charset="-120"/>
+              </a:rPr>
+              <a:t>4</a:t>
+            </a:r>
+            <a:r>
+              <a:rPr lang="en-US" sz="900" b="1" kern="0" spc="400" dirty="0">
+                <a:solidFill>
+                  <a:srgbClr val="C97B5B"/>
+                </a:solidFill>
+                <a:latin typeface="Inter" pitchFamily="34" charset="0"/>
+                <a:ea typeface="Inter" pitchFamily="34" charset="-122"/>
+                <a:cs typeface="Inter" pitchFamily="34" charset="-120"/>
+              </a:rPr>
+              <a:t>  /  </a:t>
+            </a:r>
+            <a:r>
+              <a:rPr lang="ru-RU" sz="900" b="1" kern="0" spc="400" dirty="0">
+                <a:solidFill>
+                  <a:srgbClr val="C97B5B"/>
+                </a:solidFill>
+                <a:latin typeface="Inter" pitchFamily="34" charset="0"/>
+                <a:ea typeface="Inter" pitchFamily="34" charset="-122"/>
+                <a:cs typeface="Inter" pitchFamily="34" charset="-120"/>
+              </a:rPr>
+              <a:t>ДИАГРАММА ПРЕЦЕДЕНТОВ</a:t>
             </a:r>
             <a:endParaRPr lang="en-US" sz="900" dirty="0"/>
           </a:p>
         </p:txBody>
       </p:sp>
-      <p:sp>
-        <p:nvSpPr>
-          <p:cNvPr id="8" name="Text 6"/>
-          <p:cNvSpPr/>
-          <p:nvPr/>
-        </p:nvSpPr>
-        <p:spPr>
-          <a:xfrm>
-            <a:off x="548640" y="1280160"/>
-            <a:ext cx="11064240" cy="1828800"/>
-          </a:xfrm>
-          <a:prstGeom prst="rect">
-            <a:avLst/>
-          </a:prstGeom>
-          <a:noFill/>
-          <a:ln/>
-        </p:spPr>
-        <p:txBody>
-          <a:bodyPr wrap="square" lIns="0" tIns="0" rIns="0" bIns="0" rtlCol="0" anchor="ctr">
-            <a:normAutofit/>
-          </a:bodyPr>
-          <a:lstStyle/>
-          <a:p>
-            <a:pPr marL="0" indent="0" algn="l">
-              <a:buNone/>
-            </a:pPr>
-            <a:r>
-              <a:rPr lang="en-US" sz="5200" b="1" dirty="0">
-                <a:solidFill>
-                  <a:srgbClr val="0A0A0A"/>
-                </a:solidFill>
-                <a:latin typeface="Playfair Display" pitchFamily="34" charset="0"/>
-                <a:ea typeface="Playfair Display" pitchFamily="34" charset="-122"/>
-                <a:cs typeface="Playfair Display" pitchFamily="34" charset="-120"/>
-              </a:rPr>
-              <a:t>SPA на React  +  REST API</a:t>
-            </a:r>
-            <a:endParaRPr lang="en-US" sz="5200" dirty="0"/>
-          </a:p>
-          <a:p>
-            <a:pPr marL="0" indent="0" algn="l">
-              <a:buNone/>
-            </a:pPr>
-            <a:r>
-              <a:rPr lang="en-US" sz="5200" b="1" dirty="0">
-                <a:solidFill>
-                  <a:srgbClr val="0A0A0A"/>
-                </a:solidFill>
-                <a:latin typeface="Playfair Display" pitchFamily="34" charset="0"/>
-                <a:ea typeface="Playfair Display" pitchFamily="34" charset="-122"/>
-                <a:cs typeface="Playfair Display" pitchFamily="34" charset="-120"/>
-              </a:rPr>
-              <a:t>на Spring Boot.</a:t>
-            </a:r>
-            <a:endParaRPr lang="en-US" sz="5200" dirty="0"/>
-          </a:p>
-        </p:txBody>
-      </p:sp>
-      <p:sp>
-        <p:nvSpPr>
-          <p:cNvPr id="9" name="Text 7"/>
-          <p:cNvSpPr/>
-          <p:nvPr/>
-        </p:nvSpPr>
-        <p:spPr>
-          <a:xfrm>
-            <a:off x="548640" y="3657600"/>
-            <a:ext cx="4572000" cy="274320"/>
-          </a:xfrm>
-          <a:prstGeom prst="rect">
-            <a:avLst/>
-          </a:prstGeom>
-          <a:noFill/>
-          <a:ln/>
-        </p:spPr>
-        <p:txBody>
-          <a:bodyPr wrap="square" lIns="0" tIns="0" rIns="0" bIns="0" rtlCol="0" anchor="ctr"/>
-          <a:lstStyle/>
-          <a:p>
-            <a:pPr marL="0" indent="0">
-              <a:buNone/>
-            </a:pPr>
-            <a:r>
-              <a:rPr lang="en-US" sz="900" b="1" kern="0" spc="300" dirty="0">
-                <a:solidFill>
-                  <a:srgbClr val="C97B5B"/>
-                </a:solidFill>
-                <a:latin typeface="Inter" pitchFamily="34" charset="0"/>
-                <a:ea typeface="Inter" pitchFamily="34" charset="-122"/>
-                <a:cs typeface="Inter" pitchFamily="34" charset="-120"/>
-              </a:rPr>
-              <a:t>ВОЗМОЖНОСТИ</a:t>
-            </a:r>
-            <a:endParaRPr lang="en-US" sz="900" dirty="0"/>
-          </a:p>
-        </p:txBody>
-      </p:sp>
-      <p:sp>
-        <p:nvSpPr>
-          <p:cNvPr id="10" name="Shape 8"/>
-          <p:cNvSpPr/>
-          <p:nvPr/>
-        </p:nvSpPr>
-        <p:spPr>
-          <a:xfrm>
-            <a:off x="548640" y="4114800"/>
-            <a:ext cx="64008" cy="64008"/>
-          </a:xfrm>
-          <a:prstGeom prst="ellipse">
-            <a:avLst/>
-          </a:prstGeom>
-          <a:solidFill>
-            <a:srgbClr val="C97B5B"/>
-          </a:solidFill>
-          <a:ln w="12700">
-            <a:solidFill>
-              <a:srgbClr val="C97B5B"/>
-            </a:solidFill>
-            <a:prstDash val="solid"/>
-          </a:ln>
-        </p:spPr>
-      </p:sp>
-      <p:sp>
-        <p:nvSpPr>
-          <p:cNvPr id="11" name="Text 9"/>
-          <p:cNvSpPr/>
-          <p:nvPr/>
-        </p:nvSpPr>
-        <p:spPr>
-          <a:xfrm>
-            <a:off x="777240" y="4041648"/>
-            <a:ext cx="4846320" cy="274320"/>
-          </a:xfrm>
-          <a:prstGeom prst="rect">
-            <a:avLst/>
-          </a:prstGeom>
-          <a:noFill/>
-          <a:ln/>
-        </p:spPr>
-        <p:txBody>
-          <a:bodyPr wrap="square" lIns="0" tIns="0" rIns="0" bIns="0" rtlCol="0" anchor="ctr"/>
-          <a:lstStyle/>
-          <a:p>
-            <a:pPr marL="0" indent="0">
-              <a:buNone/>
-            </a:pPr>
-            <a:r>
-              <a:rPr lang="en-US" sz="1200" dirty="0">
-                <a:solidFill>
-                  <a:srgbClr val="0A0A0A"/>
-                </a:solidFill>
-                <a:latin typeface="Inter" pitchFamily="34" charset="0"/>
-                <a:ea typeface="Inter" pitchFamily="34" charset="-122"/>
-                <a:cs typeface="Inter" pitchFamily="34" charset="-120"/>
-              </a:rPr>
-              <a:t>Команды, роли и приглашения по email или ссылке</a:t>
-            </a:r>
-            <a:endParaRPr lang="en-US" sz="1200" dirty="0"/>
-          </a:p>
-        </p:txBody>
-      </p:sp>
-      <p:sp>
-        <p:nvSpPr>
-          <p:cNvPr id="12" name="Shape 10"/>
-          <p:cNvSpPr/>
-          <p:nvPr/>
-        </p:nvSpPr>
-        <p:spPr>
-          <a:xfrm>
-            <a:off x="548640" y="4443984"/>
-            <a:ext cx="64008" cy="64008"/>
-          </a:xfrm>
-          <a:prstGeom prst="ellipse">
-            <a:avLst/>
-          </a:prstGeom>
-          <a:solidFill>
-            <a:srgbClr val="C97B5B"/>
-          </a:solidFill>
-          <a:ln w="12700">
-            <a:solidFill>
-              <a:srgbClr val="C97B5B"/>
-            </a:solidFill>
-            <a:prstDash val="solid"/>
-          </a:ln>
-        </p:spPr>
-      </p:sp>
-      <p:sp>
-        <p:nvSpPr>
-          <p:cNvPr id="13" name="Text 11"/>
-          <p:cNvSpPr/>
-          <p:nvPr/>
-        </p:nvSpPr>
-        <p:spPr>
-          <a:xfrm>
-            <a:off x="777240" y="4370832"/>
-            <a:ext cx="4846320" cy="274320"/>
-          </a:xfrm>
-          <a:prstGeom prst="rect">
-            <a:avLst/>
-          </a:prstGeom>
-          <a:noFill/>
-          <a:ln/>
-        </p:spPr>
-        <p:txBody>
-          <a:bodyPr wrap="square" lIns="0" tIns="0" rIns="0" bIns="0" rtlCol="0" anchor="ctr"/>
-          <a:lstStyle/>
-          <a:p>
-            <a:pPr marL="0" indent="0">
-              <a:buNone/>
-            </a:pPr>
-            <a:r>
-              <a:rPr lang="en-US" sz="1200" dirty="0">
-                <a:solidFill>
-                  <a:srgbClr val="0A0A0A"/>
-                </a:solidFill>
-                <a:latin typeface="Inter" pitchFamily="34" charset="0"/>
-                <a:ea typeface="Inter" pitchFamily="34" charset="-122"/>
-                <a:cs typeface="Inter" pitchFamily="34" charset="-120"/>
-              </a:rPr>
-              <a:t>Kanban-доски с настраиваемыми колонками</a:t>
-            </a:r>
-            <a:endParaRPr lang="en-US" sz="1200" dirty="0"/>
-          </a:p>
-        </p:txBody>
-      </p:sp>
-      <p:sp>
-        <p:nvSpPr>
-          <p:cNvPr id="14" name="Shape 12"/>
-          <p:cNvSpPr/>
-          <p:nvPr/>
-        </p:nvSpPr>
-        <p:spPr>
-          <a:xfrm>
-            <a:off x="548640" y="4773168"/>
-            <a:ext cx="64008" cy="64008"/>
-          </a:xfrm>
-          <a:prstGeom prst="ellipse">
-            <a:avLst/>
-          </a:prstGeom>
-          <a:solidFill>
-            <a:srgbClr val="C97B5B"/>
-          </a:solidFill>
-          <a:ln w="12700">
-            <a:solidFill>
-              <a:srgbClr val="C97B5B"/>
-            </a:solidFill>
-            <a:prstDash val="solid"/>
-          </a:ln>
-        </p:spPr>
-      </p:sp>
-      <p:sp>
-        <p:nvSpPr>
-          <p:cNvPr id="15" name="Text 13"/>
-          <p:cNvSpPr/>
-          <p:nvPr/>
-        </p:nvSpPr>
-        <p:spPr>
-          <a:xfrm>
-            <a:off x="777240" y="4700016"/>
-            <a:ext cx="4846320" cy="274320"/>
-          </a:xfrm>
-          <a:prstGeom prst="rect">
-            <a:avLst/>
-          </a:prstGeom>
-          <a:noFill/>
-          <a:ln/>
-        </p:spPr>
-        <p:txBody>
-          <a:bodyPr wrap="square" lIns="0" tIns="0" rIns="0" bIns="0" rtlCol="0" anchor="ctr"/>
-          <a:lstStyle/>
-          <a:p>
-            <a:pPr marL="0" indent="0">
-              <a:buNone/>
-            </a:pPr>
-            <a:r>
-              <a:rPr lang="en-US" sz="1200" dirty="0">
-                <a:solidFill>
-                  <a:srgbClr val="0A0A0A"/>
-                </a:solidFill>
-                <a:latin typeface="Inter" pitchFamily="34" charset="0"/>
-                <a:ea typeface="Inter" pitchFamily="34" charset="-122"/>
-                <a:cs typeface="Inter" pitchFamily="34" charset="-120"/>
-              </a:rPr>
-              <a:t>Drag-and-drop задач и колонок (dnd-kit)</a:t>
-            </a:r>
-            <a:endParaRPr lang="en-US" sz="1200" dirty="0"/>
-          </a:p>
-        </p:txBody>
-      </p:sp>
-      <p:sp>
-        <p:nvSpPr>
-          <p:cNvPr id="16" name="Shape 14"/>
-          <p:cNvSpPr/>
-          <p:nvPr/>
-        </p:nvSpPr>
-        <p:spPr>
-          <a:xfrm>
-            <a:off x="548640" y="5102352"/>
-            <a:ext cx="64008" cy="64008"/>
-          </a:xfrm>
-          <a:prstGeom prst="ellipse">
-            <a:avLst/>
-          </a:prstGeom>
-          <a:solidFill>
-            <a:srgbClr val="C97B5B"/>
-          </a:solidFill>
-          <a:ln w="12700">
-            <a:solidFill>
-              <a:srgbClr val="C97B5B"/>
-            </a:solidFill>
-            <a:prstDash val="solid"/>
-          </a:ln>
-        </p:spPr>
-      </p:sp>
-      <p:sp>
-        <p:nvSpPr>
-          <p:cNvPr id="17" name="Text 15"/>
-          <p:cNvSpPr/>
-          <p:nvPr/>
-        </p:nvSpPr>
-        <p:spPr>
-          <a:xfrm>
-            <a:off x="777240" y="5029200"/>
-            <a:ext cx="4846320" cy="274320"/>
-          </a:xfrm>
-          <a:prstGeom prst="rect">
-            <a:avLst/>
-          </a:prstGeom>
-          <a:noFill/>
-          <a:ln/>
-        </p:spPr>
-        <p:txBody>
-          <a:bodyPr wrap="square" lIns="0" tIns="0" rIns="0" bIns="0" rtlCol="0" anchor="ctr"/>
-          <a:lstStyle/>
-          <a:p>
-            <a:pPr marL="0" indent="0">
-              <a:buNone/>
-            </a:pPr>
-            <a:r>
-              <a:rPr lang="en-US" sz="1200" dirty="0">
-                <a:solidFill>
-                  <a:srgbClr val="0A0A0A"/>
-                </a:solidFill>
-                <a:latin typeface="Inter" pitchFamily="34" charset="0"/>
-                <a:ea typeface="Inter" pitchFamily="34" charset="-122"/>
-                <a:cs typeface="Inter" pitchFamily="34" charset="-120"/>
-              </a:rPr>
-              <a:t>Комментарии, файлы, история изменений</a:t>
-            </a:r>
-            <a:endParaRPr lang="en-US" sz="1200" dirty="0"/>
-          </a:p>
-        </p:txBody>
-      </p:sp>
-      <p:sp>
-        <p:nvSpPr>
-          <p:cNvPr id="18" name="Shape 16"/>
-          <p:cNvSpPr/>
-          <p:nvPr/>
-        </p:nvSpPr>
-        <p:spPr>
-          <a:xfrm>
-            <a:off x="548640" y="5431536"/>
-            <a:ext cx="64008" cy="64008"/>
-          </a:xfrm>
-          <a:prstGeom prst="ellipse">
-            <a:avLst/>
-          </a:prstGeom>
-          <a:solidFill>
-            <a:srgbClr val="C97B5B"/>
-          </a:solidFill>
-          <a:ln w="12700">
-            <a:solidFill>
-              <a:srgbClr val="C97B5B"/>
-            </a:solidFill>
-            <a:prstDash val="solid"/>
-          </a:ln>
-        </p:spPr>
-      </p:sp>
-      <p:sp>
-        <p:nvSpPr>
-          <p:cNvPr id="19" name="Text 17"/>
-          <p:cNvSpPr/>
-          <p:nvPr/>
-        </p:nvSpPr>
-        <p:spPr>
-          <a:xfrm>
-            <a:off x="777240" y="5358384"/>
-            <a:ext cx="4846320" cy="274320"/>
-          </a:xfrm>
-          <a:prstGeom prst="rect">
-            <a:avLst/>
-          </a:prstGeom>
-          <a:noFill/>
-          <a:ln/>
-        </p:spPr>
-        <p:txBody>
-          <a:bodyPr wrap="square" lIns="0" tIns="0" rIns="0" bIns="0" rtlCol="0" anchor="ctr"/>
-          <a:lstStyle/>
-          <a:p>
-            <a:pPr marL="0" indent="0">
-              <a:buNone/>
-            </a:pPr>
-            <a:r>
-              <a:rPr lang="en-US" sz="1200" dirty="0">
-                <a:solidFill>
-                  <a:srgbClr val="0A0A0A"/>
-                </a:solidFill>
-                <a:latin typeface="Inter" pitchFamily="34" charset="0"/>
-                <a:ea typeface="Inter" pitchFamily="34" charset="-122"/>
-                <a:cs typeface="Inter" pitchFamily="34" charset="-120"/>
-              </a:rPr>
-              <a:t>Таблица задач с фильтрами и пагинацией</a:t>
-            </a:r>
-            <a:endParaRPr lang="en-US" sz="1200" dirty="0"/>
-          </a:p>
-        </p:txBody>
-      </p:sp>
-      <p:sp>
-        <p:nvSpPr>
-          <p:cNvPr id="20" name="Shape 18"/>
-          <p:cNvSpPr/>
-          <p:nvPr/>
-        </p:nvSpPr>
-        <p:spPr>
-          <a:xfrm>
-            <a:off x="548640" y="5760720"/>
-            <a:ext cx="64008" cy="64008"/>
-          </a:xfrm>
-          <a:prstGeom prst="ellipse">
-            <a:avLst/>
-          </a:prstGeom>
-          <a:solidFill>
-            <a:srgbClr val="C97B5B"/>
-          </a:solidFill>
-          <a:ln w="12700">
-            <a:solidFill>
-              <a:srgbClr val="C97B5B"/>
-            </a:solidFill>
-            <a:prstDash val="solid"/>
-          </a:ln>
-        </p:spPr>
-      </p:sp>
-      <p:sp>
-        <p:nvSpPr>
-          <p:cNvPr id="21" name="Text 19"/>
-          <p:cNvSpPr/>
-          <p:nvPr/>
-        </p:nvSpPr>
-        <p:spPr>
-          <a:xfrm>
-            <a:off x="777240" y="5687568"/>
-            <a:ext cx="4846320" cy="274320"/>
-          </a:xfrm>
-          <a:prstGeom prst="rect">
-            <a:avLst/>
-          </a:prstGeom>
-          <a:noFill/>
-          <a:ln/>
-        </p:spPr>
-        <p:txBody>
-          <a:bodyPr wrap="square" lIns="0" tIns="0" rIns="0" bIns="0" rtlCol="0" anchor="ctr"/>
-          <a:lstStyle/>
-          <a:p>
-            <a:pPr marL="0" indent="0">
-              <a:buNone/>
-            </a:pPr>
-            <a:r>
-              <a:rPr lang="en-US" sz="1200" dirty="0">
-                <a:solidFill>
-                  <a:srgbClr val="0A0A0A"/>
-                </a:solidFill>
-                <a:latin typeface="Inter" pitchFamily="34" charset="0"/>
-                <a:ea typeface="Inter" pitchFamily="34" charset="-122"/>
-                <a:cs typeface="Inter" pitchFamily="34" charset="-120"/>
-              </a:rPr>
-              <a:t>Русская и английская локализация</a:t>
-            </a:r>
-            <a:endParaRPr lang="en-US" sz="1200" dirty="0"/>
-          </a:p>
-        </p:txBody>
-      </p:sp>
-      <p:sp>
-        <p:nvSpPr>
-          <p:cNvPr id="22" name="Text 20"/>
-          <p:cNvSpPr/>
-          <p:nvPr/>
-        </p:nvSpPr>
-        <p:spPr>
-          <a:xfrm>
-            <a:off x="6400800" y="3657600"/>
-            <a:ext cx="4572000" cy="274320"/>
-          </a:xfrm>
-          <a:prstGeom prst="rect">
-            <a:avLst/>
-          </a:prstGeom>
-          <a:noFill/>
-          <a:ln/>
-        </p:spPr>
-        <p:txBody>
-          <a:bodyPr wrap="square" lIns="0" tIns="0" rIns="0" bIns="0" rtlCol="0" anchor="ctr"/>
-          <a:lstStyle/>
-          <a:p>
-            <a:pPr marL="0" indent="0">
-              <a:buNone/>
-            </a:pPr>
-            <a:r>
-              <a:rPr lang="en-US" sz="900" b="1" kern="0" spc="300" dirty="0">
-                <a:solidFill>
-                  <a:srgbClr val="C97B5B"/>
-                </a:solidFill>
-                <a:latin typeface="Inter" pitchFamily="34" charset="0"/>
-                <a:ea typeface="Inter" pitchFamily="34" charset="-122"/>
-                <a:cs typeface="Inter" pitchFamily="34" charset="-120"/>
-              </a:rPr>
-              <a:t>АРХИТЕКТУРА</a:t>
-            </a:r>
-            <a:endParaRPr lang="en-US" sz="900" dirty="0"/>
-          </a:p>
-        </p:txBody>
-      </p:sp>
-      <p:sp>
-        <p:nvSpPr>
-          <p:cNvPr id="23" name="Shape 21"/>
-          <p:cNvSpPr/>
-          <p:nvPr/>
-        </p:nvSpPr>
-        <p:spPr>
-          <a:xfrm>
-            <a:off x="6400800" y="4114800"/>
-            <a:ext cx="5212080" cy="685800"/>
-          </a:xfrm>
-          <a:prstGeom prst="roundRect">
-            <a:avLst>
-              <a:gd name="adj" fmla="val 6667"/>
-            </a:avLst>
-          </a:prstGeom>
-          <a:solidFill>
-            <a:srgbClr val="FFFFFF"/>
-          </a:solidFill>
-          <a:ln w="6350">
-            <a:solidFill>
-              <a:srgbClr val="D9D5CE"/>
-            </a:solidFill>
-            <a:prstDash val="solid"/>
-          </a:ln>
-        </p:spPr>
-      </p:sp>
-      <p:sp>
-        <p:nvSpPr>
-          <p:cNvPr id="24" name="Text 22"/>
-          <p:cNvSpPr/>
-          <p:nvPr/>
-        </p:nvSpPr>
-        <p:spPr>
-          <a:xfrm>
-            <a:off x="6629400" y="4187952"/>
-            <a:ext cx="2743200" cy="274320"/>
-          </a:xfrm>
-          <a:prstGeom prst="rect">
-            <a:avLst/>
-          </a:prstGeom>
-          <a:noFill/>
-          <a:ln/>
-        </p:spPr>
-        <p:txBody>
-          <a:bodyPr wrap="square" lIns="0" tIns="0" rIns="0" bIns="0" rtlCol="0" anchor="ctr"/>
-          <a:lstStyle/>
-          <a:p>
-            <a:pPr marL="0" indent="0">
-              <a:buNone/>
-            </a:pPr>
-            <a:r>
-              <a:rPr lang="en-US" sz="800" b="1" kern="0" spc="300" dirty="0">
-                <a:solidFill>
-                  <a:srgbClr val="8A8580"/>
-                </a:solidFill>
-                <a:latin typeface="Inter" pitchFamily="34" charset="0"/>
-                <a:ea typeface="Inter" pitchFamily="34" charset="-122"/>
-                <a:cs typeface="Inter" pitchFamily="34" charset="-120"/>
-              </a:rPr>
-              <a:t>BROWSER</a:t>
-            </a:r>
-            <a:endParaRPr lang="en-US" sz="800" dirty="0"/>
-          </a:p>
-        </p:txBody>
-      </p:sp>
-      <p:sp>
-        <p:nvSpPr>
-          <p:cNvPr id="25" name="Text 23"/>
-          <p:cNvSpPr/>
-          <p:nvPr/>
-        </p:nvSpPr>
-        <p:spPr>
-          <a:xfrm>
-            <a:off x="6629400" y="4434840"/>
-            <a:ext cx="4114800" cy="320040"/>
-          </a:xfrm>
-          <a:prstGeom prst="rect">
-            <a:avLst/>
-          </a:prstGeom>
-          <a:noFill/>
-          <a:ln/>
-        </p:spPr>
-        <p:txBody>
-          <a:bodyPr wrap="square" lIns="0" tIns="0" rIns="0" bIns="0" rtlCol="0" anchor="ctr"/>
-          <a:lstStyle/>
-          <a:p>
-            <a:pPr marL="0" indent="0">
-              <a:buNone/>
-            </a:pPr>
-            <a:r>
-              <a:rPr lang="en-US" sz="1600" b="1" dirty="0">
-                <a:solidFill>
-                  <a:srgbClr val="0A0A0A"/>
-                </a:solidFill>
-                <a:latin typeface="Playfair Display" pitchFamily="34" charset="0"/>
-                <a:ea typeface="Playfair Display" pitchFamily="34" charset="-122"/>
-                <a:cs typeface="Playfair Display" pitchFamily="34" charset="-120"/>
-              </a:rPr>
-              <a:t>React 19 SPA</a:t>
-            </a:r>
-            <a:endParaRPr lang="en-US" sz="1600" dirty="0"/>
-          </a:p>
-        </p:txBody>
-      </p:sp>
-      <p:sp>
-        <p:nvSpPr>
-          <p:cNvPr id="26" name="Shape 24"/>
-          <p:cNvSpPr/>
-          <p:nvPr/>
-        </p:nvSpPr>
-        <p:spPr>
-          <a:xfrm>
-            <a:off x="6400800" y="4937760"/>
-            <a:ext cx="5212080" cy="685800"/>
-          </a:xfrm>
-          <a:prstGeom prst="roundRect">
-            <a:avLst>
-              <a:gd name="adj" fmla="val 6667"/>
-            </a:avLst>
-          </a:prstGeom>
-          <a:solidFill>
-            <a:srgbClr val="FFFFFF"/>
-          </a:solidFill>
-          <a:ln w="6350">
-            <a:solidFill>
-              <a:srgbClr val="D9D5CE"/>
-            </a:solidFill>
-            <a:prstDash val="solid"/>
-          </a:ln>
-        </p:spPr>
-      </p:sp>
-      <p:sp>
-        <p:nvSpPr>
-          <p:cNvPr id="27" name="Text 25"/>
-          <p:cNvSpPr/>
-          <p:nvPr/>
-        </p:nvSpPr>
-        <p:spPr>
-          <a:xfrm>
-            <a:off x="6629400" y="5010912"/>
-            <a:ext cx="2743200" cy="274320"/>
-          </a:xfrm>
-          <a:prstGeom prst="rect">
-            <a:avLst/>
-          </a:prstGeom>
-          <a:noFill/>
-          <a:ln/>
-        </p:spPr>
-        <p:txBody>
-          <a:bodyPr wrap="square" lIns="0" tIns="0" rIns="0" bIns="0" rtlCol="0" anchor="ctr"/>
-          <a:lstStyle/>
-          <a:p>
-            <a:pPr marL="0" indent="0">
-              <a:buNone/>
-            </a:pPr>
-            <a:r>
-              <a:rPr lang="en-US" sz="800" b="1" kern="0" spc="300" dirty="0">
-                <a:solidFill>
-                  <a:srgbClr val="8A8580"/>
-                </a:solidFill>
-                <a:latin typeface="Inter" pitchFamily="34" charset="0"/>
-                <a:ea typeface="Inter" pitchFamily="34" charset="-122"/>
-                <a:cs typeface="Inter" pitchFamily="34" charset="-120"/>
-              </a:rPr>
-              <a:t>API</a:t>
-            </a:r>
-            <a:endParaRPr lang="en-US" sz="800" dirty="0"/>
-          </a:p>
-        </p:txBody>
-      </p:sp>
-      <p:sp>
-        <p:nvSpPr>
-          <p:cNvPr id="28" name="Text 26"/>
-          <p:cNvSpPr/>
-          <p:nvPr/>
-        </p:nvSpPr>
-        <p:spPr>
-          <a:xfrm>
-            <a:off x="6629400" y="5257800"/>
-            <a:ext cx="4114800" cy="320040"/>
-          </a:xfrm>
-          <a:prstGeom prst="rect">
-            <a:avLst/>
-          </a:prstGeom>
-          <a:noFill/>
-          <a:ln/>
-        </p:spPr>
-        <p:txBody>
-          <a:bodyPr wrap="square" lIns="0" tIns="0" rIns="0" bIns="0" rtlCol="0" anchor="ctr"/>
-          <a:lstStyle/>
-          <a:p>
-            <a:pPr marL="0" indent="0">
-              <a:buNone/>
-            </a:pPr>
-            <a:r>
-              <a:rPr lang="en-US" sz="1600" b="1" dirty="0">
-                <a:solidFill>
-                  <a:srgbClr val="0A0A0A"/>
-                </a:solidFill>
-                <a:latin typeface="Playfair Display" pitchFamily="34" charset="0"/>
-                <a:ea typeface="Playfair Display" pitchFamily="34" charset="-122"/>
-                <a:cs typeface="Playfair Display" pitchFamily="34" charset="-120"/>
-              </a:rPr>
-              <a:t>Spring Boot 4 / Java 21</a:t>
-            </a:r>
-            <a:endParaRPr lang="en-US" sz="1600" dirty="0"/>
-          </a:p>
-        </p:txBody>
-      </p:sp>
-      <p:sp>
-        <p:nvSpPr>
-          <p:cNvPr id="29" name="Shape 27"/>
-          <p:cNvSpPr/>
-          <p:nvPr/>
-        </p:nvSpPr>
-        <p:spPr>
-          <a:xfrm>
-            <a:off x="6400800" y="5760720"/>
-            <a:ext cx="5212080" cy="685800"/>
-          </a:xfrm>
-          <a:prstGeom prst="roundRect">
-            <a:avLst>
-              <a:gd name="adj" fmla="val 6667"/>
-            </a:avLst>
-          </a:prstGeom>
-          <a:solidFill>
-            <a:srgbClr val="FFFFFF"/>
-          </a:solidFill>
-          <a:ln w="6350">
-            <a:solidFill>
-              <a:srgbClr val="D9D5CE"/>
-            </a:solidFill>
-            <a:prstDash val="solid"/>
-          </a:ln>
-        </p:spPr>
-      </p:sp>
-      <p:sp>
-        <p:nvSpPr>
-          <p:cNvPr id="30" name="Text 28"/>
-          <p:cNvSpPr/>
-          <p:nvPr/>
-        </p:nvSpPr>
-        <p:spPr>
-          <a:xfrm>
-            <a:off x="6629400" y="5833872"/>
-            <a:ext cx="2743200" cy="274320"/>
-          </a:xfrm>
-          <a:prstGeom prst="rect">
-            <a:avLst/>
-          </a:prstGeom>
-          <a:noFill/>
-          <a:ln/>
-        </p:spPr>
-        <p:txBody>
-          <a:bodyPr wrap="square" lIns="0" tIns="0" rIns="0" bIns="0" rtlCol="0" anchor="ctr"/>
-          <a:lstStyle/>
-          <a:p>
-            <a:pPr marL="0" indent="0">
-              <a:buNone/>
-            </a:pPr>
-            <a:r>
-              <a:rPr lang="en-US" sz="800" b="1" kern="0" spc="300" dirty="0">
-                <a:solidFill>
-                  <a:srgbClr val="8A8580"/>
-                </a:solidFill>
-                <a:latin typeface="Inter" pitchFamily="34" charset="0"/>
-                <a:ea typeface="Inter" pitchFamily="34" charset="-122"/>
-                <a:cs typeface="Inter" pitchFamily="34" charset="-120"/>
-              </a:rPr>
-              <a:t>DATABASE</a:t>
-            </a:r>
-            <a:endParaRPr lang="en-US" sz="800" dirty="0"/>
-          </a:p>
-        </p:txBody>
-      </p:sp>
-      <p:sp>
-        <p:nvSpPr>
-          <p:cNvPr id="31" name="Text 29"/>
-          <p:cNvSpPr/>
-          <p:nvPr/>
-        </p:nvSpPr>
-        <p:spPr>
-          <a:xfrm>
-            <a:off x="6629400" y="6080760"/>
-            <a:ext cx="4114800" cy="320040"/>
-          </a:xfrm>
-          <a:prstGeom prst="rect">
-            <a:avLst/>
-          </a:prstGeom>
-          <a:noFill/>
-          <a:ln/>
-        </p:spPr>
-        <p:txBody>
-          <a:bodyPr wrap="square" lIns="0" tIns="0" rIns="0" bIns="0" rtlCol="0" anchor="ctr"/>
-          <a:lstStyle/>
-          <a:p>
-            <a:pPr marL="0" indent="0">
-              <a:buNone/>
-            </a:pPr>
-            <a:r>
-              <a:rPr lang="en-US" sz="1600" b="1" dirty="0">
-                <a:solidFill>
-                  <a:srgbClr val="0A0A0A"/>
-                </a:solidFill>
-                <a:latin typeface="Playfair Display" pitchFamily="34" charset="0"/>
-                <a:ea typeface="Playfair Display" pitchFamily="34" charset="-122"/>
-                <a:cs typeface="Playfair Display" pitchFamily="34" charset="-120"/>
-              </a:rPr>
-              <a:t>MySQL 8 + Liquibase</a:t>
-            </a:r>
-            <a:endParaRPr lang="en-US" sz="1600" dirty="0"/>
-          </a:p>
-        </p:txBody>
-      </p:sp>
-      <p:sp>
-        <p:nvSpPr>
-          <p:cNvPr id="36" name="Text 34"/>
-          <p:cNvSpPr/>
-          <p:nvPr/>
-        </p:nvSpPr>
-        <p:spPr>
-          <a:xfrm>
-            <a:off x="548640" y="6400800"/>
-            <a:ext cx="3657600" cy="320040"/>
-          </a:xfrm>
-          <a:prstGeom prst="rect">
-            <a:avLst/>
-          </a:prstGeom>
-          <a:noFill/>
-          <a:ln/>
-        </p:spPr>
-        <p:txBody>
-          <a:bodyPr wrap="square" lIns="0" tIns="0" rIns="0" bIns="0" rtlCol="0" anchor="ctr"/>
-          <a:lstStyle/>
-          <a:p>
-            <a:pPr marL="0" indent="0">
-              <a:buNone/>
-            </a:pPr>
-            <a:r>
-              <a:rPr lang="en-US" sz="800" kern="0" spc="300" dirty="0">
-                <a:solidFill>
-                  <a:srgbClr val="8A8580"/>
-                </a:solidFill>
-                <a:latin typeface="Inter" pitchFamily="34" charset="0"/>
-                <a:ea typeface="Inter" pitchFamily="34" charset="-122"/>
-                <a:cs typeface="Inter" pitchFamily="34" charset="-120"/>
-              </a:rPr>
-              <a:t>KANBAN  /  04 — </a:t>
-            </a:r>
-            <a:r>
-              <a:rPr lang="ru-RU" sz="800" kern="0" spc="300" dirty="0">
-                <a:solidFill>
-                  <a:srgbClr val="8A8580"/>
-                </a:solidFill>
-                <a:latin typeface="Inter" pitchFamily="34" charset="0"/>
-                <a:ea typeface="Inter" pitchFamily="34" charset="-122"/>
-                <a:cs typeface="Inter" pitchFamily="34" charset="-120"/>
-              </a:rPr>
-              <a:t>17</a:t>
-            </a:r>
-            <a:endParaRPr lang="en-US" sz="800" dirty="0"/>
-          </a:p>
-        </p:txBody>
-      </p:sp>
+      <p:pic>
+        <p:nvPicPr>
+          <p:cNvPr id="2" name="Рисунок 1">
+            <a:extLst>
+              <a:ext uri="{FF2B5EF4-FFF2-40B4-BE49-F238E27FC236}">
+                <a16:creationId xmlns:a16="http://schemas.microsoft.com/office/drawing/2014/main" id="{329B2F4C-97DE-754D-094A-458158560948}"/>
+              </a:ext>
+            </a:extLst>
+          </p:cNvPr>
+          <p:cNvPicPr>
+            <a:picLocks noChangeAspect="1"/>
+          </p:cNvPicPr>
+          <p:nvPr/>
+        </p:nvPicPr>
+        <p:blipFill>
+          <a:blip r:embed="rId3"/>
+          <a:stretch>
+            <a:fillRect/>
+          </a:stretch>
+        </p:blipFill>
+        <p:spPr>
+          <a:xfrm>
+            <a:off x="2019365" y="743817"/>
+            <a:ext cx="8153269" cy="5926839"/>
+          </a:xfrm>
+          <a:prstGeom prst="rect">
+            <a:avLst/>
+          </a:prstGeom>
+        </p:spPr>
+      </p:pic>
     </p:spTree>
   </p:cSld>
   <p:clrMapOvr>
@@ -12189,7 +7568,29 @@
                 <a:ea typeface="Inter" pitchFamily="34" charset="-122"/>
                 <a:cs typeface="Inter" pitchFamily="34" charset="-120"/>
               </a:rPr>
-              <a:t>04  /  АРХИТЕКТУРА</a:t>
+              <a:t>0</a:t>
+            </a:r>
+            <a:r>
+              <a:rPr lang="ru-RU" sz="900" b="1" kern="0" spc="400" dirty="0">
+                <a:solidFill>
+                  <a:srgbClr val="C97B5B"/>
+                </a:solidFill>
+                <a:latin typeface="Inter" pitchFamily="34" charset="0"/>
+                <a:ea typeface="Inter" pitchFamily="34" charset="-122"/>
+                <a:cs typeface="Inter" pitchFamily="34" charset="-120"/>
+              </a:rPr>
+              <a:t>5</a:t>
+            </a:r>
+            <a:r>
+              <a:rPr lang="en-US" sz="900" b="1" kern="0" spc="400" dirty="0">
+                <a:solidFill>
+                  <a:srgbClr val="C97B5B"/>
+                </a:solidFill>
+                <a:latin typeface="Inter" pitchFamily="34" charset="0"/>
+                <a:ea typeface="Inter" pitchFamily="34" charset="-122"/>
+                <a:cs typeface="Inter" pitchFamily="34" charset="-120"/>
+              </a:rPr>
+              <a:t>  /  АРХИТЕКТУРА</a:t>
             </a:r>
             <a:endParaRPr lang="en-US" sz="900" dirty="0"/>
           </a:p>
@@ -12304,6 +7705,13 @@
             <a:prstDash val="solid"/>
           </a:ln>
         </p:spPr>
+        <p:txBody>
+          <a:bodyPr/>
+          <a:lstStyle/>
+          <a:p>
+            <a:endParaRPr lang="ru-RU"/>
+          </a:p>
+        </p:txBody>
       </p:sp>
       <p:sp>
         <p:nvSpPr>
@@ -12366,6 +7774,13 @@
             <a:prstDash val="solid"/>
           </a:ln>
         </p:spPr>
+        <p:txBody>
+          <a:bodyPr/>
+          <a:lstStyle/>
+          <a:p>
+            <a:endParaRPr lang="ru-RU"/>
+          </a:p>
+        </p:txBody>
       </p:sp>
       <p:sp>
         <p:nvSpPr>
@@ -12477,6 +7892,13 @@
             <a:prstDash val="solid"/>
           </a:ln>
         </p:spPr>
+        <p:txBody>
+          <a:bodyPr/>
+          <a:lstStyle/>
+          <a:p>
+            <a:endParaRPr lang="ru-RU"/>
+          </a:p>
+        </p:txBody>
       </p:sp>
       <p:sp>
         <p:nvSpPr>
@@ -12539,6 +7961,13 @@
             <a:prstDash val="solid"/>
           </a:ln>
         </p:spPr>
+        <p:txBody>
+          <a:bodyPr/>
+          <a:lstStyle/>
+          <a:p>
+            <a:endParaRPr lang="ru-RU"/>
+          </a:p>
+        </p:txBody>
       </p:sp>
       <p:sp>
         <p:nvSpPr>
@@ -12650,6 +8079,13 @@
             <a:prstDash val="solid"/>
           </a:ln>
         </p:spPr>
+        <p:txBody>
+          <a:bodyPr/>
+          <a:lstStyle/>
+          <a:p>
+            <a:endParaRPr lang="ru-RU"/>
+          </a:p>
+        </p:txBody>
       </p:sp>
       <p:sp>
         <p:nvSpPr>
@@ -12712,6 +8148,13 @@
             <a:prstDash val="solid"/>
           </a:ln>
         </p:spPr>
+        <p:txBody>
+          <a:bodyPr/>
+          <a:lstStyle/>
+          <a:p>
+            <a:endParaRPr lang="ru-RU"/>
+          </a:p>
+        </p:txBody>
       </p:sp>
       <p:sp>
         <p:nvSpPr>
@@ -12823,6 +8266,13 @@
             <a:prstDash val="solid"/>
           </a:ln>
         </p:spPr>
+        <p:txBody>
+          <a:bodyPr/>
+          <a:lstStyle/>
+          <a:p>
+            <a:endParaRPr lang="ru-RU"/>
+          </a:p>
+        </p:txBody>
       </p:sp>
       <p:sp>
         <p:nvSpPr>
@@ -12885,6 +8335,13 @@
             <a:prstDash val="solid"/>
           </a:ln>
         </p:spPr>
+        <p:txBody>
+          <a:bodyPr/>
+          <a:lstStyle/>
+          <a:p>
+            <a:endParaRPr lang="ru-RU"/>
+          </a:p>
+        </p:txBody>
       </p:sp>
       <p:sp>
         <p:nvSpPr>
@@ -12996,6 +8453,13 @@
             <a:prstDash val="solid"/>
           </a:ln>
         </p:spPr>
+        <p:txBody>
+          <a:bodyPr/>
+          <a:lstStyle/>
+          <a:p>
+            <a:endParaRPr lang="ru-RU"/>
+          </a:p>
+        </p:txBody>
       </p:sp>
       <p:sp>
         <p:nvSpPr>
@@ -13058,6 +8522,13 @@
             <a:prstDash val="solid"/>
           </a:ln>
         </p:spPr>
+        <p:txBody>
+          <a:bodyPr/>
+          <a:lstStyle/>
+          <a:p>
+            <a:endParaRPr lang="ru-RU"/>
+          </a:p>
+        </p:txBody>
       </p:sp>
       <p:sp>
         <p:nvSpPr>
@@ -13140,56 +8611,6 @@
               <a:t>MySQL 8.0, миграции Liquibase, индексы по FK.</a:t>
             </a:r>
             <a:endParaRPr lang="en-US" sz="1000" dirty="0"/>
-          </a:p>
-        </p:txBody>
-      </p:sp>
-      <p:sp>
-        <p:nvSpPr>
-          <p:cNvPr id="36" name="Text 34"/>
-          <p:cNvSpPr/>
-          <p:nvPr/>
-        </p:nvSpPr>
-        <p:spPr>
-          <a:xfrm>
-            <a:off x="548640" y="6400800"/>
-            <a:ext cx="3657600" cy="320040"/>
-          </a:xfrm>
-          <a:prstGeom prst="rect">
-            <a:avLst/>
-          </a:prstGeom>
-          <a:noFill/>
-          <a:ln/>
-        </p:spPr>
-        <p:txBody>
-          <a:bodyPr wrap="square" lIns="0" tIns="0" rIns="0" bIns="0" rtlCol="0" anchor="ctr"/>
-          <a:lstStyle/>
-          <a:p>
-            <a:pPr marL="0" indent="0">
-              <a:buNone/>
-            </a:pPr>
-            <a:r>
-              <a:rPr lang="en-US" sz="800" kern="0" spc="300" dirty="0">
-                <a:solidFill>
-                  <a:srgbClr val="8A8580"/>
-                </a:solidFill>
-                <a:latin typeface="Inter" pitchFamily="34" charset="0"/>
-                <a:ea typeface="Inter" pitchFamily="34" charset="-122"/>
-                <a:cs typeface="Inter" pitchFamily="34" charset="-120"/>
-              </a:rPr>
-              <a:t>KANBAN  /  05 — </a:t>
-            </a:r>
-            <a:r>
-              <a:rPr lang="ru-RU" sz="800" kern="0" spc="300" dirty="0">
-                <a:solidFill>
-                  <a:srgbClr val="8A8580"/>
-                </a:solidFill>
-                <a:latin typeface="Inter" pitchFamily="34" charset="0"/>
-                <a:ea typeface="Inter" pitchFamily="34" charset="-122"/>
-                <a:cs typeface="Inter" pitchFamily="34" charset="-120"/>
-              </a:rPr>
-              <a:t>17</a:t>
-            </a:r>
-            <a:endParaRPr lang="en-US" sz="800" dirty="0"/>
           </a:p>
         </p:txBody>
       </p:sp>
@@ -13259,7 +8680,29 @@
                 <a:ea typeface="Inter" pitchFamily="34" charset="-122"/>
                 <a:cs typeface="Inter" pitchFamily="34" charset="-120"/>
               </a:rPr>
-              <a:t>05  /  ТЕХНОЛОГИИ</a:t>
+              <a:t>0</a:t>
+            </a:r>
+            <a:r>
+              <a:rPr lang="ru-RU" sz="900" b="1" kern="0" spc="400" dirty="0">
+                <a:solidFill>
+                  <a:srgbClr val="C97B5B"/>
+                </a:solidFill>
+                <a:latin typeface="Inter" pitchFamily="34" charset="0"/>
+                <a:ea typeface="Inter" pitchFamily="34" charset="-122"/>
+                <a:cs typeface="Inter" pitchFamily="34" charset="-120"/>
+              </a:rPr>
+              <a:t>6</a:t>
+            </a:r>
+            <a:r>
+              <a:rPr lang="en-US" sz="900" b="1" kern="0" spc="400" dirty="0">
+                <a:solidFill>
+                  <a:srgbClr val="C97B5B"/>
+                </a:solidFill>
+                <a:latin typeface="Inter" pitchFamily="34" charset="0"/>
+                <a:ea typeface="Inter" pitchFamily="34" charset="-122"/>
+                <a:cs typeface="Inter" pitchFamily="34" charset="-120"/>
+              </a:rPr>
+              <a:t>  /  ТЕХНОЛОГИИ</a:t>
             </a:r>
             <a:endParaRPr lang="en-US" sz="900" dirty="0"/>
           </a:p>
@@ -13332,6 +8775,13 @@
             <a:prstDash val="solid"/>
           </a:ln>
         </p:spPr>
+        <p:txBody>
+          <a:bodyPr/>
+          <a:lstStyle/>
+          <a:p>
+            <a:endParaRPr lang="ru-RU"/>
+          </a:p>
+        </p:txBody>
       </p:sp>
       <p:sp>
         <p:nvSpPr>
@@ -13357,6 +8807,13 @@
             <a:prstDash val="solid"/>
           </a:ln>
         </p:spPr>
+        <p:txBody>
+          <a:bodyPr/>
+          <a:lstStyle/>
+          <a:p>
+            <a:endParaRPr lang="ru-RU"/>
+          </a:p>
+        </p:txBody>
       </p:sp>
       <p:sp>
         <p:nvSpPr>
@@ -13423,6 +8880,13 @@
             <a:prstDash val="solid"/>
           </a:ln>
         </p:spPr>
+        <p:txBody>
+          <a:bodyPr/>
+          <a:lstStyle/>
+          <a:p>
+            <a:endParaRPr lang="ru-RU"/>
+          </a:p>
+        </p:txBody>
       </p:sp>
       <p:sp>
         <p:nvSpPr>
@@ -13448,6 +8912,13 @@
             <a:prstDash val="solid"/>
           </a:ln>
         </p:spPr>
+        <p:txBody>
+          <a:bodyPr/>
+          <a:lstStyle/>
+          <a:p>
+            <a:endParaRPr lang="ru-RU"/>
+          </a:p>
+        </p:txBody>
       </p:sp>
       <p:sp>
         <p:nvSpPr>
@@ -13514,6 +8985,13 @@
             <a:prstDash val="solid"/>
           </a:ln>
         </p:spPr>
+        <p:txBody>
+          <a:bodyPr/>
+          <a:lstStyle/>
+          <a:p>
+            <a:endParaRPr lang="ru-RU"/>
+          </a:p>
+        </p:txBody>
       </p:sp>
       <p:sp>
         <p:nvSpPr>
@@ -13539,6 +9017,13 @@
             <a:prstDash val="solid"/>
           </a:ln>
         </p:spPr>
+        <p:txBody>
+          <a:bodyPr/>
+          <a:lstStyle/>
+          <a:p>
+            <a:endParaRPr lang="ru-RU"/>
+          </a:p>
+        </p:txBody>
       </p:sp>
       <p:sp>
         <p:nvSpPr>
@@ -13605,6 +9090,13 @@
             <a:prstDash val="solid"/>
           </a:ln>
         </p:spPr>
+        <p:txBody>
+          <a:bodyPr/>
+          <a:lstStyle/>
+          <a:p>
+            <a:endParaRPr lang="ru-RU"/>
+          </a:p>
+        </p:txBody>
       </p:sp>
       <p:sp>
         <p:nvSpPr>
@@ -13630,6 +9122,13 @@
             <a:prstDash val="solid"/>
           </a:ln>
         </p:spPr>
+        <p:txBody>
+          <a:bodyPr/>
+          <a:lstStyle/>
+          <a:p>
+            <a:endParaRPr lang="ru-RU"/>
+          </a:p>
+        </p:txBody>
       </p:sp>
       <p:sp>
         <p:nvSpPr>
@@ -13696,6 +9195,13 @@
             <a:prstDash val="solid"/>
           </a:ln>
         </p:spPr>
+        <p:txBody>
+          <a:bodyPr/>
+          <a:lstStyle/>
+          <a:p>
+            <a:endParaRPr lang="ru-RU"/>
+          </a:p>
+        </p:txBody>
       </p:sp>
       <p:sp>
         <p:nvSpPr>
@@ -13721,6 +9227,13 @@
             <a:prstDash val="solid"/>
           </a:ln>
         </p:spPr>
+        <p:txBody>
+          <a:bodyPr/>
+          <a:lstStyle/>
+          <a:p>
+            <a:endParaRPr lang="ru-RU"/>
+          </a:p>
+        </p:txBody>
       </p:sp>
       <p:sp>
         <p:nvSpPr>
@@ -13787,6 +9300,13 @@
             <a:prstDash val="solid"/>
           </a:ln>
         </p:spPr>
+        <p:txBody>
+          <a:bodyPr/>
+          <a:lstStyle/>
+          <a:p>
+            <a:endParaRPr lang="ru-RU"/>
+          </a:p>
+        </p:txBody>
       </p:sp>
       <p:sp>
         <p:nvSpPr>
@@ -13812,6 +9332,13 @@
             <a:prstDash val="solid"/>
           </a:ln>
         </p:spPr>
+        <p:txBody>
+          <a:bodyPr/>
+          <a:lstStyle/>
+          <a:p>
+            <a:endParaRPr lang="ru-RU"/>
+          </a:p>
+        </p:txBody>
       </p:sp>
       <p:sp>
         <p:nvSpPr>
@@ -13927,56 +9454,6 @@
               <a:t>BCrypt  ·  Jakarta Validation  ·  Lombok  ·  Maven  ·  Docker (multi-stage)</a:t>
             </a:r>
             <a:endParaRPr lang="en-US" sz="1200" dirty="0"/>
-          </a:p>
-        </p:txBody>
-      </p:sp>
-      <p:sp>
-        <p:nvSpPr>
-          <p:cNvPr id="35" name="Text 33"/>
-          <p:cNvSpPr/>
-          <p:nvPr/>
-        </p:nvSpPr>
-        <p:spPr>
-          <a:xfrm>
-            <a:off x="548640" y="6400800"/>
-            <a:ext cx="3657600" cy="320040"/>
-          </a:xfrm>
-          <a:prstGeom prst="rect">
-            <a:avLst/>
-          </a:prstGeom>
-          <a:noFill/>
-          <a:ln/>
-        </p:spPr>
-        <p:txBody>
-          <a:bodyPr wrap="square" lIns="0" tIns="0" rIns="0" bIns="0" rtlCol="0" anchor="ctr"/>
-          <a:lstStyle/>
-          <a:p>
-            <a:pPr marL="0" indent="0">
-              <a:buNone/>
-            </a:pPr>
-            <a:r>
-              <a:rPr lang="en-US" sz="800" kern="0" spc="300" dirty="0">
-                <a:solidFill>
-                  <a:srgbClr val="8A8580"/>
-                </a:solidFill>
-                <a:latin typeface="Inter" pitchFamily="34" charset="0"/>
-                <a:ea typeface="Inter" pitchFamily="34" charset="-122"/>
-                <a:cs typeface="Inter" pitchFamily="34" charset="-120"/>
-              </a:rPr>
-              <a:t>KANBAN  /  06 — </a:t>
-            </a:r>
-            <a:r>
-              <a:rPr lang="ru-RU" sz="800" kern="0" spc="300" dirty="0">
-                <a:solidFill>
-                  <a:srgbClr val="8A8580"/>
-                </a:solidFill>
-                <a:latin typeface="Inter" pitchFamily="34" charset="0"/>
-                <a:ea typeface="Inter" pitchFamily="34" charset="-122"/>
-                <a:cs typeface="Inter" pitchFamily="34" charset="-120"/>
-              </a:rPr>
-              <a:t>17</a:t>
-            </a:r>
-            <a:endParaRPr lang="en-US" sz="800" dirty="0"/>
           </a:p>
         </p:txBody>
       </p:sp>
@@ -14046,7 +9523,29 @@
                 <a:ea typeface="Inter" pitchFamily="34" charset="-122"/>
                 <a:cs typeface="Inter" pitchFamily="34" charset="-120"/>
               </a:rPr>
-              <a:t>06  /  ТЕХНОЛОГИИ</a:t>
+              <a:t>0</a:t>
+            </a:r>
+            <a:r>
+              <a:rPr lang="ru-RU" sz="900" b="1" kern="0" spc="400" dirty="0">
+                <a:solidFill>
+                  <a:srgbClr val="C97B5B"/>
+                </a:solidFill>
+                <a:latin typeface="Inter" pitchFamily="34" charset="0"/>
+                <a:ea typeface="Inter" pitchFamily="34" charset="-122"/>
+                <a:cs typeface="Inter" pitchFamily="34" charset="-120"/>
+              </a:rPr>
+              <a:t>7</a:t>
+            </a:r>
+            <a:r>
+              <a:rPr lang="en-US" sz="900" b="1" kern="0" spc="400" dirty="0">
+                <a:solidFill>
+                  <a:srgbClr val="C97B5B"/>
+                </a:solidFill>
+                <a:latin typeface="Inter" pitchFamily="34" charset="0"/>
+                <a:ea typeface="Inter" pitchFamily="34" charset="-122"/>
+                <a:cs typeface="Inter" pitchFamily="34" charset="-120"/>
+              </a:rPr>
+              <a:t>  /  ТЕХНОЛОГИИ</a:t>
             </a:r>
             <a:endParaRPr lang="en-US" sz="900" dirty="0"/>
           </a:p>
@@ -14119,6 +9618,13 @@
             <a:prstDash val="solid"/>
           </a:ln>
         </p:spPr>
+        <p:txBody>
+          <a:bodyPr/>
+          <a:lstStyle/>
+          <a:p>
+            <a:endParaRPr lang="ru-RU"/>
+          </a:p>
+        </p:txBody>
       </p:sp>
       <p:sp>
         <p:nvSpPr>
@@ -14144,6 +9650,13 @@
             <a:prstDash val="solid"/>
           </a:ln>
         </p:spPr>
+        <p:txBody>
+          <a:bodyPr/>
+          <a:lstStyle/>
+          <a:p>
+            <a:endParaRPr lang="ru-RU"/>
+          </a:p>
+        </p:txBody>
       </p:sp>
       <p:sp>
         <p:nvSpPr>
@@ -14252,6 +9765,13 @@
             <a:prstDash val="solid"/>
           </a:ln>
         </p:spPr>
+        <p:txBody>
+          <a:bodyPr/>
+          <a:lstStyle/>
+          <a:p>
+            <a:endParaRPr lang="ru-RU"/>
+          </a:p>
+        </p:txBody>
       </p:sp>
       <p:sp>
         <p:nvSpPr>
@@ -14277,6 +9797,13 @@
             <a:prstDash val="solid"/>
           </a:ln>
         </p:spPr>
+        <p:txBody>
+          <a:bodyPr/>
+          <a:lstStyle/>
+          <a:p>
+            <a:endParaRPr lang="ru-RU"/>
+          </a:p>
+        </p:txBody>
       </p:sp>
       <p:sp>
         <p:nvSpPr>
@@ -14385,6 +9912,13 @@
             <a:prstDash val="solid"/>
           </a:ln>
         </p:spPr>
+        <p:txBody>
+          <a:bodyPr/>
+          <a:lstStyle/>
+          <a:p>
+            <a:endParaRPr lang="ru-RU"/>
+          </a:p>
+        </p:txBody>
       </p:sp>
       <p:sp>
         <p:nvSpPr>
@@ -14410,6 +9944,13 @@
             <a:prstDash val="solid"/>
           </a:ln>
         </p:spPr>
+        <p:txBody>
+          <a:bodyPr/>
+          <a:lstStyle/>
+          <a:p>
+            <a:endParaRPr lang="ru-RU"/>
+          </a:p>
+        </p:txBody>
       </p:sp>
       <p:sp>
         <p:nvSpPr>
@@ -14518,6 +10059,13 @@
             <a:prstDash val="solid"/>
           </a:ln>
         </p:spPr>
+        <p:txBody>
+          <a:bodyPr/>
+          <a:lstStyle/>
+          <a:p>
+            <a:endParaRPr lang="ru-RU"/>
+          </a:p>
+        </p:txBody>
       </p:sp>
       <p:sp>
         <p:nvSpPr>
@@ -14543,6 +10091,13 @@
             <a:prstDash val="solid"/>
           </a:ln>
         </p:spPr>
+        <p:txBody>
+          <a:bodyPr/>
+          <a:lstStyle/>
+          <a:p>
+            <a:endParaRPr lang="ru-RU"/>
+          </a:p>
+        </p:txBody>
       </p:sp>
       <p:sp>
         <p:nvSpPr>
@@ -14651,6 +10206,13 @@
             <a:prstDash val="solid"/>
           </a:ln>
         </p:spPr>
+        <p:txBody>
+          <a:bodyPr/>
+          <a:lstStyle/>
+          <a:p>
+            <a:endParaRPr lang="ru-RU"/>
+          </a:p>
+        </p:txBody>
       </p:sp>
       <p:sp>
         <p:nvSpPr>
@@ -14676,6 +10238,13 @@
             <a:prstDash val="solid"/>
           </a:ln>
         </p:spPr>
+        <p:txBody>
+          <a:bodyPr/>
+          <a:lstStyle/>
+          <a:p>
+            <a:endParaRPr lang="ru-RU"/>
+          </a:p>
+        </p:txBody>
       </p:sp>
       <p:sp>
         <p:nvSpPr>
@@ -14784,6 +10353,13 @@
             <a:prstDash val="solid"/>
           </a:ln>
         </p:spPr>
+        <p:txBody>
+          <a:bodyPr/>
+          <a:lstStyle/>
+          <a:p>
+            <a:endParaRPr lang="ru-RU"/>
+          </a:p>
+        </p:txBody>
       </p:sp>
       <p:sp>
         <p:nvSpPr>
@@ -14809,6 +10385,13 @@
             <a:prstDash val="solid"/>
           </a:ln>
         </p:spPr>
+        <p:txBody>
+          <a:bodyPr/>
+          <a:lstStyle/>
+          <a:p>
+            <a:endParaRPr lang="ru-RU"/>
+          </a:p>
+        </p:txBody>
       </p:sp>
       <p:sp>
         <p:nvSpPr>
@@ -14917,6 +10500,13 @@
             <a:prstDash val="solid"/>
           </a:ln>
         </p:spPr>
+        <p:txBody>
+          <a:bodyPr/>
+          <a:lstStyle/>
+          <a:p>
+            <a:endParaRPr lang="ru-RU"/>
+          </a:p>
+        </p:txBody>
       </p:sp>
       <p:sp>
         <p:nvSpPr>
@@ -14942,6 +10532,13 @@
             <a:prstDash val="solid"/>
           </a:ln>
         </p:spPr>
+        <p:txBody>
+          <a:bodyPr/>
+          <a:lstStyle/>
+          <a:p>
+            <a:endParaRPr lang="ru-RU"/>
+          </a:p>
+        </p:txBody>
       </p:sp>
       <p:sp>
         <p:nvSpPr>
@@ -15050,6 +10647,13 @@
             <a:prstDash val="solid"/>
           </a:ln>
         </p:spPr>
+        <p:txBody>
+          <a:bodyPr/>
+          <a:lstStyle/>
+          <a:p>
+            <a:endParaRPr lang="ru-RU"/>
+          </a:p>
+        </p:txBody>
       </p:sp>
       <p:sp>
         <p:nvSpPr>
@@ -15075,6 +10679,13 @@
             <a:prstDash val="solid"/>
           </a:ln>
         </p:spPr>
+        <p:txBody>
+          <a:bodyPr/>
+          <a:lstStyle/>
+          <a:p>
+            <a:endParaRPr lang="ru-RU"/>
+          </a:p>
+        </p:txBody>
       </p:sp>
       <p:sp>
         <p:nvSpPr>
@@ -15232,56 +10843,6 @@
               <a:t>Axios (interceptors)  ·  React Router 7  ·  date-fns  ·  Sonner (toasts)  ·  Lucide-react</a:t>
             </a:r>
             <a:endParaRPr lang="en-US" sz="1200" dirty="0"/>
-          </a:p>
-        </p:txBody>
-      </p:sp>
-      <p:sp>
-        <p:nvSpPr>
-          <p:cNvPr id="43" name="Text 41"/>
-          <p:cNvSpPr/>
-          <p:nvPr/>
-        </p:nvSpPr>
-        <p:spPr>
-          <a:xfrm>
-            <a:off x="548640" y="6400800"/>
-            <a:ext cx="3657600" cy="320040"/>
-          </a:xfrm>
-          <a:prstGeom prst="rect">
-            <a:avLst/>
-          </a:prstGeom>
-          <a:noFill/>
-          <a:ln/>
-        </p:spPr>
-        <p:txBody>
-          <a:bodyPr wrap="square" lIns="0" tIns="0" rIns="0" bIns="0" rtlCol="0" anchor="ctr"/>
-          <a:lstStyle/>
-          <a:p>
-            <a:pPr marL="0" indent="0">
-              <a:buNone/>
-            </a:pPr>
-            <a:r>
-              <a:rPr lang="en-US" sz="800" kern="0" spc="300" dirty="0">
-                <a:solidFill>
-                  <a:srgbClr val="8A8580"/>
-                </a:solidFill>
-                <a:latin typeface="Inter" pitchFamily="34" charset="0"/>
-                <a:ea typeface="Inter" pitchFamily="34" charset="-122"/>
-                <a:cs typeface="Inter" pitchFamily="34" charset="-120"/>
-              </a:rPr>
-              <a:t>KANBAN  /  07 — </a:t>
-            </a:r>
-            <a:r>
-              <a:rPr lang="ru-RU" sz="800" kern="0" spc="300" dirty="0">
-                <a:solidFill>
-                  <a:srgbClr val="8A8580"/>
-                </a:solidFill>
-                <a:latin typeface="Inter" pitchFamily="34" charset="0"/>
-                <a:ea typeface="Inter" pitchFamily="34" charset="-122"/>
-                <a:cs typeface="Inter" pitchFamily="34" charset="-120"/>
-              </a:rPr>
-              <a:t>17</a:t>
-            </a:r>
-            <a:endParaRPr lang="en-US" sz="800" dirty="0"/>
           </a:p>
         </p:txBody>
       </p:sp>
@@ -15351,7 +10912,29 @@
                 <a:ea typeface="Inter" pitchFamily="34" charset="-122"/>
                 <a:cs typeface="Inter" pitchFamily="34" charset="-120"/>
               </a:rPr>
-              <a:t>07  /  МОДЕЛЬ ДАННЫХ</a:t>
+              <a:t>0</a:t>
+            </a:r>
+            <a:r>
+              <a:rPr lang="ru-RU" sz="900" b="1" kern="0" spc="400" dirty="0">
+                <a:solidFill>
+                  <a:srgbClr val="C97B5B"/>
+                </a:solidFill>
+                <a:latin typeface="Inter" pitchFamily="34" charset="0"/>
+                <a:ea typeface="Inter" pitchFamily="34" charset="-122"/>
+                <a:cs typeface="Inter" pitchFamily="34" charset="-120"/>
+              </a:rPr>
+              <a:t>8</a:t>
+            </a:r>
+            <a:r>
+              <a:rPr lang="en-US" sz="900" b="1" kern="0" spc="400" dirty="0">
+                <a:solidFill>
+                  <a:srgbClr val="C97B5B"/>
+                </a:solidFill>
+                <a:latin typeface="Inter" pitchFamily="34" charset="0"/>
+                <a:ea typeface="Inter" pitchFamily="34" charset="-122"/>
+                <a:cs typeface="Inter" pitchFamily="34" charset="-120"/>
+              </a:rPr>
+              <a:t>  /  МОДЕЛЬ ДАННЫХ</a:t>
             </a:r>
             <a:endParaRPr lang="en-US" sz="900" dirty="0"/>
           </a:p>
@@ -15537,6 +11120,13 @@
             <a:prstDash val="solid"/>
           </a:ln>
         </p:spPr>
+        <p:txBody>
+          <a:bodyPr/>
+          <a:lstStyle/>
+          <a:p>
+            <a:endParaRPr lang="ru-RU"/>
+          </a:p>
+        </p:txBody>
       </p:sp>
       <p:sp>
         <p:nvSpPr>
@@ -15562,6 +11152,13 @@
             <a:prstDash val="solid"/>
           </a:ln>
         </p:spPr>
+        <p:txBody>
+          <a:bodyPr/>
+          <a:lstStyle/>
+          <a:p>
+            <a:endParaRPr lang="ru-RU"/>
+          </a:p>
+        </p:txBody>
       </p:sp>
       <p:sp>
         <p:nvSpPr>
@@ -15821,6 +11418,13 @@
             <a:prstDash val="solid"/>
           </a:ln>
         </p:spPr>
+        <p:txBody>
+          <a:bodyPr/>
+          <a:lstStyle/>
+          <a:p>
+            <a:endParaRPr lang="ru-RU"/>
+          </a:p>
+        </p:txBody>
       </p:sp>
       <p:sp>
         <p:nvSpPr>
@@ -16080,6 +11684,13 @@
             <a:prstDash val="solid"/>
           </a:ln>
         </p:spPr>
+        <p:txBody>
+          <a:bodyPr/>
+          <a:lstStyle/>
+          <a:p>
+            <a:endParaRPr lang="ru-RU"/>
+          </a:p>
+        </p:txBody>
       </p:sp>
       <p:sp>
         <p:nvSpPr>
@@ -16339,6 +11950,13 @@
             <a:prstDash val="solid"/>
           </a:ln>
         </p:spPr>
+        <p:txBody>
+          <a:bodyPr/>
+          <a:lstStyle/>
+          <a:p>
+            <a:endParaRPr lang="ru-RU"/>
+          </a:p>
+        </p:txBody>
       </p:sp>
       <p:sp>
         <p:nvSpPr>
@@ -16598,6 +12216,13 @@
             <a:prstDash val="solid"/>
           </a:ln>
         </p:spPr>
+        <p:txBody>
+          <a:bodyPr/>
+          <a:lstStyle/>
+          <a:p>
+            <a:endParaRPr lang="ru-RU"/>
+          </a:p>
+        </p:txBody>
       </p:sp>
       <p:sp>
         <p:nvSpPr>
@@ -16738,54 +12363,11 @@
             <a:prstDash val="solid"/>
           </a:ln>
         </p:spPr>
-      </p:sp>
-      <p:sp>
-        <p:nvSpPr>
-          <p:cNvPr id="46" name="Text 44"/>
-          <p:cNvSpPr/>
-          <p:nvPr/>
-        </p:nvSpPr>
-        <p:spPr>
-          <a:xfrm>
-            <a:off x="548640" y="6400800"/>
-            <a:ext cx="3657600" cy="320040"/>
-          </a:xfrm>
-          <a:prstGeom prst="rect">
-            <a:avLst/>
-          </a:prstGeom>
-          <a:noFill/>
-          <a:ln/>
-        </p:spPr>
-        <p:txBody>
-          <a:bodyPr wrap="square" lIns="0" tIns="0" rIns="0" bIns="0" rtlCol="0" anchor="ctr"/>
-          <a:lstStyle/>
-          <a:p>
-            <a:pPr marL="0" indent="0">
-              <a:buNone/>
-            </a:pPr>
-            <a:r>
-              <a:rPr lang="en-US" sz="800" kern="0" spc="300" dirty="0">
-                <a:solidFill>
-                  <a:srgbClr val="8A8580"/>
-                </a:solidFill>
-                <a:latin typeface="Inter" pitchFamily="34" charset="0"/>
-                <a:ea typeface="Inter" pitchFamily="34" charset="-122"/>
-                <a:cs typeface="Inter" pitchFamily="34" charset="-120"/>
-              </a:rPr>
-              <a:t>KANBAN  /  08 — </a:t>
-            </a:r>
-            <a:r>
-              <a:rPr lang="ru-RU" sz="800" kern="0" spc="300" dirty="0">
-                <a:solidFill>
-                  <a:srgbClr val="8A8580"/>
-                </a:solidFill>
-                <a:latin typeface="Inter" pitchFamily="34" charset="0"/>
-                <a:ea typeface="Inter" pitchFamily="34" charset="-122"/>
-                <a:cs typeface="Inter" pitchFamily="34" charset="-120"/>
-              </a:rPr>
-              <a:t>17</a:t>
-            </a:r>
-            <a:endParaRPr lang="en-US" sz="800" dirty="0"/>
+        <p:txBody>
+          <a:bodyPr/>
+          <a:lstStyle/>
+          <a:p>
+            <a:endParaRPr lang="ru-RU"/>
           </a:p>
         </p:txBody>
       </p:sp>
@@ -16799,7 +12381,7 @@
 
 <file path=ppt/slides/slide9.xml><?xml version="1.0" encoding="utf-8"?>
 <p:sld xmlns:a="http://schemas.openxmlformats.org/drawingml/2006/main" xmlns:r="http://schemas.openxmlformats.org/officeDocument/2006/relationships" xmlns:p="http://schemas.openxmlformats.org/presentationml/2006/main">
-  <p:cSld name="Slide 10">
+  <p:cSld name="Slide 13">
     <p:bg>
       <p:bgPr>
         <a:solidFill>
@@ -16847,6 +12429,17 @@
               <a:buNone/>
             </a:pPr>
             <a:r>
+              <a:rPr lang="ru-RU" sz="900" b="1" kern="0" spc="400" dirty="0">
+                <a:solidFill>
+                  <a:srgbClr val="C97B5B"/>
+                </a:solidFill>
+                <a:latin typeface="Inter" pitchFamily="34" charset="0"/>
+                <a:ea typeface="Inter" pitchFamily="34" charset="-122"/>
+                <a:cs typeface="Inter" pitchFamily="34" charset="-120"/>
+              </a:rPr>
+              <a:t>09</a:t>
+            </a:r>
+            <a:r>
               <a:rPr lang="en-US" sz="900" b="1" kern="0" spc="400" dirty="0">
                 <a:solidFill>
                   <a:srgbClr val="C97B5B"/>
@@ -16855,29 +12448,7 @@
                 <a:ea typeface="Inter" pitchFamily="34" charset="-122"/>
                 <a:cs typeface="Inter" pitchFamily="34" charset="-120"/>
               </a:rPr>
-              <a:t>0</a:t>
-            </a:r>
-            <a:r>
-              <a:rPr lang="ru-RU" sz="900" b="1" kern="0" spc="400" dirty="0">
-                <a:solidFill>
-                  <a:srgbClr val="C97B5B"/>
-                </a:solidFill>
-                <a:latin typeface="Inter" pitchFamily="34" charset="0"/>
-                <a:ea typeface="Inter" pitchFamily="34" charset="-122"/>
-                <a:cs typeface="Inter" pitchFamily="34" charset="-120"/>
-              </a:rPr>
-              <a:t>8</a:t>
-            </a:r>
-            <a:r>
-              <a:rPr lang="en-US" sz="900" b="1" kern="0" spc="400" dirty="0">
-                <a:solidFill>
-                  <a:srgbClr val="C97B5B"/>
-                </a:solidFill>
-                <a:latin typeface="Inter" pitchFamily="34" charset="0"/>
-                <a:ea typeface="Inter" pitchFamily="34" charset="-122"/>
-                <a:cs typeface="Inter" pitchFamily="34" charset="-120"/>
-              </a:rPr>
-              <a:t>  /  API</a:t>
+              <a:t>/  DRAG &amp; DROP</a:t>
             </a:r>
             <a:endParaRPr lang="en-US" sz="900" dirty="0"/>
           </a:p>
@@ -16910,7 +12481,7 @@
               <a:buNone/>
             </a:pPr>
             <a:r>
-              <a:rPr lang="en-US" sz="4600" b="1" dirty="0">
+              <a:rPr lang="en-US" sz="4800" b="1" dirty="0">
                 <a:solidFill>
                   <a:srgbClr val="0A0A0A"/>
                 </a:solidFill>
@@ -16918,9 +12489,9 @@
                 <a:ea typeface="Playfair Display" pitchFamily="34" charset="-122"/>
                 <a:cs typeface="Playfair Display" pitchFamily="34" charset="-120"/>
               </a:rPr>
-              <a:t>REST API под /kanban/api</a:t>
-            </a:r>
-            <a:endParaRPr lang="en-US" sz="4600" dirty="0"/>
+              <a:t>Optimistic updates на DnD.</a:t>
+            </a:r>
+            <a:endParaRPr lang="en-US" sz="4800" dirty="0"/>
           </a:p>
         </p:txBody>
       </p:sp>
@@ -16932,34 +12503,34 @@
         </p:nvSpPr>
         <p:spPr>
           <a:xfrm>
-            <a:off x="548640" y="2194560"/>
-            <a:ext cx="11064240" cy="457200"/>
-          </a:xfrm>
-          <a:prstGeom prst="rect">
-            <a:avLst/>
-          </a:prstGeom>
-          <a:noFill/>
-          <a:ln/>
-        </p:spPr>
-        <p:txBody>
-          <a:bodyPr wrap="square" lIns="0" tIns="0" rIns="0" bIns="0" rtlCol="0" anchor="ctr"/>
-          <a:lstStyle/>
-          <a:p>
-            <a:pPr marL="0" indent="0">
-              <a:buNone/>
-            </a:pPr>
-            <a:r>
-              <a:rPr lang="en-US" sz="1200" i="1" dirty="0">
-                <a:solidFill>
-                  <a:srgbClr val="3D3D3D"/>
-                </a:solidFill>
-                <a:latin typeface="Inter" pitchFamily="34" charset="0"/>
-                <a:ea typeface="Inter" pitchFamily="34" charset="-122"/>
-                <a:cs typeface="Inter" pitchFamily="34" charset="-120"/>
-              </a:rPr>
-              <a:t>13 контроллеров: auth, users, groups, members, boards, board-users, columns, tasks, comments, attachments, files, invitations, task-history.</a:t>
-            </a:r>
-            <a:endParaRPr lang="en-US" sz="1200" dirty="0"/>
+            <a:off x="548640" y="2423160"/>
+            <a:ext cx="3657600" cy="274320"/>
+          </a:xfrm>
+          <a:prstGeom prst="rect">
+            <a:avLst/>
+          </a:prstGeom>
+          <a:noFill/>
+          <a:ln/>
+        </p:spPr>
+        <p:txBody>
+          <a:bodyPr wrap="square" lIns="0" tIns="0" rIns="0" bIns="0" rtlCol="0" anchor="ctr"/>
+          <a:lstStyle/>
+          <a:p>
+            <a:pPr marL="0" indent="0">
+              <a:buNone/>
+            </a:pPr>
+            <a:r>
+              <a:rPr lang="en-US" sz="900" b="1" kern="0" spc="300" dirty="0">
+                <a:solidFill>
+                  <a:srgbClr val="C97B5B"/>
+                </a:solidFill>
+                <a:latin typeface="Inter" pitchFamily="34" charset="0"/>
+                <a:ea typeface="Inter" pitchFamily="34" charset="-122"/>
+                <a:cs typeface="Inter" pitchFamily="34" charset="-120"/>
+              </a:rPr>
+              <a:t>ПРОБЛЕМА</a:t>
+            </a:r>
+            <a:endParaRPr lang="en-US" sz="900" dirty="0"/>
           </a:p>
         </p:txBody>
       </p:sp>
@@ -16971,8 +12542,50 @@
         </p:nvSpPr>
         <p:spPr>
           <a:xfrm>
-            <a:off x="548640" y="2926080"/>
-            <a:ext cx="914400" cy="274320"/>
+            <a:off x="548640" y="2743200"/>
+            <a:ext cx="5303520" cy="1371600"/>
+          </a:xfrm>
+          <a:prstGeom prst="rect">
+            <a:avLst/>
+          </a:prstGeom>
+          <a:noFill/>
+          <a:ln/>
+        </p:spPr>
+        <p:txBody>
+          <a:bodyPr wrap="square" lIns="0" tIns="0" rIns="0" bIns="0" rtlCol="0" anchor="ctr"/>
+          <a:lstStyle/>
+          <a:p>
+            <a:pPr marL="0" indent="0">
+              <a:lnSpc>
+                <a:spcPct val="140000"/>
+              </a:lnSpc>
+              <a:buNone/>
+            </a:pPr>
+            <a:r>
+              <a:rPr lang="en-US" sz="1300" dirty="0">
+                <a:solidFill>
+                  <a:srgbClr val="0A0A0A"/>
+                </a:solidFill>
+                <a:latin typeface="Inter" pitchFamily="34" charset="0"/>
+                <a:ea typeface="Inter" pitchFamily="34" charset="-122"/>
+                <a:cs typeface="Inter" pitchFamily="34" charset="-120"/>
+              </a:rPr>
+              <a:t>Пользователь перетаскивает карточку — карточка возвращается в исходную колонку на время запроса (200-500 мс), потом «прыгает» назад. UX страдает.</a:t>
+            </a:r>
+            <a:endParaRPr lang="en-US" sz="1300" dirty="0"/>
+          </a:p>
+        </p:txBody>
+      </p:sp>
+      <p:sp>
+        <p:nvSpPr>
+          <p:cNvPr id="11" name="Text 9"/>
+          <p:cNvSpPr/>
+          <p:nvPr/>
+        </p:nvSpPr>
+        <p:spPr>
+          <a:xfrm>
+            <a:off x="548640" y="4023360"/>
+            <a:ext cx="3657600" cy="274320"/>
           </a:xfrm>
           <a:prstGeom prst="rect">
             <a:avLst/>
@@ -16990,13 +12603,13 @@
             <a:r>
               <a:rPr lang="en-US" sz="900" b="1" kern="0" spc="300" dirty="0">
                 <a:solidFill>
-                  <a:srgbClr val="8A8580"/>
-                </a:solidFill>
-                <a:latin typeface="Inter" pitchFamily="34" charset="0"/>
-                <a:ea typeface="Inter" pitchFamily="34" charset="-122"/>
-                <a:cs typeface="Inter" pitchFamily="34" charset="-120"/>
-              </a:rPr>
-              <a:t>МЕТОД</a:t>
+                  <a:srgbClr val="C97B5B"/>
+                </a:solidFill>
+                <a:latin typeface="Inter" pitchFamily="34" charset="0"/>
+                <a:ea typeface="Inter" pitchFamily="34" charset="-122"/>
+                <a:cs typeface="Inter" pitchFamily="34" charset="-120"/>
+              </a:rPr>
+              <a:t>РЕШЕНИЕ</a:t>
             </a:r>
             <a:endParaRPr lang="en-US" sz="900" dirty="0"/>
           </a:p>
@@ -17004,79 +12617,43 @@
       </p:sp>
       <p:sp>
         <p:nvSpPr>
-          <p:cNvPr id="11" name="Text 9"/>
-          <p:cNvSpPr/>
-          <p:nvPr/>
-        </p:nvSpPr>
-        <p:spPr>
-          <a:xfrm>
-            <a:off x="1554480" y="2926080"/>
-            <a:ext cx="5029200" cy="274320"/>
-          </a:xfrm>
-          <a:prstGeom prst="rect">
-            <a:avLst/>
-          </a:prstGeom>
-          <a:noFill/>
-          <a:ln/>
-        </p:spPr>
-        <p:txBody>
-          <a:bodyPr wrap="square" lIns="0" tIns="0" rIns="0" bIns="0" rtlCol="0" anchor="ctr"/>
-          <a:lstStyle/>
-          <a:p>
-            <a:pPr marL="0" indent="0">
-              <a:buNone/>
-            </a:pPr>
-            <a:r>
-              <a:rPr lang="en-US" sz="900" b="1" kern="0" spc="300" dirty="0">
-                <a:solidFill>
-                  <a:srgbClr val="8A8580"/>
-                </a:solidFill>
-                <a:latin typeface="Inter" pitchFamily="34" charset="0"/>
-                <a:ea typeface="Inter" pitchFamily="34" charset="-122"/>
-                <a:cs typeface="Inter" pitchFamily="34" charset="-120"/>
-              </a:rPr>
-              <a:t>ENDPOINT</a:t>
-            </a:r>
-            <a:endParaRPr lang="en-US" sz="900" dirty="0"/>
-          </a:p>
-        </p:txBody>
-      </p:sp>
-      <p:sp>
-        <p:nvSpPr>
           <p:cNvPr id="12" name="Text 10"/>
           <p:cNvSpPr/>
           <p:nvPr/>
         </p:nvSpPr>
         <p:spPr>
           <a:xfrm>
-            <a:off x="6675120" y="2926080"/>
-            <a:ext cx="4937760" cy="274320"/>
-          </a:xfrm>
-          <a:prstGeom prst="rect">
-            <a:avLst/>
-          </a:prstGeom>
-          <a:noFill/>
-          <a:ln/>
-        </p:spPr>
-        <p:txBody>
-          <a:bodyPr wrap="square" lIns="0" tIns="0" rIns="0" bIns="0" rtlCol="0" anchor="ctr"/>
-          <a:lstStyle/>
-          <a:p>
-            <a:pPr marL="0" indent="0">
-              <a:buNone/>
-            </a:pPr>
-            <a:r>
-              <a:rPr lang="en-US" sz="900" b="1" kern="0" spc="300" dirty="0">
-                <a:solidFill>
-                  <a:srgbClr val="8A8580"/>
-                </a:solidFill>
-                <a:latin typeface="Inter" pitchFamily="34" charset="0"/>
-                <a:ea typeface="Inter" pitchFamily="34" charset="-122"/>
-                <a:cs typeface="Inter" pitchFamily="34" charset="-120"/>
-              </a:rPr>
-              <a:t>ОПИСАНИЕ</a:t>
-            </a:r>
-            <a:endParaRPr lang="en-US" sz="900" dirty="0"/>
+            <a:off x="548640" y="4343400"/>
+            <a:ext cx="5303520" cy="1463040"/>
+          </a:xfrm>
+          <a:prstGeom prst="rect">
+            <a:avLst/>
+          </a:prstGeom>
+          <a:noFill/>
+          <a:ln/>
+        </p:spPr>
+        <p:txBody>
+          <a:bodyPr wrap="square" lIns="0" tIns="0" rIns="0" bIns="0" rtlCol="0" anchor="ctr"/>
+          <a:lstStyle/>
+          <a:p>
+            <a:pPr marL="0" indent="0">
+              <a:lnSpc>
+                <a:spcPct val="140000"/>
+              </a:lnSpc>
+              <a:buNone/>
+            </a:pPr>
+            <a:r>
+              <a:rPr lang="en-US" sz="1300" dirty="0">
+                <a:solidFill>
+                  <a:srgbClr val="0A0A0A"/>
+                </a:solidFill>
+                <a:latin typeface="Inter" pitchFamily="34" charset="0"/>
+                <a:ea typeface="Inter" pitchFamily="34" charset="-122"/>
+                <a:cs typeface="Inter" pitchFamily="34" charset="-120"/>
+              </a:rPr>
+              <a:t>useMoveTask в TanStack Query: onMutate сразу обновляет cache, onError откатывает к сохранённому prev, onSettled инвалидирует ключ tasksKey(boardId).</a:t>
+            </a:r>
+            <a:endParaRPr lang="en-US" sz="1300" dirty="0"/>
           </a:p>
         </p:txBody>
       </p:sp>
@@ -17088,82 +12665,98 @@
         </p:nvSpPr>
         <p:spPr>
           <a:xfrm>
-            <a:off x="548640" y="3246120"/>
-            <a:ext cx="11064240" cy="0"/>
-          </a:xfrm>
-          <a:prstGeom prst="line">
-            <a:avLst/>
-          </a:prstGeom>
-          <a:noFill/>
-          <a:ln w="9525">
+            <a:off x="6217920" y="2423160"/>
+            <a:ext cx="5394960" cy="3383280"/>
+          </a:xfrm>
+          <a:prstGeom prst="roundRect">
+            <a:avLst>
+              <a:gd name="adj" fmla="val 2162"/>
+            </a:avLst>
+          </a:prstGeom>
+          <a:solidFill>
+            <a:srgbClr val="0A0A0A"/>
+          </a:solidFill>
+          <a:ln w="12700">
             <a:solidFill>
               <a:srgbClr val="0A0A0A"/>
             </a:solidFill>
             <a:prstDash val="solid"/>
           </a:ln>
         </p:spPr>
-      </p:sp>
-      <p:sp>
-        <p:nvSpPr>
-          <p:cNvPr id="14" name="Shape 12"/>
-          <p:cNvSpPr/>
-          <p:nvPr/>
-        </p:nvSpPr>
-        <p:spPr>
-          <a:xfrm>
-            <a:off x="548640" y="3337560"/>
-            <a:ext cx="11064240" cy="310896"/>
-          </a:xfrm>
-          <a:prstGeom prst="rect">
-            <a:avLst/>
-          </a:prstGeom>
-          <a:solidFill>
-            <a:srgbClr val="EFEDE6"/>
-          </a:solidFill>
-          <a:ln w="12700">
+        <p:txBody>
+          <a:bodyPr/>
+          <a:lstStyle/>
+          <a:p>
+            <a:endParaRPr lang="ru-RU"/>
+          </a:p>
+        </p:txBody>
+      </p:sp>
+      <p:sp>
+        <p:nvSpPr>
+          <p:cNvPr id="14" name="Text 12"/>
+          <p:cNvSpPr/>
+          <p:nvPr/>
+        </p:nvSpPr>
+        <p:spPr>
+          <a:xfrm>
+            <a:off x="6492240" y="2606040"/>
+            <a:ext cx="4846320" cy="274320"/>
+          </a:xfrm>
+          <a:prstGeom prst="rect">
+            <a:avLst/>
+          </a:prstGeom>
+          <a:noFill/>
+          <a:ln/>
+        </p:spPr>
+        <p:txBody>
+          <a:bodyPr wrap="square" lIns="0" tIns="0" rIns="0" bIns="0" rtlCol="0" anchor="ctr"/>
+          <a:lstStyle/>
+          <a:p>
+            <a:pPr marL="0" indent="0">
+              <a:buNone/>
+            </a:pPr>
+            <a:r>
+              <a:rPr lang="en-US" sz="1000" dirty="0">
+                <a:solidFill>
+                  <a:srgbClr val="8A8580"/>
+                </a:solidFill>
+                <a:latin typeface="Consolas" pitchFamily="34" charset="0"/>
+                <a:ea typeface="Consolas" pitchFamily="34" charset="-122"/>
+                <a:cs typeface="Consolas" pitchFamily="34" charset="-120"/>
+              </a:rPr>
+              <a:t>useMoveTask.js</a:t>
+            </a:r>
+            <a:endParaRPr lang="en-US" sz="1000" dirty="0"/>
+          </a:p>
+        </p:txBody>
+      </p:sp>
+      <p:sp>
+        <p:nvSpPr>
+          <p:cNvPr id="15" name="Shape 13"/>
+          <p:cNvSpPr/>
+          <p:nvPr/>
+        </p:nvSpPr>
+        <p:spPr>
+          <a:xfrm>
+            <a:off x="6492240" y="2926080"/>
+            <a:ext cx="1828800" cy="0"/>
+          </a:xfrm>
+          <a:prstGeom prst="line">
+            <a:avLst/>
+          </a:prstGeom>
+          <a:noFill/>
+          <a:ln w="6350">
             <a:solidFill>
-              <a:srgbClr val="EFEDE6"/>
+              <a:srgbClr val="3D3D3D"/>
             </a:solidFill>
             <a:prstDash val="solid"/>
           </a:ln>
         </p:spPr>
-      </p:sp>
-      <p:sp>
-        <p:nvSpPr>
-          <p:cNvPr id="15" name="Text 13"/>
-          <p:cNvSpPr/>
-          <p:nvPr/>
-        </p:nvSpPr>
-        <p:spPr>
-          <a:xfrm>
-            <a:off x="548640" y="3374136"/>
-            <a:ext cx="914400" cy="237744"/>
-          </a:xfrm>
-          <a:prstGeom prst="rect">
-            <a:avLst/>
-          </a:prstGeom>
-          <a:noFill/>
-          <a:ln/>
-        </p:spPr>
-        <p:txBody>
-          <a:bodyPr wrap="square" lIns="0" tIns="0" rIns="0" bIns="0" rtlCol="0" anchor="ctr"/>
-          <a:lstStyle/>
-          <a:p>
-            <a:pPr marL="0" indent="0">
-              <a:buNone/>
-            </a:pPr>
-            <a:r>
-              <a:rPr lang="en-US" sz="900" b="1" kern="0" spc="200" dirty="0">
-                <a:solidFill>
-                  <a:srgbClr val="C97B5B"/>
-                </a:solidFill>
-                <a:latin typeface="Inter" pitchFamily="34" charset="0"/>
-                <a:ea typeface="Inter" pitchFamily="34" charset="-122"/>
-                <a:cs typeface="Inter" pitchFamily="34" charset="-120"/>
-              </a:rPr>
-              <a:t>POST</a:t>
-            </a:r>
-            <a:endParaRPr lang="en-US" sz="900" dirty="0"/>
+        <p:txBody>
+          <a:bodyPr/>
+          <a:lstStyle/>
+          <a:p>
+            <a:endParaRPr lang="ru-RU"/>
           </a:p>
         </p:txBody>
       </p:sp>
@@ -17175,1181 +12768,297 @@
         </p:nvSpPr>
         <p:spPr>
           <a:xfrm>
-            <a:off x="1554480" y="3337560"/>
-            <a:ext cx="5029200" cy="310896"/>
-          </a:xfrm>
-          <a:prstGeom prst="rect">
-            <a:avLst/>
-          </a:prstGeom>
-          <a:noFill/>
-          <a:ln/>
-        </p:spPr>
-        <p:txBody>
-          <a:bodyPr wrap="square" lIns="0" tIns="0" rIns="0" bIns="0" rtlCol="0" anchor="ctr"/>
-          <a:lstStyle/>
-          <a:p>
-            <a:pPr marL="0" indent="0">
+            <a:off x="6492240" y="3063240"/>
+            <a:ext cx="4846320" cy="2606040"/>
+          </a:xfrm>
+          <a:prstGeom prst="rect">
+            <a:avLst/>
+          </a:prstGeom>
+          <a:noFill/>
+          <a:ln/>
+        </p:spPr>
+        <p:txBody>
+          <a:bodyPr wrap="square" lIns="0" tIns="0" rIns="0" bIns="0" rtlCol="0" anchor="ctr"/>
+          <a:lstStyle/>
+          <a:p>
+            <a:pPr marL="0" indent="0">
+              <a:lnSpc>
+                <a:spcPct val="130000"/>
+              </a:lnSpc>
               <a:buNone/>
             </a:pPr>
             <a:r>
               <a:rPr lang="en-US" sz="1000" dirty="0">
                 <a:solidFill>
-                  <a:srgbClr val="0A0A0A"/>
+                  <a:srgbClr val="ECEAE4"/>
                 </a:solidFill>
                 <a:latin typeface="Consolas" pitchFamily="34" charset="0"/>
                 <a:ea typeface="Consolas" pitchFamily="34" charset="-122"/>
                 <a:cs typeface="Consolas" pitchFamily="34" charset="-120"/>
               </a:rPr>
-              <a:t>/auth/login</a:t>
+              <a:t>onMutate: async ({ taskId, toColumn, newPos }) =&gt; {</a:t>
             </a:r>
             <a:endParaRPr lang="en-US" sz="1000" dirty="0"/>
           </a:p>
-        </p:txBody>
-      </p:sp>
-      <p:sp>
-        <p:nvSpPr>
-          <p:cNvPr id="17" name="Text 15"/>
-          <p:cNvSpPr/>
-          <p:nvPr/>
-        </p:nvSpPr>
-        <p:spPr>
-          <a:xfrm>
-            <a:off x="6675120" y="3337560"/>
-            <a:ext cx="4937760" cy="310896"/>
-          </a:xfrm>
-          <a:prstGeom prst="rect">
-            <a:avLst/>
-          </a:prstGeom>
-          <a:noFill/>
-          <a:ln/>
-        </p:spPr>
-        <p:txBody>
-          <a:bodyPr wrap="square" lIns="0" tIns="0" rIns="0" bIns="0" rtlCol="0" anchor="ctr"/>
-          <a:lstStyle/>
-          <a:p>
-            <a:pPr marL="0" indent="0">
+          <a:p>
+            <a:pPr marL="0" indent="0">
+              <a:lnSpc>
+                <a:spcPct val="130000"/>
+              </a:lnSpc>
               <a:buNone/>
             </a:pPr>
             <a:r>
               <a:rPr lang="en-US" sz="1000" dirty="0">
                 <a:solidFill>
-                  <a:srgbClr val="8A8580"/>
-                </a:solidFill>
-                <a:latin typeface="Inter" pitchFamily="34" charset="0"/>
-                <a:ea typeface="Inter" pitchFamily="34" charset="-122"/>
-                <a:cs typeface="Inter" pitchFamily="34" charset="-120"/>
-              </a:rPr>
-              <a:t>Логин, выдача JWT в HttpOnly cookies</a:t>
-            </a:r>
-            <a:endParaRPr lang="en-US" sz="1000" dirty="0"/>
-          </a:p>
-        </p:txBody>
-      </p:sp>
-      <p:sp>
-        <p:nvSpPr>
-          <p:cNvPr id="18" name="Text 16"/>
-          <p:cNvSpPr/>
-          <p:nvPr/>
-        </p:nvSpPr>
-        <p:spPr>
-          <a:xfrm>
-            <a:off x="548640" y="3685032"/>
-            <a:ext cx="914400" cy="237744"/>
-          </a:xfrm>
-          <a:prstGeom prst="rect">
-            <a:avLst/>
-          </a:prstGeom>
-          <a:noFill/>
-          <a:ln/>
-        </p:spPr>
-        <p:txBody>
-          <a:bodyPr wrap="square" lIns="0" tIns="0" rIns="0" bIns="0" rtlCol="0" anchor="ctr"/>
-          <a:lstStyle/>
-          <a:p>
-            <a:pPr marL="0" indent="0">
-              <a:buNone/>
-            </a:pPr>
-            <a:r>
-              <a:rPr lang="en-US" sz="900" b="1" kern="0" spc="200" dirty="0">
-                <a:solidFill>
-                  <a:srgbClr val="C97B5B"/>
-                </a:solidFill>
-                <a:latin typeface="Inter" pitchFamily="34" charset="0"/>
-                <a:ea typeface="Inter" pitchFamily="34" charset="-122"/>
-                <a:cs typeface="Inter" pitchFamily="34" charset="-120"/>
-              </a:rPr>
-              <a:t>POST</a:t>
-            </a:r>
-            <a:endParaRPr lang="en-US" sz="900" dirty="0"/>
-          </a:p>
-        </p:txBody>
-      </p:sp>
-      <p:sp>
-        <p:nvSpPr>
-          <p:cNvPr id="19" name="Text 17"/>
-          <p:cNvSpPr/>
-          <p:nvPr/>
-        </p:nvSpPr>
-        <p:spPr>
-          <a:xfrm>
-            <a:off x="1554480" y="3648456"/>
-            <a:ext cx="5029200" cy="310896"/>
-          </a:xfrm>
-          <a:prstGeom prst="rect">
-            <a:avLst/>
-          </a:prstGeom>
-          <a:noFill/>
-          <a:ln/>
-        </p:spPr>
-        <p:txBody>
-          <a:bodyPr wrap="square" lIns="0" tIns="0" rIns="0" bIns="0" rtlCol="0" anchor="ctr"/>
-          <a:lstStyle/>
-          <a:p>
-            <a:pPr marL="0" indent="0">
-              <a:buNone/>
-            </a:pPr>
-            <a:r>
-              <a:rPr lang="en-US" sz="1000" dirty="0">
-                <a:solidFill>
-                  <a:srgbClr val="0A0A0A"/>
+                  <a:srgbClr val="ECEAE4"/>
                 </a:solidFill>
                 <a:latin typeface="Consolas" pitchFamily="34" charset="0"/>
                 <a:ea typeface="Consolas" pitchFamily="34" charset="-122"/>
                 <a:cs typeface="Consolas" pitchFamily="34" charset="-120"/>
               </a:rPr>
-              <a:t>/auth/refresh</a:t>
+              <a:t>  await qc.cancelQueries(tasksKey(boardId));</a:t>
             </a:r>
             <a:endParaRPr lang="en-US" sz="1000" dirty="0"/>
           </a:p>
-        </p:txBody>
-      </p:sp>
-      <p:sp>
-        <p:nvSpPr>
-          <p:cNvPr id="20" name="Text 18"/>
-          <p:cNvSpPr/>
-          <p:nvPr/>
-        </p:nvSpPr>
-        <p:spPr>
-          <a:xfrm>
-            <a:off x="6675120" y="3648456"/>
-            <a:ext cx="4937760" cy="310896"/>
-          </a:xfrm>
-          <a:prstGeom prst="rect">
-            <a:avLst/>
-          </a:prstGeom>
-          <a:noFill/>
-          <a:ln/>
-        </p:spPr>
-        <p:txBody>
-          <a:bodyPr wrap="square" lIns="0" tIns="0" rIns="0" bIns="0" rtlCol="0" anchor="ctr"/>
-          <a:lstStyle/>
-          <a:p>
-            <a:pPr marL="0" indent="0">
+          <a:p>
+            <a:pPr marL="0" indent="0">
+              <a:lnSpc>
+                <a:spcPct val="130000"/>
+              </a:lnSpc>
               <a:buNone/>
             </a:pPr>
             <a:r>
               <a:rPr lang="en-US" sz="1000" dirty="0">
                 <a:solidFill>
-                  <a:srgbClr val="8A8580"/>
-                </a:solidFill>
-                <a:latin typeface="Inter" pitchFamily="34" charset="0"/>
-                <a:ea typeface="Inter" pitchFamily="34" charset="-122"/>
-                <a:cs typeface="Inter" pitchFamily="34" charset="-120"/>
-              </a:rPr>
-              <a:t>Обновление access-токена</a:t>
-            </a:r>
-            <a:endParaRPr lang="en-US" sz="1000" dirty="0"/>
-          </a:p>
-        </p:txBody>
-      </p:sp>
-      <p:sp>
-        <p:nvSpPr>
-          <p:cNvPr id="21" name="Shape 19"/>
-          <p:cNvSpPr/>
-          <p:nvPr/>
-        </p:nvSpPr>
-        <p:spPr>
-          <a:xfrm>
-            <a:off x="548640" y="3959352"/>
-            <a:ext cx="11064240" cy="310896"/>
-          </a:xfrm>
-          <a:prstGeom prst="rect">
-            <a:avLst/>
-          </a:prstGeom>
-          <a:solidFill>
-            <a:srgbClr val="EFEDE6"/>
-          </a:solidFill>
-          <a:ln w="12700">
-            <a:solidFill>
-              <a:srgbClr val="EFEDE6"/>
-            </a:solidFill>
-            <a:prstDash val="solid"/>
-          </a:ln>
-        </p:spPr>
-      </p:sp>
-      <p:sp>
-        <p:nvSpPr>
-          <p:cNvPr id="22" name="Text 20"/>
-          <p:cNvSpPr/>
-          <p:nvPr/>
-        </p:nvSpPr>
-        <p:spPr>
-          <a:xfrm>
-            <a:off x="548640" y="3995928"/>
-            <a:ext cx="914400" cy="237744"/>
-          </a:xfrm>
-          <a:prstGeom prst="rect">
-            <a:avLst/>
-          </a:prstGeom>
-          <a:noFill/>
-          <a:ln/>
-        </p:spPr>
-        <p:txBody>
-          <a:bodyPr wrap="square" lIns="0" tIns="0" rIns="0" bIns="0" rtlCol="0" anchor="ctr"/>
-          <a:lstStyle/>
-          <a:p>
-            <a:pPr marL="0" indent="0">
-              <a:buNone/>
-            </a:pPr>
-            <a:r>
-              <a:rPr lang="en-US" sz="900" b="1" kern="0" spc="200" dirty="0">
-                <a:solidFill>
-                  <a:srgbClr val="5B8DEF"/>
-                </a:solidFill>
-                <a:latin typeface="Inter" pitchFamily="34" charset="0"/>
-                <a:ea typeface="Inter" pitchFamily="34" charset="-122"/>
-                <a:cs typeface="Inter" pitchFamily="34" charset="-120"/>
-              </a:rPr>
-              <a:t>GET</a:t>
-            </a:r>
-            <a:endParaRPr lang="en-US" sz="900" dirty="0"/>
-          </a:p>
-        </p:txBody>
-      </p:sp>
-      <p:sp>
-        <p:nvSpPr>
-          <p:cNvPr id="23" name="Text 21"/>
-          <p:cNvSpPr/>
-          <p:nvPr/>
-        </p:nvSpPr>
-        <p:spPr>
-          <a:xfrm>
-            <a:off x="1554480" y="3959352"/>
-            <a:ext cx="5029200" cy="310896"/>
-          </a:xfrm>
-          <a:prstGeom prst="rect">
-            <a:avLst/>
-          </a:prstGeom>
-          <a:noFill/>
-          <a:ln/>
-        </p:spPr>
-        <p:txBody>
-          <a:bodyPr wrap="square" lIns="0" tIns="0" rIns="0" bIns="0" rtlCol="0" anchor="ctr"/>
-          <a:lstStyle/>
-          <a:p>
-            <a:pPr marL="0" indent="0">
-              <a:buNone/>
-            </a:pPr>
-            <a:r>
-              <a:rPr lang="en-US" sz="1000" dirty="0">
-                <a:solidFill>
-                  <a:srgbClr val="0A0A0A"/>
+                  <a:srgbClr val="ECEAE4"/>
                 </a:solidFill>
                 <a:latin typeface="Consolas" pitchFamily="34" charset="0"/>
                 <a:ea typeface="Consolas" pitchFamily="34" charset="-122"/>
                 <a:cs typeface="Consolas" pitchFamily="34" charset="-120"/>
               </a:rPr>
-              <a:t>/boards/</a:t>
+              <a:t>  const prev = qc.getQueryData(tasksKey(boardId));</a:t>
             </a:r>
             <a:endParaRPr lang="en-US" sz="1000" dirty="0"/>
           </a:p>
-        </p:txBody>
-      </p:sp>
-      <p:sp>
-        <p:nvSpPr>
-          <p:cNvPr id="24" name="Text 22"/>
-          <p:cNvSpPr/>
-          <p:nvPr/>
-        </p:nvSpPr>
-        <p:spPr>
-          <a:xfrm>
-            <a:off x="6675120" y="3959352"/>
-            <a:ext cx="4937760" cy="310896"/>
-          </a:xfrm>
-          <a:prstGeom prst="rect">
-            <a:avLst/>
-          </a:prstGeom>
-          <a:noFill/>
-          <a:ln/>
-        </p:spPr>
-        <p:txBody>
-          <a:bodyPr wrap="square" lIns="0" tIns="0" rIns="0" bIns="0" rtlCol="0" anchor="ctr"/>
-          <a:lstStyle/>
-          <a:p>
-            <a:pPr marL="0" indent="0">
+          <a:p>
+            <a:pPr marL="0" indent="0">
+              <a:lnSpc>
+                <a:spcPct val="130000"/>
+              </a:lnSpc>
               <a:buNone/>
             </a:pPr>
             <a:r>
               <a:rPr lang="en-US" sz="1000" dirty="0">
                 <a:solidFill>
-                  <a:srgbClr val="8A8580"/>
-                </a:solidFill>
-                <a:latin typeface="Inter" pitchFamily="34" charset="0"/>
-                <a:ea typeface="Inter" pitchFamily="34" charset="-122"/>
-                <a:cs typeface="Inter" pitchFamily="34" charset="-120"/>
-              </a:rPr>
-              <a:t>Список моих досок</a:t>
-            </a:r>
-            <a:endParaRPr lang="en-US" sz="1000" dirty="0"/>
-          </a:p>
-        </p:txBody>
-      </p:sp>
-      <p:sp>
-        <p:nvSpPr>
-          <p:cNvPr id="25" name="Text 23"/>
-          <p:cNvSpPr/>
-          <p:nvPr/>
-        </p:nvSpPr>
-        <p:spPr>
-          <a:xfrm>
-            <a:off x="548640" y="4306824"/>
-            <a:ext cx="914400" cy="237744"/>
-          </a:xfrm>
-          <a:prstGeom prst="rect">
-            <a:avLst/>
-          </a:prstGeom>
-          <a:noFill/>
-          <a:ln/>
-        </p:spPr>
-        <p:txBody>
-          <a:bodyPr wrap="square" lIns="0" tIns="0" rIns="0" bIns="0" rtlCol="0" anchor="ctr"/>
-          <a:lstStyle/>
-          <a:p>
-            <a:pPr marL="0" indent="0">
-              <a:buNone/>
-            </a:pPr>
-            <a:r>
-              <a:rPr lang="en-US" sz="900" b="1" kern="0" spc="200" dirty="0">
-                <a:solidFill>
-                  <a:srgbClr val="C97B5B"/>
-                </a:solidFill>
-                <a:latin typeface="Inter" pitchFamily="34" charset="0"/>
-                <a:ea typeface="Inter" pitchFamily="34" charset="-122"/>
-                <a:cs typeface="Inter" pitchFamily="34" charset="-120"/>
-              </a:rPr>
-              <a:t>POST</a:t>
-            </a:r>
-            <a:endParaRPr lang="en-US" sz="900" dirty="0"/>
-          </a:p>
-        </p:txBody>
-      </p:sp>
-      <p:sp>
-        <p:nvSpPr>
-          <p:cNvPr id="26" name="Text 24"/>
-          <p:cNvSpPr/>
-          <p:nvPr/>
-        </p:nvSpPr>
-        <p:spPr>
-          <a:xfrm>
-            <a:off x="1554480" y="4270248"/>
-            <a:ext cx="5029200" cy="310896"/>
-          </a:xfrm>
-          <a:prstGeom prst="rect">
-            <a:avLst/>
-          </a:prstGeom>
-          <a:noFill/>
-          <a:ln/>
-        </p:spPr>
-        <p:txBody>
-          <a:bodyPr wrap="square" lIns="0" tIns="0" rIns="0" bIns="0" rtlCol="0" anchor="ctr"/>
-          <a:lstStyle/>
-          <a:p>
-            <a:pPr marL="0" indent="0">
-              <a:buNone/>
-            </a:pPr>
-            <a:r>
-              <a:rPr lang="en-US" sz="1000" dirty="0">
-                <a:solidFill>
-                  <a:srgbClr val="0A0A0A"/>
+                  <a:srgbClr val="ECEAE4"/>
                 </a:solidFill>
                 <a:latin typeface="Consolas" pitchFamily="34" charset="0"/>
                 <a:ea typeface="Consolas" pitchFamily="34" charset="-122"/>
                 <a:cs typeface="Consolas" pitchFamily="34" charset="-120"/>
               </a:rPr>
-              <a:t>/boards/{id}/columns</a:t>
+              <a:t>  qc.setQueryData(tasksKey(boardId), (old) =&gt;</a:t>
             </a:r>
             <a:endParaRPr lang="en-US" sz="1000" dirty="0"/>
           </a:p>
-        </p:txBody>
-      </p:sp>
-      <p:sp>
-        <p:nvSpPr>
-          <p:cNvPr id="27" name="Text 25"/>
-          <p:cNvSpPr/>
-          <p:nvPr/>
-        </p:nvSpPr>
-        <p:spPr>
-          <a:xfrm>
-            <a:off x="6675120" y="4270248"/>
-            <a:ext cx="4937760" cy="310896"/>
-          </a:xfrm>
-          <a:prstGeom prst="rect">
-            <a:avLst/>
-          </a:prstGeom>
-          <a:noFill/>
-          <a:ln/>
-        </p:spPr>
-        <p:txBody>
-          <a:bodyPr wrap="square" lIns="0" tIns="0" rIns="0" bIns="0" rtlCol="0" anchor="ctr"/>
-          <a:lstStyle/>
-          <a:p>
-            <a:pPr marL="0" indent="0">
+          <a:p>
+            <a:pPr marL="0" indent="0">
+              <a:lnSpc>
+                <a:spcPct val="130000"/>
+              </a:lnSpc>
               <a:buNone/>
             </a:pPr>
             <a:r>
               <a:rPr lang="en-US" sz="1000" dirty="0">
                 <a:solidFill>
-                  <a:srgbClr val="8A8580"/>
-                </a:solidFill>
-                <a:latin typeface="Inter" pitchFamily="34" charset="0"/>
-                <a:ea typeface="Inter" pitchFamily="34" charset="-122"/>
-                <a:cs typeface="Inter" pitchFamily="34" charset="-120"/>
-              </a:rPr>
-              <a:t>Создание новой колонки</a:t>
-            </a:r>
-            <a:endParaRPr lang="en-US" sz="1000" dirty="0"/>
-          </a:p>
-        </p:txBody>
-      </p:sp>
-      <p:sp>
-        <p:nvSpPr>
-          <p:cNvPr id="28" name="Shape 26"/>
-          <p:cNvSpPr/>
-          <p:nvPr/>
-        </p:nvSpPr>
-        <p:spPr>
-          <a:xfrm>
-            <a:off x="548640" y="4581144"/>
-            <a:ext cx="11064240" cy="310896"/>
-          </a:xfrm>
-          <a:prstGeom prst="rect">
-            <a:avLst/>
-          </a:prstGeom>
-          <a:solidFill>
-            <a:srgbClr val="EFEDE6"/>
-          </a:solidFill>
-          <a:ln w="12700">
-            <a:solidFill>
-              <a:srgbClr val="EFEDE6"/>
-            </a:solidFill>
-            <a:prstDash val="solid"/>
-          </a:ln>
-        </p:spPr>
-      </p:sp>
-      <p:sp>
-        <p:nvSpPr>
-          <p:cNvPr id="29" name="Text 27"/>
-          <p:cNvSpPr/>
-          <p:nvPr/>
-        </p:nvSpPr>
-        <p:spPr>
-          <a:xfrm>
-            <a:off x="548640" y="4617720"/>
-            <a:ext cx="914400" cy="237744"/>
-          </a:xfrm>
-          <a:prstGeom prst="rect">
-            <a:avLst/>
-          </a:prstGeom>
-          <a:noFill/>
-          <a:ln/>
-        </p:spPr>
-        <p:txBody>
-          <a:bodyPr wrap="square" lIns="0" tIns="0" rIns="0" bIns="0" rtlCol="0" anchor="ctr"/>
-          <a:lstStyle/>
-          <a:p>
-            <a:pPr marL="0" indent="0">
-              <a:buNone/>
-            </a:pPr>
-            <a:r>
-              <a:rPr lang="en-US" sz="900" b="1" kern="0" spc="200" dirty="0">
-                <a:solidFill>
-                  <a:srgbClr val="A88D52"/>
-                </a:solidFill>
-                <a:latin typeface="Inter" pitchFamily="34" charset="0"/>
-                <a:ea typeface="Inter" pitchFamily="34" charset="-122"/>
-                <a:cs typeface="Inter" pitchFamily="34" charset="-120"/>
-              </a:rPr>
-              <a:t>PUT</a:t>
-            </a:r>
-            <a:endParaRPr lang="en-US" sz="900" dirty="0"/>
-          </a:p>
-        </p:txBody>
-      </p:sp>
-      <p:sp>
-        <p:nvSpPr>
-          <p:cNvPr id="30" name="Text 28"/>
-          <p:cNvSpPr/>
-          <p:nvPr/>
-        </p:nvSpPr>
-        <p:spPr>
-          <a:xfrm>
-            <a:off x="1554480" y="4581144"/>
-            <a:ext cx="5029200" cy="310896"/>
-          </a:xfrm>
-          <a:prstGeom prst="rect">
-            <a:avLst/>
-          </a:prstGeom>
-          <a:noFill/>
-          <a:ln/>
-        </p:spPr>
-        <p:txBody>
-          <a:bodyPr wrap="square" lIns="0" tIns="0" rIns="0" bIns="0" rtlCol="0" anchor="ctr"/>
-          <a:lstStyle/>
-          <a:p>
-            <a:pPr marL="0" indent="0">
-              <a:buNone/>
-            </a:pPr>
-            <a:r>
-              <a:rPr lang="en-US" sz="1000" dirty="0">
-                <a:solidFill>
-                  <a:srgbClr val="0A0A0A"/>
+                  <a:srgbClr val="ECEAE4"/>
                 </a:solidFill>
                 <a:latin typeface="Consolas" pitchFamily="34" charset="0"/>
                 <a:ea typeface="Consolas" pitchFamily="34" charset="-122"/>
                 <a:cs typeface="Consolas" pitchFamily="34" charset="-120"/>
               </a:rPr>
-              <a:t>/boards/{id}/columns/{cid}/move</a:t>
+              <a:t>    reorderOptimistic(old, taskId, toColumn, newPos)</a:t>
             </a:r>
             <a:endParaRPr lang="en-US" sz="1000" dirty="0"/>
           </a:p>
-        </p:txBody>
-      </p:sp>
-      <p:sp>
-        <p:nvSpPr>
-          <p:cNvPr id="31" name="Text 29"/>
-          <p:cNvSpPr/>
-          <p:nvPr/>
-        </p:nvSpPr>
-        <p:spPr>
-          <a:xfrm>
-            <a:off x="6675120" y="4581144"/>
-            <a:ext cx="4937760" cy="310896"/>
-          </a:xfrm>
-          <a:prstGeom prst="rect">
-            <a:avLst/>
-          </a:prstGeom>
-          <a:noFill/>
-          <a:ln/>
-        </p:spPr>
-        <p:txBody>
-          <a:bodyPr wrap="square" lIns="0" tIns="0" rIns="0" bIns="0" rtlCol="0" anchor="ctr"/>
-          <a:lstStyle/>
-          <a:p>
-            <a:pPr marL="0" indent="0">
+          <a:p>
+            <a:pPr marL="0" indent="0">
+              <a:lnSpc>
+                <a:spcPct val="130000"/>
+              </a:lnSpc>
               <a:buNone/>
             </a:pPr>
             <a:r>
               <a:rPr lang="en-US" sz="1000" dirty="0">
                 <a:solidFill>
-                  <a:srgbClr val="8A8580"/>
-                </a:solidFill>
-                <a:latin typeface="Inter" pitchFamily="34" charset="0"/>
-                <a:ea typeface="Inter" pitchFamily="34" charset="-122"/>
-                <a:cs typeface="Inter" pitchFamily="34" charset="-120"/>
-              </a:rPr>
-              <a:t>Перемещение колонки (drag-and-drop)</a:t>
-            </a:r>
-            <a:endParaRPr lang="en-US" sz="1000" dirty="0"/>
-          </a:p>
-        </p:txBody>
-      </p:sp>
-      <p:sp>
-        <p:nvSpPr>
-          <p:cNvPr id="32" name="Text 30"/>
-          <p:cNvSpPr/>
-          <p:nvPr/>
-        </p:nvSpPr>
-        <p:spPr>
-          <a:xfrm>
-            <a:off x="548640" y="4928616"/>
-            <a:ext cx="914400" cy="237744"/>
-          </a:xfrm>
-          <a:prstGeom prst="rect">
-            <a:avLst/>
-          </a:prstGeom>
-          <a:noFill/>
-          <a:ln/>
-        </p:spPr>
-        <p:txBody>
-          <a:bodyPr wrap="square" lIns="0" tIns="0" rIns="0" bIns="0" rtlCol="0" anchor="ctr"/>
-          <a:lstStyle/>
-          <a:p>
-            <a:pPr marL="0" indent="0">
-              <a:buNone/>
-            </a:pPr>
-            <a:r>
-              <a:rPr lang="en-US" sz="900" b="1" kern="0" spc="200" dirty="0">
-                <a:solidFill>
-                  <a:srgbClr val="C97B5B"/>
-                </a:solidFill>
-                <a:latin typeface="Inter" pitchFamily="34" charset="0"/>
-                <a:ea typeface="Inter" pitchFamily="34" charset="-122"/>
-                <a:cs typeface="Inter" pitchFamily="34" charset="-120"/>
-              </a:rPr>
-              <a:t>POST</a:t>
-            </a:r>
-            <a:endParaRPr lang="en-US" sz="900" dirty="0"/>
-          </a:p>
-        </p:txBody>
-      </p:sp>
-      <p:sp>
-        <p:nvSpPr>
-          <p:cNvPr id="33" name="Text 31"/>
-          <p:cNvSpPr/>
-          <p:nvPr/>
-        </p:nvSpPr>
-        <p:spPr>
-          <a:xfrm>
-            <a:off x="1554480" y="4892040"/>
-            <a:ext cx="5029200" cy="310896"/>
-          </a:xfrm>
-          <a:prstGeom prst="rect">
-            <a:avLst/>
-          </a:prstGeom>
-          <a:noFill/>
-          <a:ln/>
-        </p:spPr>
-        <p:txBody>
-          <a:bodyPr wrap="square" lIns="0" tIns="0" rIns="0" bIns="0" rtlCol="0" anchor="ctr"/>
-          <a:lstStyle/>
-          <a:p>
-            <a:pPr marL="0" indent="0">
-              <a:buNone/>
-            </a:pPr>
-            <a:r>
-              <a:rPr lang="en-US" sz="1000" dirty="0">
-                <a:solidFill>
-                  <a:srgbClr val="0A0A0A"/>
+                  <a:srgbClr val="ECEAE4"/>
                 </a:solidFill>
                 <a:latin typeface="Consolas" pitchFamily="34" charset="0"/>
                 <a:ea typeface="Consolas" pitchFamily="34" charset="-122"/>
                 <a:cs typeface="Consolas" pitchFamily="34" charset="-120"/>
               </a:rPr>
-              <a:t>/boards/{id}/tasks</a:t>
+              <a:t>  );</a:t>
             </a:r>
             <a:endParaRPr lang="en-US" sz="1000" dirty="0"/>
           </a:p>
-        </p:txBody>
-      </p:sp>
-      <p:sp>
-        <p:nvSpPr>
-          <p:cNvPr id="34" name="Text 32"/>
-          <p:cNvSpPr/>
-          <p:nvPr/>
-        </p:nvSpPr>
-        <p:spPr>
-          <a:xfrm>
-            <a:off x="6675120" y="4892040"/>
-            <a:ext cx="4937760" cy="310896"/>
-          </a:xfrm>
-          <a:prstGeom prst="rect">
-            <a:avLst/>
-          </a:prstGeom>
-          <a:noFill/>
-          <a:ln/>
-        </p:spPr>
-        <p:txBody>
-          <a:bodyPr wrap="square" lIns="0" tIns="0" rIns="0" bIns="0" rtlCol="0" anchor="ctr"/>
-          <a:lstStyle/>
-          <a:p>
-            <a:pPr marL="0" indent="0">
+          <a:p>
+            <a:pPr marL="0" indent="0">
+              <a:lnSpc>
+                <a:spcPct val="130000"/>
+              </a:lnSpc>
               <a:buNone/>
             </a:pPr>
             <a:r>
               <a:rPr lang="en-US" sz="1000" dirty="0">
                 <a:solidFill>
-                  <a:srgbClr val="8A8580"/>
-                </a:solidFill>
-                <a:latin typeface="Inter" pitchFamily="34" charset="0"/>
-                <a:ea typeface="Inter" pitchFamily="34" charset="-122"/>
-                <a:cs typeface="Inter" pitchFamily="34" charset="-120"/>
-              </a:rPr>
-              <a:t>Создание задачи в колонке</a:t>
-            </a:r>
-            <a:endParaRPr lang="en-US" sz="1000" dirty="0"/>
-          </a:p>
-        </p:txBody>
-      </p:sp>
-      <p:sp>
-        <p:nvSpPr>
-          <p:cNvPr id="35" name="Shape 33"/>
-          <p:cNvSpPr/>
-          <p:nvPr/>
-        </p:nvSpPr>
-        <p:spPr>
-          <a:xfrm>
-            <a:off x="548640" y="5202936"/>
-            <a:ext cx="11064240" cy="310896"/>
-          </a:xfrm>
-          <a:prstGeom prst="rect">
-            <a:avLst/>
-          </a:prstGeom>
-          <a:solidFill>
-            <a:srgbClr val="EFEDE6"/>
-          </a:solidFill>
-          <a:ln w="12700">
-            <a:solidFill>
-              <a:srgbClr val="EFEDE6"/>
-            </a:solidFill>
-            <a:prstDash val="solid"/>
-          </a:ln>
-        </p:spPr>
-      </p:sp>
-      <p:sp>
-        <p:nvSpPr>
-          <p:cNvPr id="36" name="Text 34"/>
-          <p:cNvSpPr/>
-          <p:nvPr/>
-        </p:nvSpPr>
-        <p:spPr>
-          <a:xfrm>
-            <a:off x="548640" y="5239512"/>
-            <a:ext cx="914400" cy="237744"/>
-          </a:xfrm>
-          <a:prstGeom prst="rect">
-            <a:avLst/>
-          </a:prstGeom>
-          <a:noFill/>
-          <a:ln/>
-        </p:spPr>
-        <p:txBody>
-          <a:bodyPr wrap="square" lIns="0" tIns="0" rIns="0" bIns="0" rtlCol="0" anchor="ctr"/>
-          <a:lstStyle/>
-          <a:p>
-            <a:pPr marL="0" indent="0">
-              <a:buNone/>
-            </a:pPr>
-            <a:r>
-              <a:rPr lang="en-US" sz="900" b="1" kern="0" spc="200" dirty="0">
-                <a:solidFill>
-                  <a:srgbClr val="A88D52"/>
-                </a:solidFill>
-                <a:latin typeface="Inter" pitchFamily="34" charset="0"/>
-                <a:ea typeface="Inter" pitchFamily="34" charset="-122"/>
-                <a:cs typeface="Inter" pitchFamily="34" charset="-120"/>
-              </a:rPr>
-              <a:t>PUT</a:t>
-            </a:r>
-            <a:endParaRPr lang="en-US" sz="900" dirty="0"/>
-          </a:p>
-        </p:txBody>
-      </p:sp>
-      <p:sp>
-        <p:nvSpPr>
-          <p:cNvPr id="37" name="Text 35"/>
-          <p:cNvSpPr/>
-          <p:nvPr/>
-        </p:nvSpPr>
-        <p:spPr>
-          <a:xfrm>
-            <a:off x="1554480" y="5202936"/>
-            <a:ext cx="5029200" cy="310896"/>
-          </a:xfrm>
-          <a:prstGeom prst="rect">
-            <a:avLst/>
-          </a:prstGeom>
-          <a:noFill/>
-          <a:ln/>
-        </p:spPr>
-        <p:txBody>
-          <a:bodyPr wrap="square" lIns="0" tIns="0" rIns="0" bIns="0" rtlCol="0" anchor="ctr"/>
-          <a:lstStyle/>
-          <a:p>
-            <a:pPr marL="0" indent="0">
-              <a:buNone/>
-            </a:pPr>
-            <a:r>
-              <a:rPr lang="en-US" sz="1000" dirty="0">
-                <a:solidFill>
-                  <a:srgbClr val="0A0A0A"/>
+                  <a:srgbClr val="ECEAE4"/>
                 </a:solidFill>
                 <a:latin typeface="Consolas" pitchFamily="34" charset="0"/>
                 <a:ea typeface="Consolas" pitchFamily="34" charset="-122"/>
                 <a:cs typeface="Consolas" pitchFamily="34" charset="-120"/>
               </a:rPr>
-              <a:t>/boards/{id}/tasks/{tid}</a:t>
+              <a:t>  return { prev };</a:t>
             </a:r>
             <a:endParaRPr lang="en-US" sz="1000" dirty="0"/>
           </a:p>
-        </p:txBody>
-      </p:sp>
-      <p:sp>
-        <p:nvSpPr>
-          <p:cNvPr id="38" name="Text 36"/>
-          <p:cNvSpPr/>
-          <p:nvPr/>
-        </p:nvSpPr>
-        <p:spPr>
-          <a:xfrm>
-            <a:off x="6675120" y="5202936"/>
-            <a:ext cx="4937760" cy="310896"/>
-          </a:xfrm>
-          <a:prstGeom prst="rect">
-            <a:avLst/>
-          </a:prstGeom>
-          <a:noFill/>
-          <a:ln/>
-        </p:spPr>
-        <p:txBody>
-          <a:bodyPr wrap="square" lIns="0" tIns="0" rIns="0" bIns="0" rtlCol="0" anchor="ctr"/>
-          <a:lstStyle/>
-          <a:p>
-            <a:pPr marL="0" indent="0">
+          <a:p>
+            <a:pPr marL="0" indent="0">
+              <a:lnSpc>
+                <a:spcPct val="130000"/>
+              </a:lnSpc>
               <a:buNone/>
             </a:pPr>
             <a:r>
               <a:rPr lang="en-US" sz="1000" dirty="0">
                 <a:solidFill>
-                  <a:srgbClr val="8A8580"/>
-                </a:solidFill>
-                <a:latin typeface="Inter" pitchFamily="34" charset="0"/>
-                <a:ea typeface="Inter" pitchFamily="34" charset="-122"/>
-                <a:cs typeface="Inter" pitchFamily="34" charset="-120"/>
-              </a:rPr>
-              <a:t>Полное обновление задачи + событие аудита</a:t>
-            </a:r>
-            <a:endParaRPr lang="en-US" sz="1000" dirty="0"/>
-          </a:p>
-        </p:txBody>
-      </p:sp>
-      <p:sp>
-        <p:nvSpPr>
-          <p:cNvPr id="39" name="Text 37"/>
-          <p:cNvSpPr/>
-          <p:nvPr/>
-        </p:nvSpPr>
-        <p:spPr>
-          <a:xfrm>
-            <a:off x="548640" y="5550408"/>
-            <a:ext cx="914400" cy="237744"/>
-          </a:xfrm>
-          <a:prstGeom prst="rect">
-            <a:avLst/>
-          </a:prstGeom>
-          <a:noFill/>
-          <a:ln/>
-        </p:spPr>
-        <p:txBody>
-          <a:bodyPr wrap="square" lIns="0" tIns="0" rIns="0" bIns="0" rtlCol="0" anchor="ctr"/>
-          <a:lstStyle/>
-          <a:p>
-            <a:pPr marL="0" indent="0">
-              <a:buNone/>
-            </a:pPr>
-            <a:r>
-              <a:rPr lang="en-US" sz="900" b="1" kern="0" spc="200" dirty="0">
-                <a:solidFill>
-                  <a:srgbClr val="C97B5B"/>
-                </a:solidFill>
-                <a:latin typeface="Inter" pitchFamily="34" charset="0"/>
-                <a:ea typeface="Inter" pitchFamily="34" charset="-122"/>
-                <a:cs typeface="Inter" pitchFamily="34" charset="-120"/>
-              </a:rPr>
-              <a:t>POST</a:t>
-            </a:r>
-            <a:endParaRPr lang="en-US" sz="900" dirty="0"/>
-          </a:p>
-        </p:txBody>
-      </p:sp>
-      <p:sp>
-        <p:nvSpPr>
-          <p:cNvPr id="40" name="Text 38"/>
-          <p:cNvSpPr/>
-          <p:nvPr/>
-        </p:nvSpPr>
-        <p:spPr>
-          <a:xfrm>
-            <a:off x="1554480" y="5513832"/>
-            <a:ext cx="5029200" cy="310896"/>
-          </a:xfrm>
-          <a:prstGeom prst="rect">
-            <a:avLst/>
-          </a:prstGeom>
-          <a:noFill/>
-          <a:ln/>
-        </p:spPr>
-        <p:txBody>
-          <a:bodyPr wrap="square" lIns="0" tIns="0" rIns="0" bIns="0" rtlCol="0" anchor="ctr"/>
-          <a:lstStyle/>
-          <a:p>
-            <a:pPr marL="0" indent="0">
-              <a:buNone/>
-            </a:pPr>
-            <a:r>
-              <a:rPr lang="en-US" sz="1000" dirty="0">
-                <a:solidFill>
-                  <a:srgbClr val="0A0A0A"/>
+                  <a:srgbClr val="ECEAE4"/>
                 </a:solidFill>
                 <a:latin typeface="Consolas" pitchFamily="34" charset="0"/>
                 <a:ea typeface="Consolas" pitchFamily="34" charset="-122"/>
                 <a:cs typeface="Consolas" pitchFamily="34" charset="-120"/>
               </a:rPr>
-              <a:t>/boards/{id}/tasks/{tid}/attachments</a:t>
+              <a:t>},</a:t>
             </a:r>
             <a:endParaRPr lang="en-US" sz="1000" dirty="0"/>
           </a:p>
-        </p:txBody>
-      </p:sp>
-      <p:sp>
-        <p:nvSpPr>
-          <p:cNvPr id="41" name="Text 39"/>
-          <p:cNvSpPr/>
-          <p:nvPr/>
-        </p:nvSpPr>
-        <p:spPr>
-          <a:xfrm>
-            <a:off x="6675120" y="5513832"/>
-            <a:ext cx="4937760" cy="310896"/>
-          </a:xfrm>
-          <a:prstGeom prst="rect">
-            <a:avLst/>
-          </a:prstGeom>
-          <a:noFill/>
-          <a:ln/>
-        </p:spPr>
-        <p:txBody>
-          <a:bodyPr wrap="square" lIns="0" tIns="0" rIns="0" bIns="0" rtlCol="0" anchor="ctr"/>
-          <a:lstStyle/>
-          <a:p>
-            <a:pPr marL="0" indent="0">
+          <a:p>
+            <a:pPr marL="0" indent="0">
+              <a:lnSpc>
+                <a:spcPct val="130000"/>
+              </a:lnSpc>
               <a:buNone/>
             </a:pPr>
             <a:r>
               <a:rPr lang="en-US" sz="1000" dirty="0">
                 <a:solidFill>
-                  <a:srgbClr val="8A8580"/>
-                </a:solidFill>
-                <a:latin typeface="Inter" pitchFamily="34" charset="0"/>
-                <a:ea typeface="Inter" pitchFamily="34" charset="-122"/>
-                <a:cs typeface="Inter" pitchFamily="34" charset="-120"/>
-              </a:rPr>
-              <a:t>Загрузка вложения (multipart)</a:t>
-            </a:r>
-            <a:endParaRPr lang="en-US" sz="1000" dirty="0"/>
-          </a:p>
-        </p:txBody>
-      </p:sp>
-      <p:sp>
-        <p:nvSpPr>
-          <p:cNvPr id="42" name="Shape 40"/>
-          <p:cNvSpPr/>
-          <p:nvPr/>
-        </p:nvSpPr>
-        <p:spPr>
-          <a:xfrm>
-            <a:off x="548640" y="5824728"/>
-            <a:ext cx="11064240" cy="310896"/>
-          </a:xfrm>
-          <a:prstGeom prst="rect">
-            <a:avLst/>
-          </a:prstGeom>
-          <a:solidFill>
-            <a:srgbClr val="EFEDE6"/>
-          </a:solidFill>
-          <a:ln w="12700">
-            <a:solidFill>
-              <a:srgbClr val="EFEDE6"/>
-            </a:solidFill>
-            <a:prstDash val="solid"/>
-          </a:ln>
-        </p:spPr>
-      </p:sp>
-      <p:sp>
-        <p:nvSpPr>
-          <p:cNvPr id="43" name="Text 41"/>
-          <p:cNvSpPr/>
-          <p:nvPr/>
-        </p:nvSpPr>
-        <p:spPr>
-          <a:xfrm>
-            <a:off x="548640" y="5861304"/>
-            <a:ext cx="914400" cy="237744"/>
-          </a:xfrm>
-          <a:prstGeom prst="rect">
-            <a:avLst/>
-          </a:prstGeom>
-          <a:noFill/>
-          <a:ln/>
-        </p:spPr>
-        <p:txBody>
-          <a:bodyPr wrap="square" lIns="0" tIns="0" rIns="0" bIns="0" rtlCol="0" anchor="ctr"/>
-          <a:lstStyle/>
-          <a:p>
-            <a:pPr marL="0" indent="0">
-              <a:buNone/>
-            </a:pPr>
-            <a:r>
-              <a:rPr lang="en-US" sz="900" b="1" kern="0" spc="200" dirty="0">
-                <a:solidFill>
-                  <a:srgbClr val="C97B5B"/>
-                </a:solidFill>
-                <a:latin typeface="Inter" pitchFamily="34" charset="0"/>
-                <a:ea typeface="Inter" pitchFamily="34" charset="-122"/>
-                <a:cs typeface="Inter" pitchFamily="34" charset="-120"/>
-              </a:rPr>
-              <a:t>POST</a:t>
-            </a:r>
-            <a:endParaRPr lang="en-US" sz="900" dirty="0"/>
-          </a:p>
-        </p:txBody>
-      </p:sp>
-      <p:sp>
-        <p:nvSpPr>
-          <p:cNvPr id="44" name="Text 42"/>
-          <p:cNvSpPr/>
-          <p:nvPr/>
-        </p:nvSpPr>
-        <p:spPr>
-          <a:xfrm>
-            <a:off x="1554480" y="5824728"/>
-            <a:ext cx="5029200" cy="310896"/>
-          </a:xfrm>
-          <a:prstGeom prst="rect">
-            <a:avLst/>
-          </a:prstGeom>
-          <a:noFill/>
-          <a:ln/>
-        </p:spPr>
-        <p:txBody>
-          <a:bodyPr wrap="square" lIns="0" tIns="0" rIns="0" bIns="0" rtlCol="0" anchor="ctr"/>
-          <a:lstStyle/>
-          <a:p>
-            <a:pPr marL="0" indent="0">
-              <a:buNone/>
-            </a:pPr>
-            <a:r>
-              <a:rPr lang="en-US" sz="1000" dirty="0">
-                <a:solidFill>
-                  <a:srgbClr val="0A0A0A"/>
+                  <a:srgbClr val="ECEAE4"/>
                 </a:solidFill>
                 <a:latin typeface="Consolas" pitchFamily="34" charset="0"/>
                 <a:ea typeface="Consolas" pitchFamily="34" charset="-122"/>
                 <a:cs typeface="Consolas" pitchFamily="34" charset="-120"/>
               </a:rPr>
-              <a:t>/invitations/group/{gid}/email</a:t>
+              <a:t>onError: (err, vars, ctx) =&gt; {</a:t>
             </a:r>
             <a:endParaRPr lang="en-US" sz="1000" dirty="0"/>
           </a:p>
-        </p:txBody>
-      </p:sp>
-      <p:sp>
-        <p:nvSpPr>
-          <p:cNvPr id="45" name="Text 43"/>
-          <p:cNvSpPr/>
-          <p:nvPr/>
-        </p:nvSpPr>
-        <p:spPr>
-          <a:xfrm>
-            <a:off x="6675120" y="5824728"/>
-            <a:ext cx="4937760" cy="310896"/>
-          </a:xfrm>
-          <a:prstGeom prst="rect">
-            <a:avLst/>
-          </a:prstGeom>
-          <a:noFill/>
-          <a:ln/>
-        </p:spPr>
-        <p:txBody>
-          <a:bodyPr wrap="square" lIns="0" tIns="0" rIns="0" bIns="0" rtlCol="0" anchor="ctr"/>
-          <a:lstStyle/>
-          <a:p>
-            <a:pPr marL="0" indent="0">
+          <a:p>
+            <a:pPr marL="0" indent="0">
+              <a:lnSpc>
+                <a:spcPct val="130000"/>
+              </a:lnSpc>
               <a:buNone/>
             </a:pPr>
             <a:r>
               <a:rPr lang="en-US" sz="1000" dirty="0">
                 <a:solidFill>
-                  <a:srgbClr val="8A8580"/>
-                </a:solidFill>
-                <a:latin typeface="Inter" pitchFamily="34" charset="0"/>
-                <a:ea typeface="Inter" pitchFamily="34" charset="-122"/>
-                <a:cs typeface="Inter" pitchFamily="34" charset="-120"/>
-              </a:rPr>
-              <a:t>Приглашение в группу по email</a:t>
+                  <a:srgbClr val="ECEAE4"/>
+                </a:solidFill>
+                <a:latin typeface="Consolas" pitchFamily="34" charset="0"/>
+                <a:ea typeface="Consolas" pitchFamily="34" charset="-122"/>
+                <a:cs typeface="Consolas" pitchFamily="34" charset="-120"/>
+              </a:rPr>
+              <a:t>  qc.setQueryData(tasksKey(boardId), ctx.prev);</a:t>
             </a:r>
             <a:endParaRPr lang="en-US" sz="1000" dirty="0"/>
           </a:p>
-        </p:txBody>
-      </p:sp>
-      <p:sp>
-        <p:nvSpPr>
-          <p:cNvPr id="46" name="Text 44"/>
-          <p:cNvSpPr/>
-          <p:nvPr/>
-        </p:nvSpPr>
-        <p:spPr>
-          <a:xfrm>
-            <a:off x="548640" y="6400800"/>
-            <a:ext cx="3657600" cy="320040"/>
-          </a:xfrm>
-          <a:prstGeom prst="rect">
-            <a:avLst/>
-          </a:prstGeom>
-          <a:noFill/>
-          <a:ln/>
-        </p:spPr>
-        <p:txBody>
-          <a:bodyPr wrap="square" lIns="0" tIns="0" rIns="0" bIns="0" rtlCol="0" anchor="ctr"/>
-          <a:lstStyle/>
-          <a:p>
-            <a:pPr marL="0" indent="0">
-              <a:buNone/>
-            </a:pPr>
-            <a:r>
-              <a:rPr lang="en-US" sz="800" kern="0" spc="300" dirty="0">
-                <a:solidFill>
-                  <a:srgbClr val="8A8580"/>
-                </a:solidFill>
-                <a:latin typeface="Inter" pitchFamily="34" charset="0"/>
-                <a:ea typeface="Inter" pitchFamily="34" charset="-122"/>
-                <a:cs typeface="Inter" pitchFamily="34" charset="-120"/>
-              </a:rPr>
-              <a:t>KANBAN  /  </a:t>
-            </a:r>
-            <a:r>
-              <a:rPr lang="ru-RU" sz="800" kern="0" spc="300" dirty="0">
-                <a:solidFill>
-                  <a:srgbClr val="8A8580"/>
-                </a:solidFill>
-                <a:latin typeface="Inter" pitchFamily="34" charset="0"/>
-                <a:ea typeface="Inter" pitchFamily="34" charset="-122"/>
-                <a:cs typeface="Inter" pitchFamily="34" charset="-120"/>
-              </a:rPr>
-              <a:t>9</a:t>
-            </a:r>
-            <a:r>
-              <a:rPr lang="en-US" sz="800" kern="0" spc="300" dirty="0">
-                <a:solidFill>
-                  <a:srgbClr val="8A8580"/>
-                </a:solidFill>
-                <a:latin typeface="Inter" pitchFamily="34" charset="0"/>
-                <a:ea typeface="Inter" pitchFamily="34" charset="-122"/>
-                <a:cs typeface="Inter" pitchFamily="34" charset="-120"/>
-              </a:rPr>
-              <a:t> — </a:t>
-            </a:r>
-            <a:r>
-              <a:rPr lang="ru-RU" sz="800" kern="0" spc="300" dirty="0">
-                <a:solidFill>
-                  <a:srgbClr val="8A8580"/>
-                </a:solidFill>
-                <a:latin typeface="Inter" pitchFamily="34" charset="0"/>
-                <a:ea typeface="Inter" pitchFamily="34" charset="-122"/>
-                <a:cs typeface="Inter" pitchFamily="34" charset="-120"/>
-              </a:rPr>
-              <a:t>17</a:t>
-            </a:r>
-            <a:endParaRPr lang="en-US" sz="800" dirty="0"/>
+          <a:p>
+            <a:pPr marL="0" indent="0">
+              <a:lnSpc>
+                <a:spcPct val="130000"/>
+              </a:lnSpc>
+              <a:buNone/>
+            </a:pPr>
+            <a:r>
+              <a:rPr lang="en-US" sz="1000" dirty="0">
+                <a:solidFill>
+                  <a:srgbClr val="ECEAE4"/>
+                </a:solidFill>
+                <a:latin typeface="Consolas" pitchFamily="34" charset="0"/>
+                <a:ea typeface="Consolas" pitchFamily="34" charset="-122"/>
+                <a:cs typeface="Consolas" pitchFamily="34" charset="-120"/>
+              </a:rPr>
+              <a:t>},</a:t>
+            </a:r>
+            <a:endParaRPr lang="en-US" sz="1000" dirty="0"/>
+          </a:p>
+          <a:p>
+            <a:pPr marL="0" indent="0">
+              <a:lnSpc>
+                <a:spcPct val="130000"/>
+              </a:lnSpc>
+              <a:buNone/>
+            </a:pPr>
+            <a:r>
+              <a:rPr lang="en-US" sz="1000" dirty="0">
+                <a:solidFill>
+                  <a:srgbClr val="ECEAE4"/>
+                </a:solidFill>
+                <a:latin typeface="Consolas" pitchFamily="34" charset="0"/>
+                <a:ea typeface="Consolas" pitchFamily="34" charset="-122"/>
+                <a:cs typeface="Consolas" pitchFamily="34" charset="-120"/>
+              </a:rPr>
+              <a:t>onSettled: () =&gt; {</a:t>
+            </a:r>
+            <a:endParaRPr lang="en-US" sz="1000" dirty="0"/>
+          </a:p>
+          <a:p>
+            <a:pPr marL="0" indent="0">
+              <a:lnSpc>
+                <a:spcPct val="130000"/>
+              </a:lnSpc>
+              <a:buNone/>
+            </a:pPr>
+            <a:r>
+              <a:rPr lang="en-US" sz="1000" dirty="0">
+                <a:solidFill>
+                  <a:srgbClr val="ECEAE4"/>
+                </a:solidFill>
+                <a:latin typeface="Consolas" pitchFamily="34" charset="0"/>
+                <a:ea typeface="Consolas" pitchFamily="34" charset="-122"/>
+                <a:cs typeface="Consolas" pitchFamily="34" charset="-120"/>
+              </a:rPr>
+              <a:t>  qc.invalidateQueries(tasksKey(boardId));</a:t>
+            </a:r>
+            <a:endParaRPr lang="en-US" sz="1000" dirty="0"/>
+          </a:p>
+          <a:p>
+            <a:pPr marL="0" indent="0">
+              <a:lnSpc>
+                <a:spcPct val="130000"/>
+              </a:lnSpc>
+              <a:buNone/>
+            </a:pPr>
+            <a:r>
+              <a:rPr lang="en-US" sz="1000" dirty="0">
+                <a:solidFill>
+                  <a:srgbClr val="ECEAE4"/>
+                </a:solidFill>
+                <a:latin typeface="Consolas" pitchFamily="34" charset="0"/>
+                <a:ea typeface="Consolas" pitchFamily="34" charset="-122"/>
+                <a:cs typeface="Consolas" pitchFamily="34" charset="-120"/>
+              </a:rPr>
+              <a:t>}</a:t>
+            </a:r>
+            <a:endParaRPr lang="en-US" sz="1000" dirty="0"/>
           </a:p>
         </p:txBody>
       </p:sp>
